--- a/materials/PREP/PREP_1A_All_about_me.pptx
+++ b/materials/PREP/PREP_1A_All_about_me.pptx
@@ -2381,7 +2381,7 @@
           </a:solidFill>
           <a:ln w="28575">
             <a:solidFill>
-              <a:srgbClr val="FFFFFF"/>
+              <a:srgbClr val="F7A6C4"/>
             </a:solidFill>
           </a:ln>
           <a:effectLst>
@@ -3184,7 +3184,7 @@
           </a:solidFill>
           <a:ln w="28575">
             <a:solidFill>
-              <a:srgbClr val="FFFFFF"/>
+              <a:srgbClr val="A8E5BE"/>
             </a:solidFill>
           </a:ln>
           <a:effectLst>
@@ -3571,7 +3571,7 @@
           </a:solidFill>
           <a:ln w="28575">
             <a:solidFill>
-              <a:srgbClr val="C9D3E2"/>
+              <a:srgbClr val="A9D3F5"/>
             </a:solidFill>
           </a:ln>
         </p:spPr>
@@ -3620,7 +3620,7 @@
           </a:solidFill>
           <a:ln w="28575">
             <a:solidFill>
-              <a:srgbClr val="D9CCF5"/>
+              <a:srgbClr val="CDBFF3"/>
             </a:solidFill>
           </a:ln>
         </p:spPr>
@@ -6864,7 +6864,7 @@
           </a:solidFill>
           <a:ln w="28575">
             <a:solidFill>
-              <a:srgbClr val="FFFFFF"/>
+              <a:srgbClr val="A9D3F5"/>
             </a:solidFill>
           </a:ln>
           <a:effectLst>
@@ -7251,7 +7251,7 @@
           </a:solidFill>
           <a:ln w="28575">
             <a:solidFill>
-              <a:srgbClr val="C9D3E2"/>
+              <a:srgbClr val="A9D3F5"/>
             </a:solidFill>
           </a:ln>
         </p:spPr>
@@ -7300,7 +7300,7 @@
           </a:solidFill>
           <a:ln w="28575">
             <a:solidFill>
-              <a:srgbClr val="D9CCF5"/>
+              <a:srgbClr val="CDBFF3"/>
             </a:solidFill>
           </a:ln>
         </p:spPr>
@@ -7424,7 +7424,7 @@
           </a:solidFill>
           <a:ln w="28575">
             <a:solidFill>
-              <a:srgbClr val="FFFFFF"/>
+              <a:srgbClr val="F7A6C4"/>
             </a:solidFill>
           </a:ln>
           <a:effectLst>
@@ -7574,7 +7574,7 @@
           </a:solidFill>
           <a:ln w="28575">
             <a:solidFill>
-              <a:srgbClr val="FFFFFF"/>
+              <a:srgbClr val="A9D3F5"/>
             </a:solidFill>
           </a:ln>
           <a:effectLst>
@@ -7724,7 +7724,7 @@
           </a:solidFill>
           <a:ln w="28575">
             <a:solidFill>
-              <a:srgbClr val="FFFFFF"/>
+              <a:srgbClr val="A8E5BE"/>
             </a:solidFill>
           </a:ln>
           <a:effectLst>
@@ -7874,7 +7874,7 @@
           </a:solidFill>
           <a:ln w="28575">
             <a:solidFill>
-              <a:srgbClr val="FFFFFF"/>
+              <a:srgbClr val="FFE07A"/>
             </a:solidFill>
           </a:ln>
           <a:effectLst>
@@ -8024,7 +8024,7 @@
           </a:solidFill>
           <a:ln w="28575">
             <a:solidFill>
-              <a:srgbClr val="FFFFFF"/>
+              <a:srgbClr val="F7A6C4"/>
             </a:solidFill>
           </a:ln>
           <a:effectLst>
@@ -8174,7 +8174,7 @@
           </a:solidFill>
           <a:ln w="28575">
             <a:solidFill>
-              <a:srgbClr val="FFFFFF"/>
+              <a:srgbClr val="A9D3F5"/>
             </a:solidFill>
           </a:ln>
           <a:effectLst>
@@ -8714,7 +8714,7 @@
           </a:solidFill>
           <a:ln w="28575">
             <a:solidFill>
-              <a:srgbClr val="FFFFFF"/>
+              <a:srgbClr val="A8E5BE"/>
             </a:solidFill>
           </a:ln>
           <a:effectLst>
@@ -9020,7 +9020,7 @@
           </a:solidFill>
           <a:ln w="28575">
             <a:solidFill>
-              <a:srgbClr val="C9D3E2"/>
+              <a:srgbClr val="A9D3F5"/>
             </a:solidFill>
           </a:ln>
         </p:spPr>
@@ -9069,7 +9069,7 @@
           </a:solidFill>
           <a:ln w="28575">
             <a:solidFill>
-              <a:srgbClr val="D9CCF5"/>
+              <a:srgbClr val="CDBFF3"/>
             </a:solidFill>
           </a:ln>
         </p:spPr>
@@ -9193,7 +9193,7 @@
           </a:solidFill>
           <a:ln w="28575">
             <a:solidFill>
-              <a:srgbClr val="FFFFFF"/>
+              <a:srgbClr val="F7A6C4"/>
             </a:solidFill>
           </a:ln>
           <a:effectLst>
@@ -9374,7 +9374,7 @@
           </a:solidFill>
           <a:ln w="28575">
             <a:solidFill>
-              <a:srgbClr val="FFFFFF"/>
+              <a:srgbClr val="A9D3F5"/>
             </a:solidFill>
           </a:ln>
           <a:effectLst>
@@ -9555,7 +9555,7 @@
           </a:solidFill>
           <a:ln w="28575">
             <a:solidFill>
-              <a:srgbClr val="FFFFFF"/>
+              <a:srgbClr val="A8E5BE"/>
             </a:solidFill>
           </a:ln>
           <a:effectLst>
@@ -9736,7 +9736,7 @@
           </a:solidFill>
           <a:ln w="28575">
             <a:solidFill>
-              <a:srgbClr val="FFFFFF"/>
+              <a:srgbClr val="FFE07A"/>
             </a:solidFill>
           </a:ln>
           <a:effectLst>
@@ -9917,7 +9917,7 @@
           </a:solidFill>
           <a:ln w="28575">
             <a:solidFill>
-              <a:srgbClr val="FFFFFF"/>
+              <a:srgbClr val="F7A6C4"/>
             </a:solidFill>
           </a:ln>
           <a:effectLst>
@@ -10098,7 +10098,7 @@
           </a:solidFill>
           <a:ln w="28575">
             <a:solidFill>
-              <a:srgbClr val="FFFFFF"/>
+              <a:srgbClr val="A9D3F5"/>
             </a:solidFill>
           </a:ln>
           <a:effectLst>
@@ -10669,7 +10669,7 @@
           </a:solidFill>
           <a:ln w="28575">
             <a:solidFill>
-              <a:srgbClr val="FFFFFF"/>
+              <a:srgbClr val="CDBFF3"/>
             </a:solidFill>
           </a:ln>
           <a:effectLst>
@@ -11056,7 +11056,7 @@
           </a:solidFill>
           <a:ln w="28575">
             <a:solidFill>
-              <a:srgbClr val="C9D3E2"/>
+              <a:srgbClr val="A9D3F5"/>
             </a:solidFill>
           </a:ln>
         </p:spPr>
@@ -11105,7 +11105,7 @@
           </a:solidFill>
           <a:ln w="28575">
             <a:solidFill>
-              <a:srgbClr val="D9CCF5"/>
+              <a:srgbClr val="CDBFF3"/>
             </a:solidFill>
           </a:ln>
         </p:spPr>
@@ -11617,7 +11617,7 @@
           </a:solidFill>
           <a:ln w="28575">
             <a:solidFill>
-              <a:srgbClr val="FFFFFF"/>
+              <a:srgbClr val="F7A6C4"/>
             </a:solidFill>
           </a:ln>
           <a:effectLst>
@@ -11771,7 +11771,7 @@
           </a:solidFill>
           <a:ln w="28575">
             <a:solidFill>
-              <a:srgbClr val="FFFFFF"/>
+              <a:srgbClr val="A9D3F5"/>
             </a:solidFill>
           </a:ln>
           <a:effectLst>
@@ -11925,7 +11925,7 @@
           </a:solidFill>
           <a:ln w="28575">
             <a:solidFill>
-              <a:srgbClr val="FFFFFF"/>
+              <a:srgbClr val="A8E5BE"/>
             </a:solidFill>
           </a:ln>
           <a:effectLst>
@@ -12079,7 +12079,7 @@
           </a:solidFill>
           <a:ln w="28575">
             <a:solidFill>
-              <a:srgbClr val="FFFFFF"/>
+              <a:srgbClr val="FFE07A"/>
             </a:solidFill>
           </a:ln>
           <a:effectLst>
@@ -12233,7 +12233,7 @@
           </a:solidFill>
           <a:ln w="28575">
             <a:solidFill>
-              <a:srgbClr val="FFFFFF"/>
+              <a:srgbClr val="F7A6C4"/>
             </a:solidFill>
           </a:ln>
           <a:effectLst>
@@ -12387,7 +12387,7 @@
           </a:solidFill>
           <a:ln w="28575">
             <a:solidFill>
-              <a:srgbClr val="FFFFFF"/>
+              <a:srgbClr val="A9D3F5"/>
             </a:solidFill>
           </a:ln>
           <a:effectLst>
@@ -13110,7 +13110,7 @@
           </a:solidFill>
           <a:ln w="28575">
             <a:solidFill>
-              <a:srgbClr val="FFFFFF"/>
+              <a:srgbClr val="CDBFF3"/>
             </a:solidFill>
           </a:ln>
           <a:effectLst>
@@ -13416,7 +13416,7 @@
           </a:solidFill>
           <a:ln w="28575">
             <a:solidFill>
-              <a:srgbClr val="C9D3E2"/>
+              <a:srgbClr val="A9D3F5"/>
             </a:solidFill>
           </a:ln>
         </p:spPr>
@@ -13465,7 +13465,7 @@
           </a:solidFill>
           <a:ln w="28575">
             <a:solidFill>
-              <a:srgbClr val="D9CCF5"/>
+              <a:srgbClr val="CDBFF3"/>
             </a:solidFill>
           </a:ln>
         </p:spPr>
@@ -13589,7 +13589,7 @@
           </a:solidFill>
           <a:ln w="28575">
             <a:solidFill>
-              <a:srgbClr val="FFFFFF"/>
+              <a:srgbClr val="F7A6C4"/>
             </a:solidFill>
           </a:ln>
           <a:effectLst>
@@ -13695,7 +13695,7 @@
           </a:solidFill>
           <a:ln w="28575">
             <a:solidFill>
-              <a:srgbClr val="FFFFFF"/>
+              <a:srgbClr val="A9D3F5"/>
             </a:solidFill>
           </a:ln>
           <a:effectLst>
@@ -13801,7 +13801,7 @@
           </a:solidFill>
           <a:ln w="28575">
             <a:solidFill>
-              <a:srgbClr val="FFFFFF"/>
+              <a:srgbClr val="A8E5BE"/>
             </a:solidFill>
           </a:ln>
           <a:effectLst>
@@ -13907,7 +13907,7 @@
           </a:solidFill>
           <a:ln w="28575">
             <a:solidFill>
-              <a:srgbClr val="FFFFFF"/>
+              <a:srgbClr val="FFE07A"/>
             </a:solidFill>
           </a:ln>
           <a:effectLst>
@@ -14013,7 +14013,7 @@
           </a:solidFill>
           <a:ln w="28575">
             <a:solidFill>
-              <a:srgbClr val="FFFFFF"/>
+              <a:srgbClr val="F7A6C4"/>
             </a:solidFill>
           </a:ln>
           <a:effectLst>
@@ -14119,7 +14119,7 @@
           </a:solidFill>
           <a:ln w="28575">
             <a:solidFill>
-              <a:srgbClr val="FFFFFF"/>
+              <a:srgbClr val="A9D3F5"/>
             </a:solidFill>
           </a:ln>
           <a:effectLst>
@@ -14825,7 +14825,7 @@
           </a:solidFill>
           <a:ln w="28575">
             <a:solidFill>
-              <a:srgbClr val="FFFFFF"/>
+              <a:srgbClr val="F7A6C4"/>
             </a:solidFill>
           </a:ln>
           <a:effectLst>
@@ -15131,7 +15131,7 @@
           </a:solidFill>
           <a:ln w="28575">
             <a:solidFill>
-              <a:srgbClr val="C9D3E2"/>
+              <a:srgbClr val="A9D3F5"/>
             </a:solidFill>
           </a:ln>
         </p:spPr>
@@ -15180,7 +15180,7 @@
           </a:solidFill>
           <a:ln w="28575">
             <a:solidFill>
-              <a:srgbClr val="D9CCF5"/>
+              <a:srgbClr val="CDBFF3"/>
             </a:solidFill>
           </a:ln>
         </p:spPr>
@@ -15530,7 +15530,7 @@
           </a:solidFill>
           <a:ln w="28575">
             <a:solidFill>
-              <a:srgbClr val="FFFFFF"/>
+              <a:srgbClr val="F7A6C4"/>
             </a:solidFill>
           </a:ln>
           <a:effectLst>
@@ -15655,7 +15655,7 @@
           </a:solidFill>
           <a:ln w="28575">
             <a:solidFill>
-              <a:srgbClr val="FFFFFF"/>
+              <a:srgbClr val="A9D3F5"/>
             </a:solidFill>
           </a:ln>
           <a:effectLst>
@@ -15780,7 +15780,7 @@
           </a:solidFill>
           <a:ln w="28575">
             <a:solidFill>
-              <a:srgbClr val="FFFFFF"/>
+              <a:srgbClr val="A8E5BE"/>
             </a:solidFill>
           </a:ln>
           <a:effectLst>
@@ -16241,7 +16241,7 @@
           </a:solidFill>
           <a:ln w="28575">
             <a:solidFill>
-              <a:srgbClr val="FFFFFF"/>
+              <a:srgbClr val="A9D3F5"/>
             </a:solidFill>
           </a:ln>
           <a:effectLst>
@@ -16466,7 +16466,7 @@
           </a:solidFill>
           <a:ln w="28575">
             <a:solidFill>
-              <a:srgbClr val="C9D3E2"/>
+              <a:srgbClr val="A9D3F5"/>
             </a:solidFill>
           </a:ln>
         </p:spPr>
@@ -16515,7 +16515,7 @@
           </a:solidFill>
           <a:ln w="28575">
             <a:solidFill>
-              <a:srgbClr val="D9CCF5"/>
+              <a:srgbClr val="CDBFF3"/>
             </a:solidFill>
           </a:ln>
         </p:spPr>
@@ -16639,7 +16639,7 @@
           </a:solidFill>
           <a:ln w="28575">
             <a:solidFill>
-              <a:srgbClr val="FFFFFF"/>
+              <a:srgbClr val="F7A6C4"/>
             </a:solidFill>
           </a:ln>
           <a:effectLst>
@@ -16747,7 +16747,7 @@
           </a:solidFill>
           <a:ln w="28575">
             <a:solidFill>
-              <a:srgbClr val="FFFFFF"/>
+              <a:srgbClr val="A9D3F5"/>
             </a:solidFill>
           </a:ln>
           <a:effectLst>
@@ -16855,7 +16855,7 @@
           </a:solidFill>
           <a:ln w="28575">
             <a:solidFill>
-              <a:srgbClr val="FFFFFF"/>
+              <a:srgbClr val="A8E5BE"/>
             </a:solidFill>
           </a:ln>
           <a:effectLst>
@@ -17237,7 +17237,7 @@
           </a:solidFill>
           <a:ln w="28575">
             <a:solidFill>
-              <a:srgbClr val="FFFFFF"/>
+              <a:srgbClr val="A8E5BE"/>
             </a:solidFill>
           </a:ln>
           <a:effectLst>
@@ -17543,7 +17543,7 @@
           </a:solidFill>
           <a:ln w="28575">
             <a:solidFill>
-              <a:srgbClr val="C9D3E2"/>
+              <a:srgbClr val="A9D3F5"/>
             </a:solidFill>
           </a:ln>
         </p:spPr>
@@ -17592,7 +17592,7 @@
           </a:solidFill>
           <a:ln w="28575">
             <a:solidFill>
-              <a:srgbClr val="D9CCF5"/>
+              <a:srgbClr val="CDBFF3"/>
             </a:solidFill>
           </a:ln>
         </p:spPr>
@@ -18876,7 +18876,7 @@
           </a:solidFill>
           <a:ln w="28575">
             <a:solidFill>
-              <a:srgbClr val="FFFFFF"/>
+              <a:srgbClr val="F7A6C4"/>
             </a:solidFill>
           </a:ln>
           <a:effectLst>
@@ -19182,7 +19182,7 @@
           </a:solidFill>
           <a:ln w="28575">
             <a:solidFill>
-              <a:srgbClr val="C9D3E2"/>
+              <a:srgbClr val="A9D3F5"/>
             </a:solidFill>
           </a:ln>
         </p:spPr>
@@ -19231,7 +19231,7 @@
           </a:solidFill>
           <a:ln w="28575">
             <a:solidFill>
-              <a:srgbClr val="D9CCF5"/>
+              <a:srgbClr val="CDBFF3"/>
             </a:solidFill>
           </a:ln>
         </p:spPr>
@@ -19628,7 +19628,7 @@
           </a:solidFill>
           <a:ln w="28575">
             <a:solidFill>
-              <a:srgbClr val="FFFFFF"/>
+              <a:srgbClr val="F7A6C4"/>
             </a:solidFill>
           </a:ln>
           <a:effectLst>
@@ -19778,7 +19778,7 @@
           </a:solidFill>
           <a:ln w="28575">
             <a:solidFill>
-              <a:srgbClr val="FFFFFF"/>
+              <a:srgbClr val="A9D3F5"/>
             </a:solidFill>
           </a:ln>
           <a:effectLst>
@@ -19928,7 +19928,7 @@
           </a:solidFill>
           <a:ln w="28575">
             <a:solidFill>
-              <a:srgbClr val="FFFFFF"/>
+              <a:srgbClr val="A8E5BE"/>
             </a:solidFill>
           </a:ln>
           <a:effectLst>
@@ -20078,7 +20078,7 @@
           </a:solidFill>
           <a:ln w="28575">
             <a:solidFill>
-              <a:srgbClr val="FFFFFF"/>
+              <a:srgbClr val="FFE07A"/>
             </a:solidFill>
           </a:ln>
           <a:effectLst>
@@ -20512,7 +20512,7 @@
           </a:solidFill>
           <a:ln w="28575">
             <a:solidFill>
-              <a:srgbClr val="FFFFFF"/>
+              <a:srgbClr val="A8E5BE"/>
             </a:solidFill>
           </a:ln>
           <a:effectLst>
@@ -20818,7 +20818,7 @@
           </a:solidFill>
           <a:ln w="28575">
             <a:solidFill>
-              <a:srgbClr val="C9D3E2"/>
+              <a:srgbClr val="A9D3F5"/>
             </a:solidFill>
           </a:ln>
         </p:spPr>
@@ -20867,7 +20867,7 @@
           </a:solidFill>
           <a:ln w="28575">
             <a:solidFill>
-              <a:srgbClr val="D9CCF5"/>
+              <a:srgbClr val="CDBFF3"/>
             </a:solidFill>
           </a:ln>
         </p:spPr>
@@ -23634,7 +23634,7 @@
           </a:solidFill>
           <a:ln w="28575">
             <a:solidFill>
-              <a:srgbClr val="FFFFFF"/>
+              <a:srgbClr val="F7A6C4"/>
             </a:solidFill>
           </a:ln>
           <a:effectLst>
@@ -24021,7 +24021,7 @@
           </a:solidFill>
           <a:ln w="28575">
             <a:solidFill>
-              <a:srgbClr val="C9D3E2"/>
+              <a:srgbClr val="A9D3F5"/>
             </a:solidFill>
           </a:ln>
         </p:spPr>
@@ -24070,7 +24070,7 @@
           </a:solidFill>
           <a:ln w="28575">
             <a:solidFill>
-              <a:srgbClr val="D9CCF5"/>
+              <a:srgbClr val="CDBFF3"/>
             </a:solidFill>
           </a:ln>
         </p:spPr>
@@ -24502,7 +24502,7 @@
           </a:solidFill>
           <a:ln w="28575">
             <a:solidFill>
-              <a:srgbClr val="FFFFFF"/>
+              <a:srgbClr val="F7A6C4"/>
             </a:solidFill>
           </a:ln>
           <a:effectLst>
@@ -24627,7 +24627,7 @@
           </a:solidFill>
           <a:ln w="28575">
             <a:solidFill>
-              <a:srgbClr val="FFFFFF"/>
+              <a:srgbClr val="A9D3F5"/>
             </a:solidFill>
           </a:ln>
           <a:effectLst>
@@ -24752,7 +24752,7 @@
           </a:solidFill>
           <a:ln w="28575">
             <a:solidFill>
-              <a:srgbClr val="FFFFFF"/>
+              <a:srgbClr val="A8E5BE"/>
             </a:solidFill>
           </a:ln>
           <a:effectLst>
@@ -24877,7 +24877,7 @@
           </a:solidFill>
           <a:ln w="28575">
             <a:solidFill>
-              <a:srgbClr val="FFFFFF"/>
+              <a:srgbClr val="FFE07A"/>
             </a:solidFill>
           </a:ln>
           <a:effectLst>
@@ -25426,7 +25426,7 @@
           </a:solidFill>
           <a:ln w="28575">
             <a:solidFill>
-              <a:srgbClr val="FFFFFF"/>
+              <a:srgbClr val="A9D3F5"/>
             </a:solidFill>
           </a:ln>
           <a:effectLst>
@@ -25813,7 +25813,7 @@
           </a:solidFill>
           <a:ln w="28575">
             <a:solidFill>
-              <a:srgbClr val="C9D3E2"/>
+              <a:srgbClr val="A9D3F5"/>
             </a:solidFill>
           </a:ln>
         </p:spPr>
@@ -25862,7 +25862,7 @@
           </a:solidFill>
           <a:ln w="28575">
             <a:solidFill>
-              <a:srgbClr val="D9CCF5"/>
+              <a:srgbClr val="CDBFF3"/>
             </a:solidFill>
           </a:ln>
         </p:spPr>
@@ -25986,7 +25986,7 @@
           </a:solidFill>
           <a:ln w="28575">
             <a:solidFill>
-              <a:srgbClr val="FFFFFF"/>
+              <a:srgbClr val="F7A6C4"/>
             </a:solidFill>
           </a:ln>
           <a:effectLst>
@@ -26167,7 +26167,7 @@
           </a:solidFill>
           <a:ln w="28575">
             <a:solidFill>
-              <a:srgbClr val="FFFFFF"/>
+              <a:srgbClr val="A9D3F5"/>
             </a:solidFill>
           </a:ln>
           <a:effectLst>
@@ -26348,7 +26348,7 @@
           </a:solidFill>
           <a:ln w="28575">
             <a:solidFill>
-              <a:srgbClr val="FFFFFF"/>
+              <a:srgbClr val="A8E5BE"/>
             </a:solidFill>
           </a:ln>
           <a:effectLst>
@@ -26529,7 +26529,7 @@
           </a:solidFill>
           <a:ln w="28575">
             <a:solidFill>
-              <a:srgbClr val="FFFFFF"/>
+              <a:srgbClr val="FFE07A"/>
             </a:solidFill>
           </a:ln>
           <a:effectLst>
@@ -26710,7 +26710,7 @@
           </a:solidFill>
           <a:ln w="28575">
             <a:solidFill>
-              <a:srgbClr val="FFFFFF"/>
+              <a:srgbClr val="F7A6C4"/>
             </a:solidFill>
           </a:ln>
           <a:effectLst>
@@ -26891,7 +26891,7 @@
           </a:solidFill>
           <a:ln w="28575">
             <a:solidFill>
-              <a:srgbClr val="FFFFFF"/>
+              <a:srgbClr val="A9D3F5"/>
             </a:solidFill>
           </a:ln>
           <a:effectLst>
@@ -27462,7 +27462,7 @@
           </a:solidFill>
           <a:ln w="28575">
             <a:solidFill>
-              <a:srgbClr val="FFFFFF"/>
+              <a:srgbClr val="F7A6C4"/>
             </a:solidFill>
           </a:ln>
           <a:effectLst>
@@ -27768,7 +27768,7 @@
           </a:solidFill>
           <a:ln w="28575">
             <a:solidFill>
-              <a:srgbClr val="C9D3E2"/>
+              <a:srgbClr val="A9D3F5"/>
             </a:solidFill>
           </a:ln>
         </p:spPr>
@@ -27817,7 +27817,7 @@
           </a:solidFill>
           <a:ln w="28575">
             <a:solidFill>
-              <a:srgbClr val="D9CCF5"/>
+              <a:srgbClr val="CDBFF3"/>
             </a:solidFill>
           </a:ln>
         </p:spPr>
@@ -28214,7 +28214,7 @@
           </a:solidFill>
           <a:ln w="28575">
             <a:solidFill>
-              <a:srgbClr val="FFFFFF"/>
+              <a:srgbClr val="F7A6C4"/>
             </a:solidFill>
           </a:ln>
           <a:effectLst>
@@ -28364,7 +28364,7 @@
           </a:solidFill>
           <a:ln w="28575">
             <a:solidFill>
-              <a:srgbClr val="FFFFFF"/>
+              <a:srgbClr val="A9D3F5"/>
             </a:solidFill>
           </a:ln>
           <a:effectLst>
@@ -28514,7 +28514,7 @@
           </a:solidFill>
           <a:ln w="28575">
             <a:solidFill>
-              <a:srgbClr val="FFFFFF"/>
+              <a:srgbClr val="A8E5BE"/>
             </a:solidFill>
           </a:ln>
           <a:effectLst>
@@ -28664,7 +28664,7 @@
           </a:solidFill>
           <a:ln w="28575">
             <a:solidFill>
-              <a:srgbClr val="FFFFFF"/>
+              <a:srgbClr val="FFE07A"/>
             </a:solidFill>
           </a:ln>
           <a:effectLst>
@@ -28814,7 +28814,7 @@
           </a:solidFill>
           <a:ln w="28575">
             <a:solidFill>
-              <a:srgbClr val="FFFFFF"/>
+              <a:srgbClr val="F7A6C4"/>
             </a:solidFill>
           </a:ln>
           <a:effectLst>
@@ -28964,7 +28964,7 @@
           </a:solidFill>
           <a:ln w="28575">
             <a:solidFill>
-              <a:srgbClr val="FFFFFF"/>
+              <a:srgbClr val="A9D3F5"/>
             </a:solidFill>
           </a:ln>
           <a:effectLst>
@@ -29504,7 +29504,7 @@
           </a:solidFill>
           <a:ln w="28575">
             <a:solidFill>
-              <a:srgbClr val="FFFFFF"/>
+              <a:srgbClr val="F7A6C4"/>
             </a:solidFill>
           </a:ln>
           <a:effectLst>
@@ -29810,7 +29810,7 @@
           </a:solidFill>
           <a:ln w="28575">
             <a:solidFill>
-              <a:srgbClr val="C9D3E2"/>
+              <a:srgbClr val="A9D3F5"/>
             </a:solidFill>
           </a:ln>
         </p:spPr>
@@ -29859,7 +29859,7 @@
           </a:solidFill>
           <a:ln w="28575">
             <a:solidFill>
-              <a:srgbClr val="D9CCF5"/>
+              <a:srgbClr val="CDBFF3"/>
             </a:solidFill>
           </a:ln>
         </p:spPr>
@@ -30233,7 +30233,7 @@
           </a:solidFill>
           <a:ln w="28575">
             <a:solidFill>
-              <a:srgbClr val="FFFFFF"/>
+              <a:srgbClr val="F7A6C4"/>
             </a:solidFill>
           </a:ln>
           <a:effectLst>
@@ -30358,7 +30358,7 @@
           </a:solidFill>
           <a:ln w="28575">
             <a:solidFill>
-              <a:srgbClr val="FFFFFF"/>
+              <a:srgbClr val="A9D3F5"/>
             </a:solidFill>
           </a:ln>
           <a:effectLst>
@@ -30483,7 +30483,7 @@
           </a:solidFill>
           <a:ln w="28575">
             <a:solidFill>
-              <a:srgbClr val="FFFFFF"/>
+              <a:srgbClr val="A8E5BE"/>
             </a:solidFill>
           </a:ln>
           <a:effectLst>
@@ -30608,7 +30608,7 @@
           </a:solidFill>
           <a:ln w="28575">
             <a:solidFill>
-              <a:srgbClr val="FFFFFF"/>
+              <a:srgbClr val="FFE07A"/>
             </a:solidFill>
           </a:ln>
           <a:effectLst>
@@ -31157,7 +31157,7 @@
           </a:solidFill>
           <a:ln w="28575">
             <a:solidFill>
-              <a:srgbClr val="FFFFFF"/>
+              <a:srgbClr val="F7A6C4"/>
             </a:solidFill>
           </a:ln>
           <a:effectLst>
@@ -31544,7 +31544,7 @@
           </a:solidFill>
           <a:ln w="28575">
             <a:solidFill>
-              <a:srgbClr val="C9D3E2"/>
+              <a:srgbClr val="A9D3F5"/>
             </a:solidFill>
           </a:ln>
         </p:spPr>
@@ -31593,7 +31593,7 @@
           </a:solidFill>
           <a:ln w="28575">
             <a:solidFill>
-              <a:srgbClr val="D9CCF5"/>
+              <a:srgbClr val="CDBFF3"/>
             </a:solidFill>
           </a:ln>
         </p:spPr>
@@ -32001,7 +32001,7 @@
           </a:solidFill>
           <a:ln w="28575">
             <a:solidFill>
-              <a:srgbClr val="FFFFFF"/>
+              <a:srgbClr val="F7A6C4"/>
             </a:solidFill>
           </a:ln>
           <a:effectLst>
@@ -32126,7 +32126,7 @@
           </a:solidFill>
           <a:ln w="28575">
             <a:solidFill>
-              <a:srgbClr val="FFFFFF"/>
+              <a:srgbClr val="A9D3F5"/>
             </a:solidFill>
           </a:ln>
           <a:effectLst>
@@ -32251,7 +32251,7 @@
           </a:solidFill>
           <a:ln w="28575">
             <a:solidFill>
-              <a:srgbClr val="FFFFFF"/>
+              <a:srgbClr val="A8E5BE"/>
             </a:solidFill>
           </a:ln>
           <a:effectLst>
@@ -32712,7 +32712,7 @@
           </a:solidFill>
           <a:ln w="28575">
             <a:solidFill>
-              <a:srgbClr val="FFFFFF"/>
+              <a:srgbClr val="A8E5BE"/>
             </a:solidFill>
           </a:ln>
           <a:effectLst>
@@ -33018,7 +33018,7 @@
           </a:solidFill>
           <a:ln w="28575">
             <a:solidFill>
-              <a:srgbClr val="C9D3E2"/>
+              <a:srgbClr val="A9D3F5"/>
             </a:solidFill>
           </a:ln>
         </p:spPr>
@@ -33067,7 +33067,7 @@
           </a:solidFill>
           <a:ln w="28575">
             <a:solidFill>
-              <a:srgbClr val="D9CCF5"/>
+              <a:srgbClr val="CDBFF3"/>
             </a:solidFill>
           </a:ln>
         </p:spPr>

--- a/materials/PREP/PREP_1A_All_about_me.pptx
+++ b/materials/PREP/PREP_1A_All_about_me.pptx
@@ -2858,12 +2858,12 @@
         </p:nvSpPr>
         <p:spPr>
           <a:xfrm rot="90000">
-            <a:off x="4846320" y="777240"/>
-            <a:ext cx="3977640" cy="3200400"/>
+            <a:off x="4846320" y="1474151"/>
+            <a:ext cx="3977640" cy="1806579"/>
           </a:xfrm>
           <a:prstGeom prst="roundRect">
             <a:avLst>
-              <a:gd name="adj" fmla="val 4857"/>
+              <a:gd name="adj" fmla="val 8605"/>
             </a:avLst>
           </a:prstGeom>
           <a:solidFill>
@@ -2886,7 +2886,7 @@
       </p:sp>
       <p:pic>
         <p:nvPicPr>
-          <p:cNvPr id="15" name="ph_13" descr="/home/claude/lls-course/v2/cache/prep1_families_jpg_935x748_31.png">    </p:cNvPr>
+          <p:cNvPr id="15" name="ph_13" descr="/home/claude/lls-course/v2/cache/prep1_families_jpg_935x413_31.png">    </p:cNvPr>
           <p:cNvPicPr>
             <a:picLocks noChangeAspect="1"/>
           </p:cNvPicPr>
@@ -2900,8 +2900,8 @@
         </p:blipFill>
         <p:spPr>
           <a:xfrm rot="90000">
-            <a:off x="4892040" y="822960"/>
-            <a:ext cx="3886200" cy="3108960"/>
+            <a:off x="4892040" y="1519871"/>
+            <a:ext cx="3886200" cy="1715139"/>
           </a:xfrm>
           <a:prstGeom prst="rect">
             <a:avLst/>
@@ -3167,7 +3167,7 @@
       </p:grpSpPr>
       <p:sp>
         <p:nvSpPr>
-          <p:cNvPr id="3" name="bd_255"/>
+          <p:cNvPr id="3" name="bd_252"/>
           <p:cNvSpPr/>
           <p:nvPr/>
         </p:nvSpPr>
@@ -3219,7 +3219,7 @@
       </p:sp>
       <p:pic>
         <p:nvPicPr>
-          <p:cNvPr id="4" name="brY_256" descr="/home/claude/lls-course/v2/assets/brush-yellow.png">    </p:cNvPr>
+          <p:cNvPr id="4" name="brY_253" descr="/home/claude/lls-course/v2/assets/brush-yellow.png">    </p:cNvPr>
           <p:cNvPicPr>
             <a:picLocks noChangeAspect="1"/>
           </p:cNvPicPr>
@@ -3243,7 +3243,7 @@
       </p:pic>
       <p:sp>
         <p:nvSpPr>
-          <p:cNvPr id="5" name="title_257"/>
+          <p:cNvPr id="5" name="title_254"/>
           <p:cNvSpPr/>
           <p:nvPr/>
         </p:nvSpPr>
@@ -3284,7 +3284,7 @@
       </p:sp>
       <p:pic>
         <p:nvPicPr>
-          <p:cNvPr id="6" name="brP_258" descr="/home/claude/lls-course/v2/assets/brush-pink.png">    </p:cNvPr>
+          <p:cNvPr id="6" name="brP_255" descr="/home/claude/lls-course/v2/assets/brush-pink.png">    </p:cNvPr>
           <p:cNvPicPr>
             <a:picLocks noChangeAspect="1"/>
           </p:cNvPicPr>
@@ -3308,7 +3308,7 @@
       </p:pic>
       <p:sp>
         <p:nvSpPr>
-          <p:cNvPr id="7" name="ins_259"/>
+          <p:cNvPr id="7" name="ins_256"/>
           <p:cNvSpPr/>
           <p:nvPr/>
         </p:nvSpPr>
@@ -3349,7 +3349,7 @@
       </p:sp>
       <p:sp>
         <p:nvSpPr>
-          <p:cNvPr id="8" name="insIT_260"/>
+          <p:cNvPr id="8" name="insIT_257"/>
           <p:cNvSpPr/>
           <p:nvPr/>
         </p:nvSpPr>
@@ -3390,7 +3390,7 @@
       </p:sp>
       <p:sp>
         <p:nvSpPr>
-          <p:cNvPr id="9" name="cmd_261"/>
+          <p:cNvPr id="9" name="cmd_258"/>
           <p:cNvSpPr/>
           <p:nvPr/>
         </p:nvSpPr>
@@ -3421,27 +3421,27 @@
           </a:effectLst>
         </p:spPr>
         <p:txBody>
-          <a:bodyPr wrap="square" lIns="101600" tIns="0" rIns="101600" bIns="0" rtlCol="0" anchor="ctr">
+          <a:bodyPr wrap="square" lIns="76200" tIns="0" rIns="76200" bIns="0" rtlCol="0" anchor="ctr">
             <a:normAutofit/>
           </a:bodyPr>
           <a:lstStyle/>
           <a:p>
-            <a:pPr indent="0" marL="0">
-              <a:buNone/>
-            </a:pPr>
-            <a:r>
-              <a:rPr lang="en-US" sz="950" dirty="0">
+            <a:pPr algn="ctr" indent="0" marL="0">
+              <a:buNone/>
+            </a:pPr>
+            <a:r>
+              <a:rPr lang="en-US" sz="750" dirty="0">
                 <a:solidFill>
                   <a:srgbClr val="000000"/>
                 </a:solidFill>
               </a:rPr>
               <a:t>👀 </a:t>
             </a:r>
-            <a:pPr indent="0" marL="0">
-              <a:buNone/>
-            </a:pPr>
-            <a:r>
-              <a:rPr lang="en-US" sz="950" dirty="0">
+            <a:pPr algn="ctr" indent="0" marL="0">
+              <a:buNone/>
+            </a:pPr>
+            <a:r>
+              <a:rPr lang="en-US" sz="750" dirty="0">
                 <a:solidFill>
                   <a:srgbClr val="2EB872"/>
                 </a:solidFill>
@@ -3451,11 +3451,11 @@
               </a:rPr>
               <a:t>READ</a:t>
             </a:r>
-            <a:pPr indent="0" marL="0">
-              <a:buNone/>
-            </a:pPr>
-            <a:r>
-              <a:rPr lang="en-US" sz="950" dirty="0">
+            <a:pPr algn="ctr" indent="0" marL="0">
+              <a:buNone/>
+            </a:pPr>
+            <a:r>
+              <a:rPr lang="en-US" sz="750" dirty="0">
                 <a:solidFill>
                   <a:srgbClr val="5B6785"/>
                 </a:solidFill>
@@ -3463,51 +3463,9 @@
                 <a:ea typeface="Segoe UI Semibold" pitchFamily="34" charset="-122"/>
                 <a:cs typeface="Segoe UI Semibold" pitchFamily="34" charset="-120"/>
               </a:rPr>
-              <a:t>  LEGGI</a:t>
-            </a:r>
-            <a:endParaRPr lang="en-US" sz="950" dirty="0"/>
-          </a:p>
-        </p:txBody>
-      </p:sp>
-      <p:sp>
-        <p:nvSpPr>
-          <p:cNvPr id="10" name="cmd_262"/>
-          <p:cNvSpPr/>
-          <p:nvPr/>
-        </p:nvSpPr>
-        <p:spPr>
-          <a:xfrm>
-            <a:off x="6510528" y="493776"/>
-            <a:ext cx="1901952" cy="274320"/>
-          </a:xfrm>
-          <a:prstGeom prst="roundRect">
-            <a:avLst>
-              <a:gd name="adj" fmla="val 50000"/>
-            </a:avLst>
-          </a:prstGeom>
-          <a:solidFill>
-            <a:srgbClr val="FFFFFF"/>
-          </a:solidFill>
-          <a:ln w="28575">
-            <a:solidFill>
-              <a:srgbClr val="FFE07A"/>
-            </a:solidFill>
-          </a:ln>
-          <a:effectLst>
-            <a:outerShdw sx="100000" sy="100000" kx="0" ky="0" algn="bl" rotWithShape="0" blurRad="88900" dist="31750" dir="5400000">
-              <a:srgbClr val="1B2559">
-                <a:alpha val="8000"/>
-              </a:srgbClr>
-            </a:outerShdw>
-          </a:effectLst>
-        </p:spPr>
-        <p:txBody>
-          <a:bodyPr wrap="square" lIns="101600" tIns="0" rIns="101600" bIns="0" rtlCol="0" anchor="ctr">
-            <a:normAutofit/>
-          </a:bodyPr>
-          <a:lstStyle/>
-          <a:p>
-            <a:pPr indent="0" marL="0">
+              <a:t>  →  </a:t>
+            </a:r>
+            <a:pPr algn="ctr" indent="0" marL="0">
               <a:buNone/>
             </a:pPr>
             <a:r>
@@ -3518,7 +3476,7 @@
               </a:rPr>
               <a:t>✏️ </a:t>
             </a:r>
-            <a:pPr indent="0" marL="0">
+            <a:pPr algn="ctr" indent="0" marL="0">
               <a:buNone/>
             </a:pPr>
             <a:r>
@@ -3532,33 +3490,19 @@
               </a:rPr>
               <a:t>FILL THE GAPS</a:t>
             </a:r>
-            <a:pPr indent="0" marL="0">
-              <a:buNone/>
-            </a:pPr>
-            <a:r>
-              <a:rPr lang="en-US" sz="750" dirty="0">
-                <a:solidFill>
-                  <a:srgbClr val="5B6785"/>
-                </a:solidFill>
-                <a:latin typeface="Segoe UI Semibold" pitchFamily="34" charset="0"/>
-                <a:ea typeface="Segoe UI Semibold" pitchFamily="34" charset="-122"/>
-                <a:cs typeface="Segoe UI Semibold" pitchFamily="34" charset="-120"/>
-              </a:rPr>
-              <a:t>  COMPLETA</a:t>
-            </a:r>
             <a:endParaRPr lang="en-US" sz="750" dirty="0"/>
           </a:p>
         </p:txBody>
       </p:sp>
       <p:sp>
         <p:nvSpPr>
-          <p:cNvPr id="11" name="meta_263"/>
-          <p:cNvSpPr/>
-          <p:nvPr/>
-        </p:nvSpPr>
-        <p:spPr>
-          <a:xfrm>
-            <a:off x="6510528" y="804672"/>
+          <p:cNvPr id="10" name="meta_259"/>
+          <p:cNvSpPr/>
+          <p:nvPr/>
+        </p:nvSpPr>
+        <p:spPr>
+          <a:xfrm>
+            <a:off x="6510528" y="548640"/>
             <a:ext cx="1901952" cy="274320"/>
           </a:xfrm>
           <a:prstGeom prst="roundRect">
@@ -3601,13 +3545,13 @@
       </p:sp>
       <p:sp>
         <p:nvSpPr>
-          <p:cNvPr id="12" name="tag_264"/>
-          <p:cNvSpPr/>
-          <p:nvPr/>
-        </p:nvSpPr>
-        <p:spPr>
-          <a:xfrm>
-            <a:off x="6510528" y="1115568"/>
+          <p:cNvPr id="11" name="tag_260"/>
+          <p:cNvSpPr/>
+          <p:nvPr/>
+        </p:nvSpPr>
+        <p:spPr>
+          <a:xfrm>
+            <a:off x="6510528" y="914400"/>
             <a:ext cx="1901952" cy="274320"/>
           </a:xfrm>
           <a:prstGeom prst="roundRect">
@@ -3664,7 +3608,7 @@
       </p:sp>
       <p:pic>
         <p:nvPicPr>
-          <p:cNvPr id="13" name="logo_265" descr="/home/claude/lls-course/v2/img/logo.png">    </p:cNvPr>
+          <p:cNvPr id="12" name="logo_261" descr="/home/claude/lls-course/v2/img/logo.png">    </p:cNvPr>
           <p:cNvPicPr>
             <a:picLocks noChangeAspect="1"/>
           </p:cNvPicPr>
@@ -3688,7 +3632,7 @@
       </p:pic>
       <p:sp>
         <p:nvSpPr>
-          <p:cNvPr id="14" name="foot_266"/>
+          <p:cNvPr id="13" name="foot_262"/>
           <p:cNvSpPr/>
           <p:nvPr/>
         </p:nvSpPr>
@@ -3727,7 +3671,7 @@
       </p:sp>
       <p:sp>
         <p:nvSpPr>
-          <p:cNvPr id="15" name="cd_267"/>
+          <p:cNvPr id="14" name="cd_263"/>
           <p:cNvSpPr/>
           <p:nvPr/>
         </p:nvSpPr>
@@ -3761,7 +3705,7 @@
       </p:sp>
       <p:sp>
         <p:nvSpPr>
-          <p:cNvPr id="16" name="rd_268"/>
+          <p:cNvPr id="15" name="rd_264"/>
           <p:cNvSpPr/>
           <p:nvPr/>
         </p:nvSpPr>
@@ -4092,7 +4036,7 @@
       </p:sp>
       <p:sp>
         <p:nvSpPr>
-          <p:cNvPr id="17" name="R2_rdA269"/>
+          <p:cNvPr id="16" name="R2_rdA265"/>
           <p:cNvSpPr/>
           <p:nvPr/>
         </p:nvSpPr>
@@ -4428,7 +4372,7 @@
       </p:sp>
       <p:sp>
         <p:nvSpPr>
-          <p:cNvPr id="18" name="R3_rdA270"/>
+          <p:cNvPr id="17" name="R3_rdA266"/>
           <p:cNvSpPr/>
           <p:nvPr/>
         </p:nvSpPr>
@@ -4767,7 +4711,7 @@
       </p:sp>
       <p:sp>
         <p:nvSpPr>
-          <p:cNvPr id="19" name="R4_rdA271"/>
+          <p:cNvPr id="18" name="R4_rdA267"/>
           <p:cNvSpPr/>
           <p:nvPr/>
         </p:nvSpPr>
@@ -5109,7 +5053,7 @@
       </p:sp>
       <p:sp>
         <p:nvSpPr>
-          <p:cNvPr id="20" name="R5_rdA272"/>
+          <p:cNvPr id="19" name="R5_rdA268"/>
           <p:cNvSpPr/>
           <p:nvPr/>
         </p:nvSpPr>
@@ -5454,7 +5398,7 @@
       </p:sp>
       <p:sp>
         <p:nvSpPr>
-          <p:cNvPr id="21" name="R6_rdA273"/>
+          <p:cNvPr id="20" name="R6_rdA269"/>
           <p:cNvSpPr/>
           <p:nvPr/>
         </p:nvSpPr>
@@ -5802,7 +5746,7 @@
       </p:sp>
       <p:sp>
         <p:nvSpPr>
-          <p:cNvPr id="22" name="R7_rdA274"/>
+          <p:cNvPr id="21" name="R7_rdA270"/>
           <p:cNvSpPr/>
           <p:nvPr/>
         </p:nvSpPr>
@@ -6153,7 +6097,7 @@
       </p:sp>
       <p:sp>
         <p:nvSpPr>
-          <p:cNvPr id="23" name="cd_275"/>
+          <p:cNvPr id="22" name="cd_271"/>
           <p:cNvSpPr/>
           <p:nvPr/>
         </p:nvSpPr>
@@ -6187,7 +6131,7 @@
       </p:sp>
       <p:sp>
         <p:nvSpPr>
-          <p:cNvPr id="24" name="ii_276"/>
+          <p:cNvPr id="23" name="ii_272"/>
           <p:cNvSpPr/>
           <p:nvPr/>
         </p:nvSpPr>
@@ -6223,7 +6167,7 @@
       </p:sp>
       <p:sp>
         <p:nvSpPr>
-          <p:cNvPr id="25" name="ih_277"/>
+          <p:cNvPr id="24" name="ih_273"/>
           <p:cNvSpPr/>
           <p:nvPr/>
         </p:nvSpPr>
@@ -6262,7 +6206,7 @@
       </p:sp>
       <p:sp>
         <p:nvSpPr>
-          <p:cNvPr id="26" name="il_278"/>
+          <p:cNvPr id="25" name="il_274"/>
           <p:cNvSpPr/>
           <p:nvPr/>
         </p:nvSpPr>
@@ -6355,7 +6299,7 @@
       </p:sp>
       <p:sp>
         <p:nvSpPr>
-          <p:cNvPr id="27" name="R1_chip279"/>
+          <p:cNvPr id="26" name="R1_chip275"/>
           <p:cNvSpPr/>
           <p:nvPr/>
         </p:nvSpPr>
@@ -6444,7 +6388,7 @@
                                           </p:stCondLst>
                                         </p:cTn>
                                         <p:tgtEl>
-                                          <p:spTgt spid="27"/>
+                                          <p:spTgt spid="26"/>
                                         </p:tgtEl>
                                         <p:attrNameLst>
                                           <p:attrName>style.visibility</p:attrName>
@@ -6458,7 +6402,7 @@
                                       <p:cBhvr>
                                         <p:cTn id="7" dur="400"/>
                                         <p:tgtEl>
-                                          <p:spTgt spid="27"/>
+                                          <p:spTgt spid="26"/>
                                         </p:tgtEl>
                                       </p:cBhvr>
                                     </p:animEffect>
@@ -6497,7 +6441,7 @@
                                           </p:stCondLst>
                                         </p:cTn>
                                         <p:tgtEl>
-                                          <p:spTgt spid="17"/>
+                                          <p:spTgt spid="16"/>
                                         </p:tgtEl>
                                         <p:attrNameLst>
                                           <p:attrName>style.visibility</p:attrName>
@@ -6511,7 +6455,7 @@
                                       <p:cBhvr>
                                         <p:cTn id="12" dur="400"/>
                                         <p:tgtEl>
-                                          <p:spTgt spid="17"/>
+                                          <p:spTgt spid="16"/>
                                         </p:tgtEl>
                                       </p:cBhvr>
                                     </p:animEffect>
@@ -6550,7 +6494,7 @@
                                           </p:stCondLst>
                                         </p:cTn>
                                         <p:tgtEl>
-                                          <p:spTgt spid="18"/>
+                                          <p:spTgt spid="17"/>
                                         </p:tgtEl>
                                         <p:attrNameLst>
                                           <p:attrName>style.visibility</p:attrName>
@@ -6564,7 +6508,7 @@
                                       <p:cBhvr>
                                         <p:cTn id="17" dur="400"/>
                                         <p:tgtEl>
-                                          <p:spTgt spid="18"/>
+                                          <p:spTgt spid="17"/>
                                         </p:tgtEl>
                                       </p:cBhvr>
                                     </p:animEffect>
@@ -6603,7 +6547,7 @@
                                           </p:stCondLst>
                                         </p:cTn>
                                         <p:tgtEl>
-                                          <p:spTgt spid="19"/>
+                                          <p:spTgt spid="18"/>
                                         </p:tgtEl>
                                         <p:attrNameLst>
                                           <p:attrName>style.visibility</p:attrName>
@@ -6617,7 +6561,7 @@
                                       <p:cBhvr>
                                         <p:cTn id="22" dur="400"/>
                                         <p:tgtEl>
-                                          <p:spTgt spid="19"/>
+                                          <p:spTgt spid="18"/>
                                         </p:tgtEl>
                                       </p:cBhvr>
                                     </p:animEffect>
@@ -6656,7 +6600,7 @@
                                           </p:stCondLst>
                                         </p:cTn>
                                         <p:tgtEl>
-                                          <p:spTgt spid="20"/>
+                                          <p:spTgt spid="19"/>
                                         </p:tgtEl>
                                         <p:attrNameLst>
                                           <p:attrName>style.visibility</p:attrName>
@@ -6670,7 +6614,7 @@
                                       <p:cBhvr>
                                         <p:cTn id="27" dur="400"/>
                                         <p:tgtEl>
-                                          <p:spTgt spid="20"/>
+                                          <p:spTgt spid="19"/>
                                         </p:tgtEl>
                                       </p:cBhvr>
                                     </p:animEffect>
@@ -6709,7 +6653,7 @@
                                           </p:stCondLst>
                                         </p:cTn>
                                         <p:tgtEl>
-                                          <p:spTgt spid="21"/>
+                                          <p:spTgt spid="20"/>
                                         </p:tgtEl>
                                         <p:attrNameLst>
                                           <p:attrName>style.visibility</p:attrName>
@@ -6723,7 +6667,7 @@
                                       <p:cBhvr>
                                         <p:cTn id="32" dur="400"/>
                                         <p:tgtEl>
-                                          <p:spTgt spid="21"/>
+                                          <p:spTgt spid="20"/>
                                         </p:tgtEl>
                                       </p:cBhvr>
                                     </p:animEffect>
@@ -6762,7 +6706,7 @@
                                           </p:stCondLst>
                                         </p:cTn>
                                         <p:tgtEl>
-                                          <p:spTgt spid="22"/>
+                                          <p:spTgt spid="21"/>
                                         </p:tgtEl>
                                         <p:attrNameLst>
                                           <p:attrName>style.visibility</p:attrName>
@@ -6776,7 +6720,7 @@
                                       <p:cBhvr>
                                         <p:cTn id="37" dur="400"/>
                                         <p:tgtEl>
-                                          <p:spTgt spid="22"/>
+                                          <p:spTgt spid="21"/>
                                         </p:tgtEl>
                                       </p:cBhvr>
                                     </p:animEffect>
@@ -6847,7 +6791,7 @@
       </p:grpSpPr>
       <p:sp>
         <p:nvSpPr>
-          <p:cNvPr id="3" name="bd_280"/>
+          <p:cNvPr id="3" name="bd_276"/>
           <p:cNvSpPr/>
           <p:nvPr/>
         </p:nvSpPr>
@@ -6899,7 +6843,7 @@
       </p:sp>
       <p:pic>
         <p:nvPicPr>
-          <p:cNvPr id="4" name="brY_281" descr="/home/claude/lls-course/v2/assets/brush-yellow.png">    </p:cNvPr>
+          <p:cNvPr id="4" name="brY_277" descr="/home/claude/lls-course/v2/assets/brush-yellow.png">    </p:cNvPr>
           <p:cNvPicPr>
             <a:picLocks noChangeAspect="1"/>
           </p:cNvPicPr>
@@ -6923,7 +6867,7 @@
       </p:pic>
       <p:sp>
         <p:nvSpPr>
-          <p:cNvPr id="5" name="title_282"/>
+          <p:cNvPr id="5" name="title_278"/>
           <p:cNvSpPr/>
           <p:nvPr/>
         </p:nvSpPr>
@@ -6964,7 +6908,7 @@
       </p:sp>
       <p:pic>
         <p:nvPicPr>
-          <p:cNvPr id="6" name="brP_283" descr="/home/claude/lls-course/v2/assets/brush-pink.png">    </p:cNvPr>
+          <p:cNvPr id="6" name="brP_279" descr="/home/claude/lls-course/v2/assets/brush-pink.png">    </p:cNvPr>
           <p:cNvPicPr>
             <a:picLocks noChangeAspect="1"/>
           </p:cNvPicPr>
@@ -6988,7 +6932,7 @@
       </p:pic>
       <p:sp>
         <p:nvSpPr>
-          <p:cNvPr id="7" name="ins_284"/>
+          <p:cNvPr id="7" name="ins_280"/>
           <p:cNvSpPr/>
           <p:nvPr/>
         </p:nvSpPr>
@@ -7029,7 +6973,7 @@
       </p:sp>
       <p:sp>
         <p:nvSpPr>
-          <p:cNvPr id="8" name="insIT_285"/>
+          <p:cNvPr id="8" name="insIT_281"/>
           <p:cNvSpPr/>
           <p:nvPr/>
         </p:nvSpPr>
@@ -7070,7 +7014,7 @@
       </p:sp>
       <p:sp>
         <p:nvSpPr>
-          <p:cNvPr id="9" name="cmd_286"/>
+          <p:cNvPr id="9" name="cmd_282"/>
           <p:cNvSpPr/>
           <p:nvPr/>
         </p:nvSpPr>
@@ -7101,12 +7045,12 @@
           </a:effectLst>
         </p:spPr>
         <p:txBody>
-          <a:bodyPr wrap="square" lIns="101600" tIns="0" rIns="101600" bIns="0" rtlCol="0" anchor="ctr">
+          <a:bodyPr wrap="square" lIns="76200" tIns="0" rIns="76200" bIns="0" rtlCol="0" anchor="ctr">
             <a:normAutofit/>
           </a:bodyPr>
           <a:lstStyle/>
           <a:p>
-            <a:pPr indent="0" marL="0">
+            <a:pPr algn="ctr" indent="0" marL="0">
               <a:buNone/>
             </a:pPr>
             <a:r>
@@ -7117,7 +7061,7 @@
               </a:rPr>
               <a:t>👀 </a:t>
             </a:r>
-            <a:pPr indent="0" marL="0">
+            <a:pPr algn="ctr" indent="0" marL="0">
               <a:buNone/>
             </a:pPr>
             <a:r>
@@ -7131,7 +7075,7 @@
               </a:rPr>
               <a:t>READ</a:t>
             </a:r>
-            <a:pPr indent="0" marL="0">
+            <a:pPr algn="ctr" indent="0" marL="0">
               <a:buNone/>
             </a:pPr>
             <a:r>
@@ -7143,51 +7087,9 @@
                 <a:ea typeface="Segoe UI Semibold" pitchFamily="34" charset="-122"/>
                 <a:cs typeface="Segoe UI Semibold" pitchFamily="34" charset="-120"/>
               </a:rPr>
-              <a:t>  LEGGI</a:t>
-            </a:r>
-            <a:endParaRPr lang="en-US" sz="950" dirty="0"/>
-          </a:p>
-        </p:txBody>
-      </p:sp>
-      <p:sp>
-        <p:nvSpPr>
-          <p:cNvPr id="10" name="cmd_287"/>
-          <p:cNvSpPr/>
-          <p:nvPr/>
-        </p:nvSpPr>
-        <p:spPr>
-          <a:xfrm>
-            <a:off x="6510528" y="493776"/>
-            <a:ext cx="1901952" cy="274320"/>
-          </a:xfrm>
-          <a:prstGeom prst="roundRect">
-            <a:avLst>
-              <a:gd name="adj" fmla="val 50000"/>
-            </a:avLst>
-          </a:prstGeom>
-          <a:solidFill>
-            <a:srgbClr val="FFFFFF"/>
-          </a:solidFill>
-          <a:ln w="28575">
-            <a:solidFill>
-              <a:srgbClr val="A8E5BE"/>
-            </a:solidFill>
-          </a:ln>
-          <a:effectLst>
-            <a:outerShdw sx="100000" sy="100000" kx="0" ky="0" algn="bl" rotWithShape="0" blurRad="88900" dist="31750" dir="5400000">
-              <a:srgbClr val="1B2559">
-                <a:alpha val="8000"/>
-              </a:srgbClr>
-            </a:outerShdw>
-          </a:effectLst>
-        </p:spPr>
-        <p:txBody>
-          <a:bodyPr wrap="square" lIns="101600" tIns="0" rIns="101600" bIns="0" rtlCol="0" anchor="ctr">
-            <a:normAutofit/>
-          </a:bodyPr>
-          <a:lstStyle/>
-          <a:p>
-            <a:pPr indent="0" marL="0">
+              <a:t>  →  </a:t>
+            </a:r>
+            <a:pPr algn="ctr" indent="0" marL="0">
               <a:buNone/>
             </a:pPr>
             <a:r>
@@ -7198,7 +7100,7 @@
               </a:rPr>
               <a:t>🔗 </a:t>
             </a:r>
-            <a:pPr indent="0" marL="0">
+            <a:pPr algn="ctr" indent="0" marL="0">
               <a:buNone/>
             </a:pPr>
             <a:r>
@@ -7212,33 +7114,19 @@
               </a:rPr>
               <a:t>MATCH</a:t>
             </a:r>
-            <a:pPr indent="0" marL="0">
-              <a:buNone/>
-            </a:pPr>
-            <a:r>
-              <a:rPr lang="en-US" sz="950" dirty="0">
-                <a:solidFill>
-                  <a:srgbClr val="5B6785"/>
-                </a:solidFill>
-                <a:latin typeface="Segoe UI Semibold" pitchFamily="34" charset="0"/>
-                <a:ea typeface="Segoe UI Semibold" pitchFamily="34" charset="-122"/>
-                <a:cs typeface="Segoe UI Semibold" pitchFamily="34" charset="-120"/>
-              </a:rPr>
-              <a:t>  ABBINA</a:t>
-            </a:r>
             <a:endParaRPr lang="en-US" sz="950" dirty="0"/>
           </a:p>
         </p:txBody>
       </p:sp>
       <p:sp>
         <p:nvSpPr>
-          <p:cNvPr id="11" name="meta_288"/>
-          <p:cNvSpPr/>
-          <p:nvPr/>
-        </p:nvSpPr>
-        <p:spPr>
-          <a:xfrm>
-            <a:off x="6510528" y="804672"/>
+          <p:cNvPr id="10" name="meta_283"/>
+          <p:cNvSpPr/>
+          <p:nvPr/>
+        </p:nvSpPr>
+        <p:spPr>
+          <a:xfrm>
+            <a:off x="6510528" y="548640"/>
             <a:ext cx="1901952" cy="274320"/>
           </a:xfrm>
           <a:prstGeom prst="roundRect">
@@ -7281,13 +7169,13 @@
       </p:sp>
       <p:sp>
         <p:nvSpPr>
-          <p:cNvPr id="12" name="tag_289"/>
-          <p:cNvSpPr/>
-          <p:nvPr/>
-        </p:nvSpPr>
-        <p:spPr>
-          <a:xfrm>
-            <a:off x="6510528" y="1115568"/>
+          <p:cNvPr id="11" name="tag_284"/>
+          <p:cNvSpPr/>
+          <p:nvPr/>
+        </p:nvSpPr>
+        <p:spPr>
+          <a:xfrm>
+            <a:off x="6510528" y="914400"/>
             <a:ext cx="1901952" cy="274320"/>
           </a:xfrm>
           <a:prstGeom prst="roundRect">
@@ -7344,7 +7232,7 @@
       </p:sp>
       <p:pic>
         <p:nvPicPr>
-          <p:cNvPr id="13" name="logo_290" descr="/home/claude/lls-course/v2/img/logo.png">    </p:cNvPr>
+          <p:cNvPr id="12" name="logo_285" descr="/home/claude/lls-course/v2/img/logo.png">    </p:cNvPr>
           <p:cNvPicPr>
             <a:picLocks noChangeAspect="1"/>
           </p:cNvPicPr>
@@ -7368,7 +7256,7 @@
       </p:pic>
       <p:sp>
         <p:nvSpPr>
-          <p:cNvPr id="14" name="foot_291"/>
+          <p:cNvPr id="13" name="foot_286"/>
           <p:cNvSpPr/>
           <p:nvPr/>
         </p:nvSpPr>
@@ -7407,7 +7295,7 @@
       </p:sp>
       <p:sp>
         <p:nvSpPr>
-          <p:cNvPr id="15" name="bd_292"/>
+          <p:cNvPr id="14" name="bd_287"/>
           <p:cNvSpPr/>
           <p:nvPr/>
         </p:nvSpPr>
@@ -7459,7 +7347,7 @@
       </p:sp>
       <p:sp>
         <p:nvSpPr>
-          <p:cNvPr id="16" name="q_293"/>
+          <p:cNvPr id="15" name="q_288"/>
           <p:cNvSpPr/>
           <p:nvPr/>
         </p:nvSpPr>
@@ -7508,7 +7396,7 @@
       </p:sp>
       <p:sp>
         <p:nvSpPr>
-          <p:cNvPr id="17" name="R1_chip294"/>
+          <p:cNvPr id="16" name="R1_chip289"/>
           <p:cNvSpPr/>
           <p:nvPr/>
         </p:nvSpPr>
@@ -7557,7 +7445,7 @@
       </p:sp>
       <p:sp>
         <p:nvSpPr>
-          <p:cNvPr id="18" name="bd_295"/>
+          <p:cNvPr id="17" name="bd_290"/>
           <p:cNvSpPr/>
           <p:nvPr/>
         </p:nvSpPr>
@@ -7609,7 +7497,7 @@
       </p:sp>
       <p:sp>
         <p:nvSpPr>
-          <p:cNvPr id="19" name="q_296"/>
+          <p:cNvPr id="18" name="q_291"/>
           <p:cNvSpPr/>
           <p:nvPr/>
         </p:nvSpPr>
@@ -7658,7 +7546,7 @@
       </p:sp>
       <p:sp>
         <p:nvSpPr>
-          <p:cNvPr id="20" name="R2_chip297"/>
+          <p:cNvPr id="19" name="R2_chip292"/>
           <p:cNvSpPr/>
           <p:nvPr/>
         </p:nvSpPr>
@@ -7707,7 +7595,7 @@
       </p:sp>
       <p:sp>
         <p:nvSpPr>
-          <p:cNvPr id="21" name="bd_298"/>
+          <p:cNvPr id="20" name="bd_293"/>
           <p:cNvSpPr/>
           <p:nvPr/>
         </p:nvSpPr>
@@ -7759,7 +7647,7 @@
       </p:sp>
       <p:sp>
         <p:nvSpPr>
-          <p:cNvPr id="22" name="q_299"/>
+          <p:cNvPr id="21" name="q_294"/>
           <p:cNvSpPr/>
           <p:nvPr/>
         </p:nvSpPr>
@@ -7808,7 +7696,7 @@
       </p:sp>
       <p:sp>
         <p:nvSpPr>
-          <p:cNvPr id="23" name="R3_chip300"/>
+          <p:cNvPr id="22" name="R3_chip295"/>
           <p:cNvSpPr/>
           <p:nvPr/>
         </p:nvSpPr>
@@ -7857,7 +7745,7 @@
       </p:sp>
       <p:sp>
         <p:nvSpPr>
-          <p:cNvPr id="24" name="bd_301"/>
+          <p:cNvPr id="23" name="bd_296"/>
           <p:cNvSpPr/>
           <p:nvPr/>
         </p:nvSpPr>
@@ -7909,7 +7797,7 @@
       </p:sp>
       <p:sp>
         <p:nvSpPr>
-          <p:cNvPr id="25" name="q_302"/>
+          <p:cNvPr id="24" name="q_297"/>
           <p:cNvSpPr/>
           <p:nvPr/>
         </p:nvSpPr>
@@ -7958,7 +7846,7 @@
       </p:sp>
       <p:sp>
         <p:nvSpPr>
-          <p:cNvPr id="26" name="R4_chip303"/>
+          <p:cNvPr id="25" name="R4_chip298"/>
           <p:cNvSpPr/>
           <p:nvPr/>
         </p:nvSpPr>
@@ -8007,7 +7895,7 @@
       </p:sp>
       <p:sp>
         <p:nvSpPr>
-          <p:cNvPr id="27" name="bd_304"/>
+          <p:cNvPr id="26" name="bd_299"/>
           <p:cNvSpPr/>
           <p:nvPr/>
         </p:nvSpPr>
@@ -8059,7 +7947,7 @@
       </p:sp>
       <p:sp>
         <p:nvSpPr>
-          <p:cNvPr id="28" name="q_305"/>
+          <p:cNvPr id="27" name="q_300"/>
           <p:cNvSpPr/>
           <p:nvPr/>
         </p:nvSpPr>
@@ -8108,7 +7996,7 @@
       </p:sp>
       <p:sp>
         <p:nvSpPr>
-          <p:cNvPr id="29" name="R5_chip306"/>
+          <p:cNvPr id="28" name="R5_chip301"/>
           <p:cNvSpPr/>
           <p:nvPr/>
         </p:nvSpPr>
@@ -8157,7 +8045,7 @@
       </p:sp>
       <p:sp>
         <p:nvSpPr>
-          <p:cNvPr id="30" name="bd_307"/>
+          <p:cNvPr id="29" name="bd_302"/>
           <p:cNvSpPr/>
           <p:nvPr/>
         </p:nvSpPr>
@@ -8209,7 +8097,7 @@
       </p:sp>
       <p:sp>
         <p:nvSpPr>
-          <p:cNvPr id="31" name="q_308"/>
+          <p:cNvPr id="30" name="q_303"/>
           <p:cNvSpPr/>
           <p:nvPr/>
         </p:nvSpPr>
@@ -8258,7 +8146,7 @@
       </p:sp>
       <p:sp>
         <p:nvSpPr>
-          <p:cNvPr id="32" name="R6_chip309"/>
+          <p:cNvPr id="31" name="R6_chip304"/>
           <p:cNvSpPr/>
           <p:nvPr/>
         </p:nvSpPr>
@@ -8347,7 +8235,7 @@
                                           </p:stCondLst>
                                         </p:cTn>
                                         <p:tgtEl>
-                                          <p:spTgt spid="17"/>
+                                          <p:spTgt spid="16"/>
                                         </p:tgtEl>
                                         <p:attrNameLst>
                                           <p:attrName>style.visibility</p:attrName>
@@ -8361,7 +8249,7 @@
                                       <p:cBhvr>
                                         <p:cTn id="7" dur="400"/>
                                         <p:tgtEl>
-                                          <p:spTgt spid="17"/>
+                                          <p:spTgt spid="16"/>
                                         </p:tgtEl>
                                       </p:cBhvr>
                                     </p:animEffect>
@@ -8400,7 +8288,7 @@
                                           </p:stCondLst>
                                         </p:cTn>
                                         <p:tgtEl>
-                                          <p:spTgt spid="20"/>
+                                          <p:spTgt spid="19"/>
                                         </p:tgtEl>
                                         <p:attrNameLst>
                                           <p:attrName>style.visibility</p:attrName>
@@ -8414,7 +8302,7 @@
                                       <p:cBhvr>
                                         <p:cTn id="12" dur="400"/>
                                         <p:tgtEl>
-                                          <p:spTgt spid="20"/>
+                                          <p:spTgt spid="19"/>
                                         </p:tgtEl>
                                       </p:cBhvr>
                                     </p:animEffect>
@@ -8453,7 +8341,7 @@
                                           </p:stCondLst>
                                         </p:cTn>
                                         <p:tgtEl>
-                                          <p:spTgt spid="23"/>
+                                          <p:spTgt spid="22"/>
                                         </p:tgtEl>
                                         <p:attrNameLst>
                                           <p:attrName>style.visibility</p:attrName>
@@ -8467,7 +8355,7 @@
                                       <p:cBhvr>
                                         <p:cTn id="17" dur="400"/>
                                         <p:tgtEl>
-                                          <p:spTgt spid="23"/>
+                                          <p:spTgt spid="22"/>
                                         </p:tgtEl>
                                       </p:cBhvr>
                                     </p:animEffect>
@@ -8506,7 +8394,7 @@
                                           </p:stCondLst>
                                         </p:cTn>
                                         <p:tgtEl>
-                                          <p:spTgt spid="26"/>
+                                          <p:spTgt spid="25"/>
                                         </p:tgtEl>
                                         <p:attrNameLst>
                                           <p:attrName>style.visibility</p:attrName>
@@ -8520,7 +8408,7 @@
                                       <p:cBhvr>
                                         <p:cTn id="22" dur="400"/>
                                         <p:tgtEl>
-                                          <p:spTgt spid="26"/>
+                                          <p:spTgt spid="25"/>
                                         </p:tgtEl>
                                       </p:cBhvr>
                                     </p:animEffect>
@@ -8559,7 +8447,7 @@
                                           </p:stCondLst>
                                         </p:cTn>
                                         <p:tgtEl>
-                                          <p:spTgt spid="29"/>
+                                          <p:spTgt spid="28"/>
                                         </p:tgtEl>
                                         <p:attrNameLst>
                                           <p:attrName>style.visibility</p:attrName>
@@ -8573,7 +8461,7 @@
                                       <p:cBhvr>
                                         <p:cTn id="27" dur="400"/>
                                         <p:tgtEl>
-                                          <p:spTgt spid="29"/>
+                                          <p:spTgt spid="28"/>
                                         </p:tgtEl>
                                       </p:cBhvr>
                                     </p:animEffect>
@@ -8612,7 +8500,7 @@
                                           </p:stCondLst>
                                         </p:cTn>
                                         <p:tgtEl>
-                                          <p:spTgt spid="32"/>
+                                          <p:spTgt spid="31"/>
                                         </p:tgtEl>
                                         <p:attrNameLst>
                                           <p:attrName>style.visibility</p:attrName>
@@ -8626,7 +8514,7 @@
                                       <p:cBhvr>
                                         <p:cTn id="32" dur="400"/>
                                         <p:tgtEl>
-                                          <p:spTgt spid="32"/>
+                                          <p:spTgt spid="31"/>
                                         </p:tgtEl>
                                       </p:cBhvr>
                                     </p:animEffect>
@@ -8697,7 +8585,7 @@
       </p:grpSpPr>
       <p:sp>
         <p:nvSpPr>
-          <p:cNvPr id="3" name="bd_310"/>
+          <p:cNvPr id="3" name="bd_305"/>
           <p:cNvSpPr/>
           <p:nvPr/>
         </p:nvSpPr>
@@ -8749,7 +8637,7 @@
       </p:sp>
       <p:pic>
         <p:nvPicPr>
-          <p:cNvPr id="4" name="brY_311" descr="/home/claude/lls-course/v2/assets/brush-yellow.png">    </p:cNvPr>
+          <p:cNvPr id="4" name="brY_306" descr="/home/claude/lls-course/v2/assets/brush-yellow.png">    </p:cNvPr>
           <p:cNvPicPr>
             <a:picLocks noChangeAspect="1"/>
           </p:cNvPicPr>
@@ -8773,7 +8661,7 @@
       </p:pic>
       <p:sp>
         <p:nvSpPr>
-          <p:cNvPr id="5" name="title_312"/>
+          <p:cNvPr id="5" name="title_307"/>
           <p:cNvSpPr/>
           <p:nvPr/>
         </p:nvSpPr>
@@ -8814,7 +8702,7 @@
       </p:sp>
       <p:pic>
         <p:nvPicPr>
-          <p:cNvPr id="6" name="brP_313" descr="/home/claude/lls-course/v2/assets/brush-pink.png">    </p:cNvPr>
+          <p:cNvPr id="6" name="brP_308" descr="/home/claude/lls-course/v2/assets/brush-pink.png">    </p:cNvPr>
           <p:cNvPicPr>
             <a:picLocks noChangeAspect="1"/>
           </p:cNvPicPr>
@@ -8838,7 +8726,7 @@
       </p:pic>
       <p:sp>
         <p:nvSpPr>
-          <p:cNvPr id="7" name="ins_314"/>
+          <p:cNvPr id="7" name="ins_309"/>
           <p:cNvSpPr/>
           <p:nvPr/>
         </p:nvSpPr>
@@ -8879,7 +8767,7 @@
       </p:sp>
       <p:sp>
         <p:nvSpPr>
-          <p:cNvPr id="8" name="insIT_315"/>
+          <p:cNvPr id="8" name="insIT_310"/>
           <p:cNvSpPr/>
           <p:nvPr/>
         </p:nvSpPr>
@@ -8920,7 +8808,7 @@
       </p:sp>
       <p:sp>
         <p:nvSpPr>
-          <p:cNvPr id="9" name="cmd_316"/>
+          <p:cNvPr id="9" name="cmd_311"/>
           <p:cNvSpPr/>
           <p:nvPr/>
         </p:nvSpPr>
@@ -8951,12 +8839,12 @@
           </a:effectLst>
         </p:spPr>
         <p:txBody>
-          <a:bodyPr wrap="square" lIns="101600" tIns="0" rIns="101600" bIns="0" rtlCol="0" anchor="ctr">
+          <a:bodyPr wrap="square" lIns="76200" tIns="0" rIns="76200" bIns="0" rtlCol="0" anchor="ctr">
             <a:normAutofit/>
           </a:bodyPr>
           <a:lstStyle/>
           <a:p>
-            <a:pPr indent="0" marL="0">
+            <a:pPr algn="ctr" indent="0" marL="0">
               <a:buNone/>
             </a:pPr>
             <a:r>
@@ -8967,7 +8855,7 @@
               </a:rPr>
               <a:t>🔍 </a:t>
             </a:r>
-            <a:pPr indent="0" marL="0">
+            <a:pPr algn="ctr" indent="0" marL="0">
               <a:buNone/>
             </a:pPr>
             <a:r>
@@ -8981,7 +8869,7 @@
               </a:rPr>
               <a:t>FIND</a:t>
             </a:r>
-            <a:pPr indent="0" marL="0">
+            <a:pPr algn="ctr" indent="0" marL="0">
               <a:buNone/>
             </a:pPr>
             <a:r>
@@ -9001,13 +8889,13 @@
       </p:sp>
       <p:sp>
         <p:nvSpPr>
-          <p:cNvPr id="10" name="meta_317"/>
-          <p:cNvSpPr/>
-          <p:nvPr/>
-        </p:nvSpPr>
-        <p:spPr>
-          <a:xfrm>
-            <a:off x="6510528" y="493776"/>
+          <p:cNvPr id="10" name="meta_312"/>
+          <p:cNvSpPr/>
+          <p:nvPr/>
+        </p:nvSpPr>
+        <p:spPr>
+          <a:xfrm>
+            <a:off x="6510528" y="548640"/>
             <a:ext cx="1901952" cy="274320"/>
           </a:xfrm>
           <a:prstGeom prst="roundRect">
@@ -9050,13 +8938,13 @@
       </p:sp>
       <p:sp>
         <p:nvSpPr>
-          <p:cNvPr id="11" name="tag_318"/>
-          <p:cNvSpPr/>
-          <p:nvPr/>
-        </p:nvSpPr>
-        <p:spPr>
-          <a:xfrm>
-            <a:off x="6510528" y="804672"/>
+          <p:cNvPr id="11" name="tag_313"/>
+          <p:cNvSpPr/>
+          <p:nvPr/>
+        </p:nvSpPr>
+        <p:spPr>
+          <a:xfrm>
+            <a:off x="6510528" y="914400"/>
             <a:ext cx="1901952" cy="274320"/>
           </a:xfrm>
           <a:prstGeom prst="roundRect">
@@ -9113,7 +9001,7 @@
       </p:sp>
       <p:pic>
         <p:nvPicPr>
-          <p:cNvPr id="12" name="logo_319" descr="/home/claude/lls-course/v2/img/logo.png">    </p:cNvPr>
+          <p:cNvPr id="12" name="logo_314" descr="/home/claude/lls-course/v2/img/logo.png">    </p:cNvPr>
           <p:cNvPicPr>
             <a:picLocks noChangeAspect="1"/>
           </p:cNvPicPr>
@@ -9137,7 +9025,7 @@
       </p:pic>
       <p:sp>
         <p:nvSpPr>
-          <p:cNvPr id="13" name="foot_320"/>
+          <p:cNvPr id="13" name="foot_315"/>
           <p:cNvSpPr/>
           <p:nvPr/>
         </p:nvSpPr>
@@ -9176,7 +9064,7 @@
       </p:sp>
       <p:sp>
         <p:nvSpPr>
-          <p:cNvPr id="14" name="bd_321"/>
+          <p:cNvPr id="14" name="bd_316"/>
           <p:cNvSpPr/>
           <p:nvPr/>
         </p:nvSpPr>
@@ -9228,7 +9116,7 @@
       </p:sp>
       <p:sp>
         <p:nvSpPr>
-          <p:cNvPr id="15" name="q_322"/>
+          <p:cNvPr id="15" name="q_317"/>
           <p:cNvSpPr/>
           <p:nvPr/>
         </p:nvSpPr>
@@ -9277,7 +9165,7 @@
       </p:sp>
       <p:sp>
         <p:nvSpPr>
-          <p:cNvPr id="16" name="R1_chip323"/>
+          <p:cNvPr id="16" name="R1_chip318"/>
           <p:cNvSpPr/>
           <p:nvPr/>
         </p:nvSpPr>
@@ -9357,7 +9245,7 @@
       </p:sp>
       <p:sp>
         <p:nvSpPr>
-          <p:cNvPr id="17" name="bd_324"/>
+          <p:cNvPr id="17" name="bd_319"/>
           <p:cNvSpPr/>
           <p:nvPr/>
         </p:nvSpPr>
@@ -9409,7 +9297,7 @@
       </p:sp>
       <p:sp>
         <p:nvSpPr>
-          <p:cNvPr id="18" name="q_325"/>
+          <p:cNvPr id="18" name="q_320"/>
           <p:cNvSpPr/>
           <p:nvPr/>
         </p:nvSpPr>
@@ -9458,7 +9346,7 @@
       </p:sp>
       <p:sp>
         <p:nvSpPr>
-          <p:cNvPr id="19" name="R2_chip326"/>
+          <p:cNvPr id="19" name="R2_chip321"/>
           <p:cNvSpPr/>
           <p:nvPr/>
         </p:nvSpPr>
@@ -9538,7 +9426,7 @@
       </p:sp>
       <p:sp>
         <p:nvSpPr>
-          <p:cNvPr id="20" name="bd_327"/>
+          <p:cNvPr id="20" name="bd_322"/>
           <p:cNvSpPr/>
           <p:nvPr/>
         </p:nvSpPr>
@@ -9590,7 +9478,7 @@
       </p:sp>
       <p:sp>
         <p:nvSpPr>
-          <p:cNvPr id="21" name="q_328"/>
+          <p:cNvPr id="21" name="q_323"/>
           <p:cNvSpPr/>
           <p:nvPr/>
         </p:nvSpPr>
@@ -9639,7 +9527,7 @@
       </p:sp>
       <p:sp>
         <p:nvSpPr>
-          <p:cNvPr id="22" name="R3_chip329"/>
+          <p:cNvPr id="22" name="R3_chip324"/>
           <p:cNvSpPr/>
           <p:nvPr/>
         </p:nvSpPr>
@@ -9719,7 +9607,7 @@
       </p:sp>
       <p:sp>
         <p:nvSpPr>
-          <p:cNvPr id="23" name="bd_330"/>
+          <p:cNvPr id="23" name="bd_325"/>
           <p:cNvSpPr/>
           <p:nvPr/>
         </p:nvSpPr>
@@ -9771,7 +9659,7 @@
       </p:sp>
       <p:sp>
         <p:nvSpPr>
-          <p:cNvPr id="24" name="q_331"/>
+          <p:cNvPr id="24" name="q_326"/>
           <p:cNvSpPr/>
           <p:nvPr/>
         </p:nvSpPr>
@@ -9820,7 +9708,7 @@
       </p:sp>
       <p:sp>
         <p:nvSpPr>
-          <p:cNvPr id="25" name="R4_chip332"/>
+          <p:cNvPr id="25" name="R4_chip327"/>
           <p:cNvSpPr/>
           <p:nvPr/>
         </p:nvSpPr>
@@ -9900,7 +9788,7 @@
       </p:sp>
       <p:sp>
         <p:nvSpPr>
-          <p:cNvPr id="26" name="bd_333"/>
+          <p:cNvPr id="26" name="bd_328"/>
           <p:cNvSpPr/>
           <p:nvPr/>
         </p:nvSpPr>
@@ -9952,7 +9840,7 @@
       </p:sp>
       <p:sp>
         <p:nvSpPr>
-          <p:cNvPr id="27" name="q_334"/>
+          <p:cNvPr id="27" name="q_329"/>
           <p:cNvSpPr/>
           <p:nvPr/>
         </p:nvSpPr>
@@ -10001,7 +9889,7 @@
       </p:sp>
       <p:sp>
         <p:nvSpPr>
-          <p:cNvPr id="28" name="R5_chip335"/>
+          <p:cNvPr id="28" name="R5_chip330"/>
           <p:cNvSpPr/>
           <p:nvPr/>
         </p:nvSpPr>
@@ -10081,7 +9969,7 @@
       </p:sp>
       <p:sp>
         <p:nvSpPr>
-          <p:cNvPr id="29" name="bd_336"/>
+          <p:cNvPr id="29" name="bd_331"/>
           <p:cNvSpPr/>
           <p:nvPr/>
         </p:nvSpPr>
@@ -10133,7 +10021,7 @@
       </p:sp>
       <p:sp>
         <p:nvSpPr>
-          <p:cNvPr id="30" name="q_337"/>
+          <p:cNvPr id="30" name="q_332"/>
           <p:cNvSpPr/>
           <p:nvPr/>
         </p:nvSpPr>
@@ -10182,7 +10070,7 @@
       </p:sp>
       <p:sp>
         <p:nvSpPr>
-          <p:cNvPr id="31" name="R6_chip338"/>
+          <p:cNvPr id="31" name="R6_chip333"/>
           <p:cNvSpPr/>
           <p:nvPr/>
         </p:nvSpPr>
@@ -10652,7 +10540,7 @@
       </p:grpSpPr>
       <p:sp>
         <p:nvSpPr>
-          <p:cNvPr id="3" name="bd_339"/>
+          <p:cNvPr id="3" name="bd_334"/>
           <p:cNvSpPr/>
           <p:nvPr/>
         </p:nvSpPr>
@@ -10704,7 +10592,7 @@
       </p:sp>
       <p:pic>
         <p:nvPicPr>
-          <p:cNvPr id="4" name="brY_340" descr="/home/claude/lls-course/v2/assets/brush-yellow.png">    </p:cNvPr>
+          <p:cNvPr id="4" name="brY_335" descr="/home/claude/lls-course/v2/assets/brush-yellow.png">    </p:cNvPr>
           <p:cNvPicPr>
             <a:picLocks noChangeAspect="1"/>
           </p:cNvPicPr>
@@ -10728,7 +10616,7 @@
       </p:pic>
       <p:sp>
         <p:nvSpPr>
-          <p:cNvPr id="5" name="title_341"/>
+          <p:cNvPr id="5" name="title_336"/>
           <p:cNvSpPr/>
           <p:nvPr/>
         </p:nvSpPr>
@@ -10769,7 +10657,7 @@
       </p:sp>
       <p:pic>
         <p:nvPicPr>
-          <p:cNvPr id="6" name="brP_342" descr="/home/claude/lls-course/v2/assets/brush-pink.png">    </p:cNvPr>
+          <p:cNvPr id="6" name="brP_337" descr="/home/claude/lls-course/v2/assets/brush-pink.png">    </p:cNvPr>
           <p:cNvPicPr>
             <a:picLocks noChangeAspect="1"/>
           </p:cNvPicPr>
@@ -10793,7 +10681,7 @@
       </p:pic>
       <p:sp>
         <p:nvSpPr>
-          <p:cNvPr id="7" name="ins_343"/>
+          <p:cNvPr id="7" name="ins_338"/>
           <p:cNvSpPr/>
           <p:nvPr/>
         </p:nvSpPr>
@@ -10834,7 +10722,7 @@
       </p:sp>
       <p:sp>
         <p:nvSpPr>
-          <p:cNvPr id="8" name="insIT_344"/>
+          <p:cNvPr id="8" name="insIT_339"/>
           <p:cNvSpPr/>
           <p:nvPr/>
         </p:nvSpPr>
@@ -10875,7 +10763,7 @@
       </p:sp>
       <p:sp>
         <p:nvSpPr>
-          <p:cNvPr id="9" name="cmd_345"/>
+          <p:cNvPr id="9" name="cmd_340"/>
           <p:cNvSpPr/>
           <p:nvPr/>
         </p:nvSpPr>
@@ -10906,12 +10794,12 @@
           </a:effectLst>
         </p:spPr>
         <p:txBody>
-          <a:bodyPr wrap="square" lIns="101600" tIns="0" rIns="101600" bIns="0" rtlCol="0" anchor="ctr">
+          <a:bodyPr wrap="square" lIns="76200" tIns="0" rIns="76200" bIns="0" rtlCol="0" anchor="ctr">
             <a:normAutofit/>
           </a:bodyPr>
           <a:lstStyle/>
           <a:p>
-            <a:pPr indent="0" marL="0">
+            <a:pPr algn="ctr" indent="0" marL="0">
               <a:buNone/>
             </a:pPr>
             <a:r>
@@ -10922,7 +10810,7 @@
               </a:rPr>
               <a:t>👀 </a:t>
             </a:r>
-            <a:pPr indent="0" marL="0">
+            <a:pPr algn="ctr" indent="0" marL="0">
               <a:buNone/>
             </a:pPr>
             <a:r>
@@ -10936,7 +10824,7 @@
               </a:rPr>
               <a:t>READ</a:t>
             </a:r>
-            <a:pPr indent="0" marL="0">
+            <a:pPr algn="ctr" indent="0" marL="0">
               <a:buNone/>
             </a:pPr>
             <a:r>
@@ -10948,51 +10836,9 @@
                 <a:ea typeface="Segoe UI Semibold" pitchFamily="34" charset="-122"/>
                 <a:cs typeface="Segoe UI Semibold" pitchFamily="34" charset="-120"/>
               </a:rPr>
-              <a:t>  LEGGI</a:t>
-            </a:r>
-            <a:endParaRPr lang="en-US" sz="950" dirty="0"/>
-          </a:p>
-        </p:txBody>
-      </p:sp>
-      <p:sp>
-        <p:nvSpPr>
-          <p:cNvPr id="10" name="cmd_346"/>
-          <p:cNvSpPr/>
-          <p:nvPr/>
-        </p:nvSpPr>
-        <p:spPr>
-          <a:xfrm>
-            <a:off x="6510528" y="493776"/>
-            <a:ext cx="1901952" cy="274320"/>
-          </a:xfrm>
-          <a:prstGeom prst="roundRect">
-            <a:avLst>
-              <a:gd name="adj" fmla="val 50000"/>
-            </a:avLst>
-          </a:prstGeom>
-          <a:solidFill>
-            <a:srgbClr val="FFFFFF"/>
-          </a:solidFill>
-          <a:ln w="28575">
-            <a:solidFill>
-              <a:srgbClr val="F7A6C4"/>
-            </a:solidFill>
-          </a:ln>
-          <a:effectLst>
-            <a:outerShdw sx="100000" sy="100000" kx="0" ky="0" algn="bl" rotWithShape="0" blurRad="88900" dist="31750" dir="5400000">
-              <a:srgbClr val="1B2559">
-                <a:alpha val="8000"/>
-              </a:srgbClr>
-            </a:outerShdw>
-          </a:effectLst>
-        </p:spPr>
-        <p:txBody>
-          <a:bodyPr wrap="square" lIns="101600" tIns="0" rIns="101600" bIns="0" rtlCol="0" anchor="ctr">
-            <a:normAutofit/>
-          </a:bodyPr>
-          <a:lstStyle/>
-          <a:p>
-            <a:pPr indent="0" marL="0">
+              <a:t>  →  </a:t>
+            </a:r>
+            <a:pPr algn="ctr" indent="0" marL="0">
               <a:buNone/>
             </a:pPr>
             <a:r>
@@ -11003,7 +10849,7 @@
               </a:rPr>
               <a:t>💬 </a:t>
             </a:r>
-            <a:pPr indent="0" marL="0">
+            <a:pPr algn="ctr" indent="0" marL="0">
               <a:buNone/>
             </a:pPr>
             <a:r>
@@ -11017,33 +10863,19 @@
               </a:rPr>
               <a:t>TALK</a:t>
             </a:r>
-            <a:pPr indent="0" marL="0">
-              <a:buNone/>
-            </a:pPr>
-            <a:r>
-              <a:rPr lang="en-US" sz="950" dirty="0">
-                <a:solidFill>
-                  <a:srgbClr val="5B6785"/>
-                </a:solidFill>
-                <a:latin typeface="Segoe UI Semibold" pitchFamily="34" charset="0"/>
-                <a:ea typeface="Segoe UI Semibold" pitchFamily="34" charset="-122"/>
-                <a:cs typeface="Segoe UI Semibold" pitchFamily="34" charset="-120"/>
-              </a:rPr>
-              <a:t>  PARLA</a:t>
-            </a:r>
             <a:endParaRPr lang="en-US" sz="950" dirty="0"/>
           </a:p>
         </p:txBody>
       </p:sp>
       <p:sp>
         <p:nvSpPr>
-          <p:cNvPr id="11" name="meta_347"/>
-          <p:cNvSpPr/>
-          <p:nvPr/>
-        </p:nvSpPr>
-        <p:spPr>
-          <a:xfrm>
-            <a:off x="6510528" y="804672"/>
+          <p:cNvPr id="10" name="meta_341"/>
+          <p:cNvSpPr/>
+          <p:nvPr/>
+        </p:nvSpPr>
+        <p:spPr>
+          <a:xfrm>
+            <a:off x="6510528" y="548640"/>
             <a:ext cx="1901952" cy="274320"/>
           </a:xfrm>
           <a:prstGeom prst="roundRect">
@@ -11086,13 +10918,13 @@
       </p:sp>
       <p:sp>
         <p:nvSpPr>
-          <p:cNvPr id="12" name="tag_348"/>
-          <p:cNvSpPr/>
-          <p:nvPr/>
-        </p:nvSpPr>
-        <p:spPr>
-          <a:xfrm>
-            <a:off x="6510528" y="1115568"/>
+          <p:cNvPr id="11" name="tag_342"/>
+          <p:cNvSpPr/>
+          <p:nvPr/>
+        </p:nvSpPr>
+        <p:spPr>
+          <a:xfrm>
+            <a:off x="6510528" y="914400"/>
             <a:ext cx="1901952" cy="274320"/>
           </a:xfrm>
           <a:prstGeom prst="roundRect">
@@ -11149,7 +10981,7 @@
       </p:sp>
       <p:pic>
         <p:nvPicPr>
-          <p:cNvPr id="13" name="logo_349" descr="/home/claude/lls-course/v2/img/logo.png">    </p:cNvPr>
+          <p:cNvPr id="12" name="logo_343" descr="/home/claude/lls-course/v2/img/logo.png">    </p:cNvPr>
           <p:cNvPicPr>
             <a:picLocks noChangeAspect="1"/>
           </p:cNvPicPr>
@@ -11173,7 +11005,7 @@
       </p:pic>
       <p:sp>
         <p:nvSpPr>
-          <p:cNvPr id="14" name="foot_350"/>
+          <p:cNvPr id="13" name="foot_344"/>
           <p:cNvSpPr/>
           <p:nvPr/>
         </p:nvSpPr>
@@ -11212,14 +11044,14 @@
       </p:sp>
       <p:sp>
         <p:nvSpPr>
-          <p:cNvPr id="15" name="pf_351"/>
+          <p:cNvPr id="14" name="pf_345"/>
           <p:cNvSpPr/>
           <p:nvPr/>
         </p:nvSpPr>
         <p:spPr>
           <a:xfrm rot="-90000">
-            <a:off x="411480" y="1417320"/>
-            <a:ext cx="2560320" cy="1280160"/>
+            <a:off x="790524" y="1417320"/>
+            <a:ext cx="1802233" cy="1280160"/>
           </a:xfrm>
           <a:prstGeom prst="roundRect">
             <a:avLst>
@@ -11246,7 +11078,7 @@
       </p:sp>
       <p:pic>
         <p:nvPicPr>
-          <p:cNvPr id="16" name="ph_352" descr="/home/claude/lls-course/v2/cache/b2_6b_guitar_sax_jpg_594x286_31.png">    </p:cNvPr>
+          <p:cNvPr id="15" name="ph_346" descr="/home/claude/lls-course/v2/cache/b2_6b_guitar_sax_jpg_412x286_31.png">    </p:cNvPr>
           <p:cNvPicPr>
             <a:picLocks noChangeAspect="1"/>
           </p:cNvPicPr>
@@ -11260,8 +11092,8 @@
         </p:blipFill>
         <p:spPr>
           <a:xfrm rot="-90000">
-            <a:off x="457200" y="1463040"/>
-            <a:ext cx="2468880" cy="1188720"/>
+            <a:off x="836244" y="1463040"/>
+            <a:ext cx="1710793" cy="1188720"/>
           </a:xfrm>
           <a:prstGeom prst="rect">
             <a:avLst/>
@@ -11270,7 +11102,7 @@
       </p:pic>
       <p:sp>
         <p:nvSpPr>
-          <p:cNvPr id="17" name="cd_353"/>
+          <p:cNvPr id="16" name="cd_347"/>
           <p:cNvSpPr/>
           <p:nvPr/>
         </p:nvSpPr>
@@ -11285,11 +11117,11 @@
             </a:avLst>
           </a:prstGeom>
           <a:solidFill>
-            <a:srgbClr val="FFF6CC"/>
+            <a:srgbClr val="EEE8FB"/>
           </a:solidFill>
           <a:ln w="28575">
             <a:solidFill>
-              <a:srgbClr val="FFE07A"/>
+              <a:srgbClr val="CDBFF3"/>
             </a:solidFill>
             <a:prstDash val="solid"/>
           </a:ln>
@@ -11304,7 +11136,7 @@
       </p:sp>
       <p:sp>
         <p:nvSpPr>
-          <p:cNvPr id="18" name="ii_354"/>
+          <p:cNvPr id="17" name="ii_348"/>
           <p:cNvSpPr/>
           <p:nvPr/>
         </p:nvSpPr>
@@ -11340,7 +11172,7 @@
       </p:sp>
       <p:sp>
         <p:nvSpPr>
-          <p:cNvPr id="19" name="ih_355"/>
+          <p:cNvPr id="18" name="ih_349"/>
           <p:cNvSpPr/>
           <p:nvPr/>
         </p:nvSpPr>
@@ -11379,7 +11211,7 @@
       </p:sp>
       <p:sp>
         <p:nvSpPr>
-          <p:cNvPr id="20" name="il_356"/>
+          <p:cNvPr id="19" name="il_350"/>
           <p:cNvSpPr/>
           <p:nvPr/>
         </p:nvSpPr>
@@ -11600,7 +11432,7 @@
       </p:sp>
       <p:sp>
         <p:nvSpPr>
-          <p:cNvPr id="21" name="R1_sb357"/>
+          <p:cNvPr id="20" name="R1_sb351"/>
           <p:cNvSpPr/>
           <p:nvPr/>
         </p:nvSpPr>
@@ -11652,7 +11484,7 @@
       </p:sp>
       <p:sp>
         <p:nvSpPr>
-          <p:cNvPr id="22" name="R1_sl358"/>
+          <p:cNvPr id="21" name="R1_sl352"/>
           <p:cNvSpPr/>
           <p:nvPr/>
         </p:nvSpPr>
@@ -11754,7 +11586,7 @@
       </p:sp>
       <p:sp>
         <p:nvSpPr>
-          <p:cNvPr id="23" name="R2_sb359"/>
+          <p:cNvPr id="22" name="R2_sb353"/>
           <p:cNvSpPr/>
           <p:nvPr/>
         </p:nvSpPr>
@@ -11806,7 +11638,7 @@
       </p:sp>
       <p:sp>
         <p:nvSpPr>
-          <p:cNvPr id="24" name="R2_sl360"/>
+          <p:cNvPr id="23" name="R2_sl354"/>
           <p:cNvSpPr/>
           <p:nvPr/>
         </p:nvSpPr>
@@ -11908,7 +11740,7 @@
       </p:sp>
       <p:sp>
         <p:nvSpPr>
-          <p:cNvPr id="25" name="R3_sb361"/>
+          <p:cNvPr id="24" name="R3_sb355"/>
           <p:cNvSpPr/>
           <p:nvPr/>
         </p:nvSpPr>
@@ -11960,7 +11792,7 @@
       </p:sp>
       <p:sp>
         <p:nvSpPr>
-          <p:cNvPr id="26" name="R3_sl362"/>
+          <p:cNvPr id="25" name="R3_sl356"/>
           <p:cNvSpPr/>
           <p:nvPr/>
         </p:nvSpPr>
@@ -12062,7 +11894,7 @@
       </p:sp>
       <p:sp>
         <p:nvSpPr>
-          <p:cNvPr id="27" name="R4_sb363"/>
+          <p:cNvPr id="26" name="R4_sb357"/>
           <p:cNvSpPr/>
           <p:nvPr/>
         </p:nvSpPr>
@@ -12114,7 +11946,7 @@
       </p:sp>
       <p:sp>
         <p:nvSpPr>
-          <p:cNvPr id="28" name="R4_sl364"/>
+          <p:cNvPr id="27" name="R4_sl358"/>
           <p:cNvSpPr/>
           <p:nvPr/>
         </p:nvSpPr>
@@ -12216,7 +12048,7 @@
       </p:sp>
       <p:sp>
         <p:nvSpPr>
-          <p:cNvPr id="29" name="R5_sb365"/>
+          <p:cNvPr id="28" name="R5_sb359"/>
           <p:cNvSpPr/>
           <p:nvPr/>
         </p:nvSpPr>
@@ -12268,7 +12100,7 @@
       </p:sp>
       <p:sp>
         <p:nvSpPr>
-          <p:cNvPr id="30" name="R5_sl366"/>
+          <p:cNvPr id="29" name="R5_sl360"/>
           <p:cNvSpPr/>
           <p:nvPr/>
         </p:nvSpPr>
@@ -12370,7 +12202,7 @@
       </p:sp>
       <p:sp>
         <p:nvSpPr>
-          <p:cNvPr id="31" name="R6_sb367"/>
+          <p:cNvPr id="30" name="R6_sb361"/>
           <p:cNvSpPr/>
           <p:nvPr/>
         </p:nvSpPr>
@@ -12422,7 +12254,7 @@
       </p:sp>
       <p:sp>
         <p:nvSpPr>
-          <p:cNvPr id="32" name="R6_sl368"/>
+          <p:cNvPr id="31" name="R6_sl362"/>
           <p:cNvSpPr/>
           <p:nvPr/>
         </p:nvSpPr>
@@ -12533,7 +12365,7 @@
                                           </p:stCondLst>
                                         </p:cTn>
                                         <p:tgtEl>
-                                          <p:spTgt spid="21"/>
+                                          <p:spTgt spid="20"/>
                                         </p:tgtEl>
                                         <p:attrNameLst>
                                           <p:attrName>style.visibility</p:attrName>
@@ -12547,7 +12379,7 @@
                                       <p:cBhvr>
                                         <p:cTn id="7" dur="400"/>
                                         <p:tgtEl>
-                                          <p:spTgt spid="21"/>
+                                          <p:spTgt spid="20"/>
                                         </p:tgtEl>
                                       </p:cBhvr>
                                     </p:animEffect>
@@ -12568,7 +12400,7 @@
                                           </p:stCondLst>
                                         </p:cTn>
                                         <p:tgtEl>
-                                          <p:spTgt spid="22"/>
+                                          <p:spTgt spid="21"/>
                                         </p:tgtEl>
                                         <p:attrNameLst>
                                           <p:attrName>style.visibility</p:attrName>
@@ -12582,7 +12414,7 @@
                                       <p:cBhvr>
                                         <p:cTn id="10" dur="400"/>
                                         <p:tgtEl>
-                                          <p:spTgt spid="22"/>
+                                          <p:spTgt spid="21"/>
                                         </p:tgtEl>
                                       </p:cBhvr>
                                     </p:animEffect>
@@ -12621,7 +12453,7 @@
                                           </p:stCondLst>
                                         </p:cTn>
                                         <p:tgtEl>
-                                          <p:spTgt spid="23"/>
+                                          <p:spTgt spid="22"/>
                                         </p:tgtEl>
                                         <p:attrNameLst>
                                           <p:attrName>style.visibility</p:attrName>
@@ -12635,7 +12467,7 @@
                                       <p:cBhvr>
                                         <p:cTn id="15" dur="400"/>
                                         <p:tgtEl>
-                                          <p:spTgt spid="23"/>
+                                          <p:spTgt spid="22"/>
                                         </p:tgtEl>
                                       </p:cBhvr>
                                     </p:animEffect>
@@ -12656,7 +12488,7 @@
                                           </p:stCondLst>
                                         </p:cTn>
                                         <p:tgtEl>
-                                          <p:spTgt spid="24"/>
+                                          <p:spTgt spid="23"/>
                                         </p:tgtEl>
                                         <p:attrNameLst>
                                           <p:attrName>style.visibility</p:attrName>
@@ -12670,7 +12502,7 @@
                                       <p:cBhvr>
                                         <p:cTn id="18" dur="400"/>
                                         <p:tgtEl>
-                                          <p:spTgt spid="24"/>
+                                          <p:spTgt spid="23"/>
                                         </p:tgtEl>
                                       </p:cBhvr>
                                     </p:animEffect>
@@ -12709,7 +12541,7 @@
                                           </p:stCondLst>
                                         </p:cTn>
                                         <p:tgtEl>
-                                          <p:spTgt spid="25"/>
+                                          <p:spTgt spid="24"/>
                                         </p:tgtEl>
                                         <p:attrNameLst>
                                           <p:attrName>style.visibility</p:attrName>
@@ -12723,7 +12555,7 @@
                                       <p:cBhvr>
                                         <p:cTn id="23" dur="400"/>
                                         <p:tgtEl>
-                                          <p:spTgt spid="25"/>
+                                          <p:spTgt spid="24"/>
                                         </p:tgtEl>
                                       </p:cBhvr>
                                     </p:animEffect>
@@ -12744,7 +12576,7 @@
                                           </p:stCondLst>
                                         </p:cTn>
                                         <p:tgtEl>
-                                          <p:spTgt spid="26"/>
+                                          <p:spTgt spid="25"/>
                                         </p:tgtEl>
                                         <p:attrNameLst>
                                           <p:attrName>style.visibility</p:attrName>
@@ -12758,7 +12590,7 @@
                                       <p:cBhvr>
                                         <p:cTn id="26" dur="400"/>
                                         <p:tgtEl>
-                                          <p:spTgt spid="26"/>
+                                          <p:spTgt spid="25"/>
                                         </p:tgtEl>
                                       </p:cBhvr>
                                     </p:animEffect>
@@ -12797,7 +12629,7 @@
                                           </p:stCondLst>
                                         </p:cTn>
                                         <p:tgtEl>
-                                          <p:spTgt spid="27"/>
+                                          <p:spTgt spid="26"/>
                                         </p:tgtEl>
                                         <p:attrNameLst>
                                           <p:attrName>style.visibility</p:attrName>
@@ -12811,7 +12643,7 @@
                                       <p:cBhvr>
                                         <p:cTn id="31" dur="400"/>
                                         <p:tgtEl>
-                                          <p:spTgt spid="27"/>
+                                          <p:spTgt spid="26"/>
                                         </p:tgtEl>
                                       </p:cBhvr>
                                     </p:animEffect>
@@ -12832,7 +12664,7 @@
                                           </p:stCondLst>
                                         </p:cTn>
                                         <p:tgtEl>
-                                          <p:spTgt spid="28"/>
+                                          <p:spTgt spid="27"/>
                                         </p:tgtEl>
                                         <p:attrNameLst>
                                           <p:attrName>style.visibility</p:attrName>
@@ -12846,7 +12678,7 @@
                                       <p:cBhvr>
                                         <p:cTn id="34" dur="400"/>
                                         <p:tgtEl>
-                                          <p:spTgt spid="28"/>
+                                          <p:spTgt spid="27"/>
                                         </p:tgtEl>
                                       </p:cBhvr>
                                     </p:animEffect>
@@ -12885,7 +12717,7 @@
                                           </p:stCondLst>
                                         </p:cTn>
                                         <p:tgtEl>
-                                          <p:spTgt spid="29"/>
+                                          <p:spTgt spid="28"/>
                                         </p:tgtEl>
                                         <p:attrNameLst>
                                           <p:attrName>style.visibility</p:attrName>
@@ -12899,7 +12731,7 @@
                                       <p:cBhvr>
                                         <p:cTn id="39" dur="400"/>
                                         <p:tgtEl>
-                                          <p:spTgt spid="29"/>
+                                          <p:spTgt spid="28"/>
                                         </p:tgtEl>
                                       </p:cBhvr>
                                     </p:animEffect>
@@ -12920,7 +12752,7 @@
                                           </p:stCondLst>
                                         </p:cTn>
                                         <p:tgtEl>
-                                          <p:spTgt spid="30"/>
+                                          <p:spTgt spid="29"/>
                                         </p:tgtEl>
                                         <p:attrNameLst>
                                           <p:attrName>style.visibility</p:attrName>
@@ -12934,7 +12766,7 @@
                                       <p:cBhvr>
                                         <p:cTn id="42" dur="400"/>
                                         <p:tgtEl>
-                                          <p:spTgt spid="30"/>
+                                          <p:spTgt spid="29"/>
                                         </p:tgtEl>
                                       </p:cBhvr>
                                     </p:animEffect>
@@ -12973,7 +12805,7 @@
                                           </p:stCondLst>
                                         </p:cTn>
                                         <p:tgtEl>
-                                          <p:spTgt spid="31"/>
+                                          <p:spTgt spid="30"/>
                                         </p:tgtEl>
                                         <p:attrNameLst>
                                           <p:attrName>style.visibility</p:attrName>
@@ -12987,7 +12819,7 @@
                                       <p:cBhvr>
                                         <p:cTn id="47" dur="400"/>
                                         <p:tgtEl>
-                                          <p:spTgt spid="31"/>
+                                          <p:spTgt spid="30"/>
                                         </p:tgtEl>
                                       </p:cBhvr>
                                     </p:animEffect>
@@ -13008,7 +12840,7 @@
                                           </p:stCondLst>
                                         </p:cTn>
                                         <p:tgtEl>
-                                          <p:spTgt spid="32"/>
+                                          <p:spTgt spid="31"/>
                                         </p:tgtEl>
                                         <p:attrNameLst>
                                           <p:attrName>style.visibility</p:attrName>
@@ -13022,7 +12854,7 @@
                                       <p:cBhvr>
                                         <p:cTn id="50" dur="400"/>
                                         <p:tgtEl>
-                                          <p:spTgt spid="32"/>
+                                          <p:spTgt spid="31"/>
                                         </p:tgtEl>
                                       </p:cBhvr>
                                     </p:animEffect>
@@ -13093,7 +12925,7 @@
       </p:grpSpPr>
       <p:sp>
         <p:nvSpPr>
-          <p:cNvPr id="3" name="bd_369"/>
+          <p:cNvPr id="3" name="bd_363"/>
           <p:cNvSpPr/>
           <p:nvPr/>
         </p:nvSpPr>
@@ -13145,7 +12977,7 @@
       </p:sp>
       <p:pic>
         <p:nvPicPr>
-          <p:cNvPr id="4" name="brY_370" descr="/home/claude/lls-course/v2/assets/brush-yellow.png">    </p:cNvPr>
+          <p:cNvPr id="4" name="brY_364" descr="/home/claude/lls-course/v2/assets/brush-yellow.png">    </p:cNvPr>
           <p:cNvPicPr>
             <a:picLocks noChangeAspect="1"/>
           </p:cNvPicPr>
@@ -13169,7 +13001,7 @@
       </p:pic>
       <p:sp>
         <p:nvSpPr>
-          <p:cNvPr id="5" name="title_371"/>
+          <p:cNvPr id="5" name="title_365"/>
           <p:cNvSpPr/>
           <p:nvPr/>
         </p:nvSpPr>
@@ -13210,7 +13042,7 @@
       </p:sp>
       <p:pic>
         <p:nvPicPr>
-          <p:cNvPr id="6" name="brP_372" descr="/home/claude/lls-course/v2/assets/brush-pink.png">    </p:cNvPr>
+          <p:cNvPr id="6" name="brP_366" descr="/home/claude/lls-course/v2/assets/brush-pink.png">    </p:cNvPr>
           <p:cNvPicPr>
             <a:picLocks noChangeAspect="1"/>
           </p:cNvPicPr>
@@ -13234,7 +13066,7 @@
       </p:pic>
       <p:sp>
         <p:nvSpPr>
-          <p:cNvPr id="7" name="ins_373"/>
+          <p:cNvPr id="7" name="ins_367"/>
           <p:cNvSpPr/>
           <p:nvPr/>
         </p:nvSpPr>
@@ -13275,7 +13107,7 @@
       </p:sp>
       <p:sp>
         <p:nvSpPr>
-          <p:cNvPr id="8" name="insIT_374"/>
+          <p:cNvPr id="8" name="insIT_368"/>
           <p:cNvSpPr/>
           <p:nvPr/>
         </p:nvSpPr>
@@ -13316,7 +13148,7 @@
       </p:sp>
       <p:sp>
         <p:nvSpPr>
-          <p:cNvPr id="9" name="cmd_375"/>
+          <p:cNvPr id="9" name="cmd_369"/>
           <p:cNvSpPr/>
           <p:nvPr/>
         </p:nvSpPr>
@@ -13347,12 +13179,12 @@
           </a:effectLst>
         </p:spPr>
         <p:txBody>
-          <a:bodyPr wrap="square" lIns="101600" tIns="0" rIns="101600" bIns="0" rtlCol="0" anchor="ctr">
+          <a:bodyPr wrap="square" lIns="76200" tIns="0" rIns="76200" bIns="0" rtlCol="0" anchor="ctr">
             <a:normAutofit/>
           </a:bodyPr>
           <a:lstStyle/>
           <a:p>
-            <a:pPr indent="0" marL="0">
+            <a:pPr algn="ctr" indent="0" marL="0">
               <a:buNone/>
             </a:pPr>
             <a:r>
@@ -13363,7 +13195,7 @@
               </a:rPr>
               <a:t>💬 </a:t>
             </a:r>
-            <a:pPr indent="0" marL="0">
+            <a:pPr algn="ctr" indent="0" marL="0">
               <a:buNone/>
             </a:pPr>
             <a:r>
@@ -13377,7 +13209,7 @@
               </a:rPr>
               <a:t>TALK</a:t>
             </a:r>
-            <a:pPr indent="0" marL="0">
+            <a:pPr algn="ctr" indent="0" marL="0">
               <a:buNone/>
             </a:pPr>
             <a:r>
@@ -13397,13 +13229,13 @@
       </p:sp>
       <p:sp>
         <p:nvSpPr>
-          <p:cNvPr id="10" name="meta_376"/>
-          <p:cNvSpPr/>
-          <p:nvPr/>
-        </p:nvSpPr>
-        <p:spPr>
-          <a:xfrm>
-            <a:off x="6510528" y="493776"/>
+          <p:cNvPr id="10" name="meta_370"/>
+          <p:cNvSpPr/>
+          <p:nvPr/>
+        </p:nvSpPr>
+        <p:spPr>
+          <a:xfrm>
+            <a:off x="6510528" y="548640"/>
             <a:ext cx="1901952" cy="274320"/>
           </a:xfrm>
           <a:prstGeom prst="roundRect">
@@ -13446,13 +13278,13 @@
       </p:sp>
       <p:sp>
         <p:nvSpPr>
-          <p:cNvPr id="11" name="tag_377"/>
-          <p:cNvSpPr/>
-          <p:nvPr/>
-        </p:nvSpPr>
-        <p:spPr>
-          <a:xfrm>
-            <a:off x="6510528" y="804672"/>
+          <p:cNvPr id="11" name="tag_371"/>
+          <p:cNvSpPr/>
+          <p:nvPr/>
+        </p:nvSpPr>
+        <p:spPr>
+          <a:xfrm>
+            <a:off x="6510528" y="914400"/>
             <a:ext cx="1901952" cy="274320"/>
           </a:xfrm>
           <a:prstGeom prst="roundRect">
@@ -13509,7 +13341,7 @@
       </p:sp>
       <p:pic>
         <p:nvPicPr>
-          <p:cNvPr id="12" name="logo_378" descr="/home/claude/lls-course/v2/img/logo.png">    </p:cNvPr>
+          <p:cNvPr id="12" name="logo_372" descr="/home/claude/lls-course/v2/img/logo.png">    </p:cNvPr>
           <p:cNvPicPr>
             <a:picLocks noChangeAspect="1"/>
           </p:cNvPicPr>
@@ -13533,7 +13365,7 @@
       </p:pic>
       <p:sp>
         <p:nvSpPr>
-          <p:cNvPr id="13" name="foot_379"/>
+          <p:cNvPr id="13" name="foot_373"/>
           <p:cNvSpPr/>
           <p:nvPr/>
         </p:nvSpPr>
@@ -13572,7 +13404,7 @@
       </p:sp>
       <p:sp>
         <p:nvSpPr>
-          <p:cNvPr id="14" name="R1_sb380"/>
+          <p:cNvPr id="14" name="R1_sb374"/>
           <p:cNvSpPr/>
           <p:nvPr/>
         </p:nvSpPr>
@@ -13624,7 +13456,7 @@
       </p:sp>
       <p:sp>
         <p:nvSpPr>
-          <p:cNvPr id="15" name="R1_sl381"/>
+          <p:cNvPr id="15" name="R1_sl375"/>
           <p:cNvSpPr/>
           <p:nvPr/>
         </p:nvSpPr>
@@ -13678,7 +13510,7 @@
       </p:sp>
       <p:sp>
         <p:nvSpPr>
-          <p:cNvPr id="16" name="R2_sb382"/>
+          <p:cNvPr id="16" name="R2_sb376"/>
           <p:cNvSpPr/>
           <p:nvPr/>
         </p:nvSpPr>
@@ -13730,7 +13562,7 @@
       </p:sp>
       <p:sp>
         <p:nvSpPr>
-          <p:cNvPr id="17" name="R2_sl383"/>
+          <p:cNvPr id="17" name="R2_sl377"/>
           <p:cNvSpPr/>
           <p:nvPr/>
         </p:nvSpPr>
@@ -13784,7 +13616,7 @@
       </p:sp>
       <p:sp>
         <p:nvSpPr>
-          <p:cNvPr id="18" name="R3_sb384"/>
+          <p:cNvPr id="18" name="R3_sb378"/>
           <p:cNvSpPr/>
           <p:nvPr/>
         </p:nvSpPr>
@@ -13836,7 +13668,7 @@
       </p:sp>
       <p:sp>
         <p:nvSpPr>
-          <p:cNvPr id="19" name="R3_sl385"/>
+          <p:cNvPr id="19" name="R3_sl379"/>
           <p:cNvSpPr/>
           <p:nvPr/>
         </p:nvSpPr>
@@ -13890,7 +13722,7 @@
       </p:sp>
       <p:sp>
         <p:nvSpPr>
-          <p:cNvPr id="20" name="R4_sb386"/>
+          <p:cNvPr id="20" name="R4_sb380"/>
           <p:cNvSpPr/>
           <p:nvPr/>
         </p:nvSpPr>
@@ -13942,7 +13774,7 @@
       </p:sp>
       <p:sp>
         <p:nvSpPr>
-          <p:cNvPr id="21" name="R4_sl387"/>
+          <p:cNvPr id="21" name="R4_sl381"/>
           <p:cNvSpPr/>
           <p:nvPr/>
         </p:nvSpPr>
@@ -13996,7 +13828,7 @@
       </p:sp>
       <p:sp>
         <p:nvSpPr>
-          <p:cNvPr id="22" name="R5_sb388"/>
+          <p:cNvPr id="22" name="R5_sb382"/>
           <p:cNvSpPr/>
           <p:nvPr/>
         </p:nvSpPr>
@@ -14048,7 +13880,7 @@
       </p:sp>
       <p:sp>
         <p:nvSpPr>
-          <p:cNvPr id="23" name="R5_sl389"/>
+          <p:cNvPr id="23" name="R5_sl383"/>
           <p:cNvSpPr/>
           <p:nvPr/>
         </p:nvSpPr>
@@ -14102,7 +13934,7 @@
       </p:sp>
       <p:sp>
         <p:nvSpPr>
-          <p:cNvPr id="24" name="R6_sb390"/>
+          <p:cNvPr id="24" name="R6_sb384"/>
           <p:cNvSpPr/>
           <p:nvPr/>
         </p:nvSpPr>
@@ -14154,7 +13986,7 @@
       </p:sp>
       <p:sp>
         <p:nvSpPr>
-          <p:cNvPr id="25" name="R6_sl391"/>
+          <p:cNvPr id="25" name="R6_sl385"/>
           <p:cNvSpPr/>
           <p:nvPr/>
         </p:nvSpPr>
@@ -14808,7 +14640,7 @@
       </p:grpSpPr>
       <p:sp>
         <p:nvSpPr>
-          <p:cNvPr id="3" name="bd_392"/>
+          <p:cNvPr id="3" name="bd_386"/>
           <p:cNvSpPr/>
           <p:nvPr/>
         </p:nvSpPr>
@@ -14860,7 +14692,7 @@
       </p:sp>
       <p:pic>
         <p:nvPicPr>
-          <p:cNvPr id="4" name="brY_393" descr="/home/claude/lls-course/v2/assets/brush-yellow.png">    </p:cNvPr>
+          <p:cNvPr id="4" name="brY_387" descr="/home/claude/lls-course/v2/assets/brush-yellow.png">    </p:cNvPr>
           <p:cNvPicPr>
             <a:picLocks noChangeAspect="1"/>
           </p:cNvPicPr>
@@ -14884,7 +14716,7 @@
       </p:pic>
       <p:sp>
         <p:nvSpPr>
-          <p:cNvPr id="5" name="title_394"/>
+          <p:cNvPr id="5" name="title_388"/>
           <p:cNvSpPr/>
           <p:nvPr/>
         </p:nvSpPr>
@@ -14925,7 +14757,7 @@
       </p:sp>
       <p:pic>
         <p:nvPicPr>
-          <p:cNvPr id="6" name="brP_395" descr="/home/claude/lls-course/v2/assets/brush-pink.png">    </p:cNvPr>
+          <p:cNvPr id="6" name="brP_389" descr="/home/claude/lls-course/v2/assets/brush-pink.png">    </p:cNvPr>
           <p:cNvPicPr>
             <a:picLocks noChangeAspect="1"/>
           </p:cNvPicPr>
@@ -14949,7 +14781,7 @@
       </p:pic>
       <p:sp>
         <p:nvSpPr>
-          <p:cNvPr id="7" name="ins_396"/>
+          <p:cNvPr id="7" name="ins_390"/>
           <p:cNvSpPr/>
           <p:nvPr/>
         </p:nvSpPr>
@@ -14990,7 +14822,7 @@
       </p:sp>
       <p:sp>
         <p:nvSpPr>
-          <p:cNvPr id="8" name="insIT_397"/>
+          <p:cNvPr id="8" name="insIT_391"/>
           <p:cNvSpPr/>
           <p:nvPr/>
         </p:nvSpPr>
@@ -15031,7 +14863,7 @@
       </p:sp>
       <p:sp>
         <p:nvSpPr>
-          <p:cNvPr id="9" name="cmd_398"/>
+          <p:cNvPr id="9" name="cmd_392"/>
           <p:cNvSpPr/>
           <p:nvPr/>
         </p:nvSpPr>
@@ -15062,12 +14894,12 @@
           </a:effectLst>
         </p:spPr>
         <p:txBody>
-          <a:bodyPr wrap="square" lIns="101600" tIns="0" rIns="101600" bIns="0" rtlCol="0" anchor="ctr">
+          <a:bodyPr wrap="square" lIns="76200" tIns="0" rIns="76200" bIns="0" rtlCol="0" anchor="ctr">
             <a:normAutofit/>
           </a:bodyPr>
           <a:lstStyle/>
           <a:p>
-            <a:pPr indent="0" marL="0">
+            <a:pPr algn="ctr" indent="0" marL="0">
               <a:buNone/>
             </a:pPr>
             <a:r>
@@ -15078,7 +14910,7 @@
               </a:rPr>
               <a:t>💬 </a:t>
             </a:r>
-            <a:pPr indent="0" marL="0">
+            <a:pPr algn="ctr" indent="0" marL="0">
               <a:buNone/>
             </a:pPr>
             <a:r>
@@ -15092,7 +14924,7 @@
               </a:rPr>
               <a:t>TALK</a:t>
             </a:r>
-            <a:pPr indent="0" marL="0">
+            <a:pPr algn="ctr" indent="0" marL="0">
               <a:buNone/>
             </a:pPr>
             <a:r>
@@ -15112,13 +14944,13 @@
       </p:sp>
       <p:sp>
         <p:nvSpPr>
-          <p:cNvPr id="10" name="meta_399"/>
-          <p:cNvSpPr/>
-          <p:nvPr/>
-        </p:nvSpPr>
-        <p:spPr>
-          <a:xfrm>
-            <a:off x="6510528" y="493776"/>
+          <p:cNvPr id="10" name="meta_393"/>
+          <p:cNvSpPr/>
+          <p:nvPr/>
+        </p:nvSpPr>
+        <p:spPr>
+          <a:xfrm>
+            <a:off x="6510528" y="548640"/>
             <a:ext cx="1901952" cy="274320"/>
           </a:xfrm>
           <a:prstGeom prst="roundRect">
@@ -15161,13 +14993,13 @@
       </p:sp>
       <p:sp>
         <p:nvSpPr>
-          <p:cNvPr id="11" name="tag_400"/>
-          <p:cNvSpPr/>
-          <p:nvPr/>
-        </p:nvSpPr>
-        <p:spPr>
-          <a:xfrm>
-            <a:off x="6510528" y="804672"/>
+          <p:cNvPr id="11" name="tag_394"/>
+          <p:cNvSpPr/>
+          <p:nvPr/>
+        </p:nvSpPr>
+        <p:spPr>
+          <a:xfrm>
+            <a:off x="6510528" y="914400"/>
             <a:ext cx="1901952" cy="274320"/>
           </a:xfrm>
           <a:prstGeom prst="roundRect">
@@ -15224,7 +15056,7 @@
       </p:sp>
       <p:pic>
         <p:nvPicPr>
-          <p:cNvPr id="12" name="logo_401" descr="/home/claude/lls-course/v2/img/logo.png">    </p:cNvPr>
+          <p:cNvPr id="12" name="logo_395" descr="/home/claude/lls-course/v2/img/logo.png">    </p:cNvPr>
           <p:cNvPicPr>
             <a:picLocks noChangeAspect="1"/>
           </p:cNvPicPr>
@@ -15248,7 +15080,7 @@
       </p:pic>
       <p:sp>
         <p:nvSpPr>
-          <p:cNvPr id="13" name="foot_402"/>
+          <p:cNvPr id="13" name="foot_396"/>
           <p:cNvSpPr/>
           <p:nvPr/>
         </p:nvSpPr>
@@ -15287,7 +15119,7 @@
       </p:sp>
       <p:sp>
         <p:nvSpPr>
-          <p:cNvPr id="14" name="cd_403"/>
+          <p:cNvPr id="14" name="cd_397"/>
           <p:cNvSpPr/>
           <p:nvPr/>
         </p:nvSpPr>
@@ -15321,7 +15153,7 @@
       </p:sp>
       <p:sp>
         <p:nvSpPr>
-          <p:cNvPr id="15" name="ii_404"/>
+          <p:cNvPr id="15" name="ii_398"/>
           <p:cNvSpPr/>
           <p:nvPr/>
         </p:nvSpPr>
@@ -15357,7 +15189,7 @@
       </p:sp>
       <p:sp>
         <p:nvSpPr>
-          <p:cNvPr id="16" name="ih_405"/>
+          <p:cNvPr id="16" name="ih_399"/>
           <p:cNvSpPr/>
           <p:nvPr/>
         </p:nvSpPr>
@@ -15396,7 +15228,7 @@
       </p:sp>
       <p:sp>
         <p:nvSpPr>
-          <p:cNvPr id="17" name="il_406"/>
+          <p:cNvPr id="17" name="il_400"/>
           <p:cNvSpPr/>
           <p:nvPr/>
         </p:nvSpPr>
@@ -15513,7 +15345,7 @@
       </p:sp>
       <p:sp>
         <p:nvSpPr>
-          <p:cNvPr id="18" name="R1_qb407"/>
+          <p:cNvPr id="18" name="R1_qb401"/>
           <p:cNvSpPr/>
           <p:nvPr/>
         </p:nvSpPr>
@@ -15565,7 +15397,7 @@
       </p:sp>
       <p:sp>
         <p:nvSpPr>
-          <p:cNvPr id="19" name="R1_sq408"/>
+          <p:cNvPr id="19" name="R1_sq402"/>
           <p:cNvSpPr/>
           <p:nvPr/>
         </p:nvSpPr>
@@ -15638,7 +15470,7 @@
       </p:sp>
       <p:sp>
         <p:nvSpPr>
-          <p:cNvPr id="20" name="R2_qb409"/>
+          <p:cNvPr id="20" name="R2_qb403"/>
           <p:cNvSpPr/>
           <p:nvPr/>
         </p:nvSpPr>
@@ -15690,7 +15522,7 @@
       </p:sp>
       <p:sp>
         <p:nvSpPr>
-          <p:cNvPr id="21" name="R2_sq410"/>
+          <p:cNvPr id="21" name="R2_sq404"/>
           <p:cNvSpPr/>
           <p:nvPr/>
         </p:nvSpPr>
@@ -15763,7 +15595,7 @@
       </p:sp>
       <p:sp>
         <p:nvSpPr>
-          <p:cNvPr id="22" name="R3_qb411"/>
+          <p:cNvPr id="22" name="R3_qb405"/>
           <p:cNvSpPr/>
           <p:nvPr/>
         </p:nvSpPr>
@@ -15815,7 +15647,7 @@
       </p:sp>
       <p:sp>
         <p:nvSpPr>
-          <p:cNvPr id="23" name="R3_sq412"/>
+          <p:cNvPr id="23" name="R3_sq406"/>
           <p:cNvSpPr/>
           <p:nvPr/>
         </p:nvSpPr>
@@ -16224,7 +16056,7 @@
       </p:grpSpPr>
       <p:sp>
         <p:nvSpPr>
-          <p:cNvPr id="3" name="bd_413"/>
+          <p:cNvPr id="3" name="bd_407"/>
           <p:cNvSpPr/>
           <p:nvPr/>
         </p:nvSpPr>
@@ -16276,7 +16108,7 @@
       </p:sp>
       <p:pic>
         <p:nvPicPr>
-          <p:cNvPr id="4" name="brY_414" descr="/home/claude/lls-course/v2/assets/brush-yellow.png">    </p:cNvPr>
+          <p:cNvPr id="4" name="brY_408" descr="/home/claude/lls-course/v2/assets/brush-yellow.png">    </p:cNvPr>
           <p:cNvPicPr>
             <a:picLocks noChangeAspect="1"/>
           </p:cNvPicPr>
@@ -16300,7 +16132,7 @@
       </p:pic>
       <p:sp>
         <p:nvSpPr>
-          <p:cNvPr id="5" name="title_415"/>
+          <p:cNvPr id="5" name="title_409"/>
           <p:cNvSpPr/>
           <p:nvPr/>
         </p:nvSpPr>
@@ -16341,7 +16173,7 @@
       </p:sp>
       <p:pic>
         <p:nvPicPr>
-          <p:cNvPr id="6" name="brP_416" descr="/home/claude/lls-course/v2/assets/brush-pink.png">    </p:cNvPr>
+          <p:cNvPr id="6" name="brP_410" descr="/home/claude/lls-course/v2/assets/brush-pink.png">    </p:cNvPr>
           <p:cNvPicPr>
             <a:picLocks noChangeAspect="1"/>
           </p:cNvPicPr>
@@ -16365,7 +16197,7 @@
       </p:pic>
       <p:sp>
         <p:nvSpPr>
-          <p:cNvPr id="7" name="ins_417"/>
+          <p:cNvPr id="7" name="ins_411"/>
           <p:cNvSpPr/>
           <p:nvPr/>
         </p:nvSpPr>
@@ -16406,7 +16238,7 @@
       </p:sp>
       <p:sp>
         <p:nvSpPr>
-          <p:cNvPr id="8" name="insIT_418"/>
+          <p:cNvPr id="8" name="insIT_412"/>
           <p:cNvSpPr/>
           <p:nvPr/>
         </p:nvSpPr>
@@ -16447,7 +16279,7 @@
       </p:sp>
       <p:sp>
         <p:nvSpPr>
-          <p:cNvPr id="9" name="meta_419"/>
+          <p:cNvPr id="9" name="meta_413"/>
           <p:cNvSpPr/>
           <p:nvPr/>
         </p:nvSpPr>
@@ -16496,13 +16328,13 @@
       </p:sp>
       <p:sp>
         <p:nvSpPr>
-          <p:cNvPr id="10" name="tag_420"/>
-          <p:cNvSpPr/>
-          <p:nvPr/>
-        </p:nvSpPr>
-        <p:spPr>
-          <a:xfrm>
-            <a:off x="6510528" y="493776"/>
+          <p:cNvPr id="10" name="tag_414"/>
+          <p:cNvSpPr/>
+          <p:nvPr/>
+        </p:nvSpPr>
+        <p:spPr>
+          <a:xfrm>
+            <a:off x="6510528" y="548640"/>
             <a:ext cx="1901952" cy="274320"/>
           </a:xfrm>
           <a:prstGeom prst="roundRect">
@@ -16559,7 +16391,7 @@
       </p:sp>
       <p:pic>
         <p:nvPicPr>
-          <p:cNvPr id="11" name="logo_421" descr="/home/claude/lls-course/v2/img/logo.png">    </p:cNvPr>
+          <p:cNvPr id="11" name="logo_415" descr="/home/claude/lls-course/v2/img/logo.png">    </p:cNvPr>
           <p:cNvPicPr>
             <a:picLocks noChangeAspect="1"/>
           </p:cNvPicPr>
@@ -16583,7 +16415,7 @@
       </p:pic>
       <p:sp>
         <p:nvSpPr>
-          <p:cNvPr id="12" name="foot_422"/>
+          <p:cNvPr id="12" name="foot_416"/>
           <p:cNvSpPr/>
           <p:nvPr/>
         </p:nvSpPr>
@@ -16622,7 +16454,7 @@
       </p:sp>
       <p:sp>
         <p:nvSpPr>
-          <p:cNvPr id="13" name="bd_423"/>
+          <p:cNvPr id="13" name="bd_417"/>
           <p:cNvSpPr/>
           <p:nvPr/>
         </p:nvSpPr>
@@ -16674,7 +16506,7 @@
       </p:sp>
       <p:sp>
         <p:nvSpPr>
-          <p:cNvPr id="14" name="rt_424"/>
+          <p:cNvPr id="14" name="rt_418"/>
           <p:cNvSpPr/>
           <p:nvPr/>
         </p:nvSpPr>
@@ -16730,7 +16562,7 @@
       </p:sp>
       <p:sp>
         <p:nvSpPr>
-          <p:cNvPr id="15" name="bd_425"/>
+          <p:cNvPr id="15" name="bd_419"/>
           <p:cNvSpPr/>
           <p:nvPr/>
         </p:nvSpPr>
@@ -16782,7 +16614,7 @@
       </p:sp>
       <p:sp>
         <p:nvSpPr>
-          <p:cNvPr id="16" name="rt_426"/>
+          <p:cNvPr id="16" name="rt_420"/>
           <p:cNvSpPr/>
           <p:nvPr/>
         </p:nvSpPr>
@@ -16838,7 +16670,7 @@
       </p:sp>
       <p:sp>
         <p:nvSpPr>
-          <p:cNvPr id="17" name="bd_427"/>
+          <p:cNvPr id="17" name="bd_421"/>
           <p:cNvSpPr/>
           <p:nvPr/>
         </p:nvSpPr>
@@ -16890,7 +16722,7 @@
       </p:sp>
       <p:sp>
         <p:nvSpPr>
-          <p:cNvPr id="18" name="rt_428"/>
+          <p:cNvPr id="18" name="rt_422"/>
           <p:cNvSpPr/>
           <p:nvPr/>
         </p:nvSpPr>
@@ -16946,7 +16778,7 @@
       </p:sp>
       <p:sp>
         <p:nvSpPr>
-          <p:cNvPr id="19" name="cd_429"/>
+          <p:cNvPr id="19" name="cd_423"/>
           <p:cNvSpPr/>
           <p:nvPr/>
         </p:nvSpPr>
@@ -16961,11 +16793,11 @@
             </a:avLst>
           </a:prstGeom>
           <a:solidFill>
-            <a:srgbClr val="FFF6CC"/>
+            <a:srgbClr val="EEE8FB"/>
           </a:solidFill>
           <a:ln w="28575">
             <a:solidFill>
-              <a:srgbClr val="FFE07A"/>
+              <a:srgbClr val="CDBFF3"/>
             </a:solidFill>
             <a:prstDash val="solid"/>
           </a:ln>
@@ -16980,7 +16812,7 @@
       </p:sp>
       <p:sp>
         <p:nvSpPr>
-          <p:cNvPr id="20" name="ii_430"/>
+          <p:cNvPr id="20" name="ii_424"/>
           <p:cNvSpPr/>
           <p:nvPr/>
         </p:nvSpPr>
@@ -17016,7 +16848,7 @@
       </p:sp>
       <p:sp>
         <p:nvSpPr>
-          <p:cNvPr id="21" name="ih_431"/>
+          <p:cNvPr id="21" name="ih_425"/>
           <p:cNvSpPr/>
           <p:nvPr/>
         </p:nvSpPr>
@@ -17055,7 +16887,7 @@
       </p:sp>
       <p:sp>
         <p:nvSpPr>
-          <p:cNvPr id="22" name="il_432"/>
+          <p:cNvPr id="22" name="il_426"/>
           <p:cNvSpPr/>
           <p:nvPr/>
         </p:nvSpPr>
@@ -17124,7 +16956,7 @@
       </p:sp>
       <p:sp>
         <p:nvSpPr>
-          <p:cNvPr id="23" name="st_433"/>
+          <p:cNvPr id="23" name="st_427"/>
           <p:cNvSpPr/>
           <p:nvPr/>
         </p:nvSpPr>
@@ -17220,7 +17052,7 @@
       </p:grpSpPr>
       <p:sp>
         <p:nvSpPr>
-          <p:cNvPr id="3" name="bd_434"/>
+          <p:cNvPr id="3" name="bd_428"/>
           <p:cNvSpPr/>
           <p:nvPr/>
         </p:nvSpPr>
@@ -17272,7 +17104,7 @@
       </p:sp>
       <p:pic>
         <p:nvPicPr>
-          <p:cNvPr id="4" name="brY_435" descr="/home/claude/lls-course/v2/assets/brush-yellow.png">    </p:cNvPr>
+          <p:cNvPr id="4" name="brY_429" descr="/home/claude/lls-course/v2/assets/brush-yellow.png">    </p:cNvPr>
           <p:cNvPicPr>
             <a:picLocks noChangeAspect="1"/>
           </p:cNvPicPr>
@@ -17296,7 +17128,7 @@
       </p:pic>
       <p:sp>
         <p:nvSpPr>
-          <p:cNvPr id="5" name="title_436"/>
+          <p:cNvPr id="5" name="title_430"/>
           <p:cNvSpPr/>
           <p:nvPr/>
         </p:nvSpPr>
@@ -17337,7 +17169,7 @@
       </p:sp>
       <p:pic>
         <p:nvPicPr>
-          <p:cNvPr id="6" name="brP_437" descr="/home/claude/lls-course/v2/assets/brush-pink.png">    </p:cNvPr>
+          <p:cNvPr id="6" name="brP_431" descr="/home/claude/lls-course/v2/assets/brush-pink.png">    </p:cNvPr>
           <p:cNvPicPr>
             <a:picLocks noChangeAspect="1"/>
           </p:cNvPicPr>
@@ -17361,7 +17193,7 @@
       </p:pic>
       <p:sp>
         <p:nvSpPr>
-          <p:cNvPr id="7" name="ins_438"/>
+          <p:cNvPr id="7" name="ins_432"/>
           <p:cNvSpPr/>
           <p:nvPr/>
         </p:nvSpPr>
@@ -17402,7 +17234,7 @@
       </p:sp>
       <p:sp>
         <p:nvSpPr>
-          <p:cNvPr id="8" name="insIT_439"/>
+          <p:cNvPr id="8" name="insIT_433"/>
           <p:cNvSpPr/>
           <p:nvPr/>
         </p:nvSpPr>
@@ -17443,7 +17275,7 @@
       </p:sp>
       <p:sp>
         <p:nvSpPr>
-          <p:cNvPr id="9" name="cmd_440"/>
+          <p:cNvPr id="9" name="cmd_434"/>
           <p:cNvSpPr/>
           <p:nvPr/>
         </p:nvSpPr>
@@ -17474,12 +17306,12 @@
           </a:effectLst>
         </p:spPr>
         <p:txBody>
-          <a:bodyPr wrap="square" lIns="101600" tIns="0" rIns="101600" bIns="0" rtlCol="0" anchor="ctr">
+          <a:bodyPr wrap="square" lIns="76200" tIns="0" rIns="76200" bIns="0" rtlCol="0" anchor="ctr">
             <a:normAutofit/>
           </a:bodyPr>
           <a:lstStyle/>
           <a:p>
-            <a:pPr indent="0" marL="0">
+            <a:pPr algn="ctr" indent="0" marL="0">
               <a:buNone/>
             </a:pPr>
             <a:r>
@@ -17490,7 +17322,7 @@
               </a:rPr>
               <a:t>💡 </a:t>
             </a:r>
-            <a:pPr indent="0" marL="0">
+            <a:pPr algn="ctr" indent="0" marL="0">
               <a:buNone/>
             </a:pPr>
             <a:r>
@@ -17504,7 +17336,7 @@
               </a:rPr>
               <a:t>THINK</a:t>
             </a:r>
-            <a:pPr indent="0" marL="0">
+            <a:pPr algn="ctr" indent="0" marL="0">
               <a:buNone/>
             </a:pPr>
             <a:r>
@@ -17524,13 +17356,13 @@
       </p:sp>
       <p:sp>
         <p:nvSpPr>
-          <p:cNvPr id="10" name="meta_441"/>
-          <p:cNvSpPr/>
-          <p:nvPr/>
-        </p:nvSpPr>
-        <p:spPr>
-          <a:xfrm>
-            <a:off x="6510528" y="493776"/>
+          <p:cNvPr id="10" name="meta_435"/>
+          <p:cNvSpPr/>
+          <p:nvPr/>
+        </p:nvSpPr>
+        <p:spPr>
+          <a:xfrm>
+            <a:off x="6510528" y="548640"/>
             <a:ext cx="1901952" cy="274320"/>
           </a:xfrm>
           <a:prstGeom prst="roundRect">
@@ -17573,13 +17405,13 @@
       </p:sp>
       <p:sp>
         <p:nvSpPr>
-          <p:cNvPr id="11" name="tag_442"/>
-          <p:cNvSpPr/>
-          <p:nvPr/>
-        </p:nvSpPr>
-        <p:spPr>
-          <a:xfrm>
-            <a:off x="6510528" y="804672"/>
+          <p:cNvPr id="11" name="tag_436"/>
+          <p:cNvSpPr/>
+          <p:nvPr/>
+        </p:nvSpPr>
+        <p:spPr>
+          <a:xfrm>
+            <a:off x="6510528" y="914400"/>
             <a:ext cx="1901952" cy="274320"/>
           </a:xfrm>
           <a:prstGeom prst="roundRect">
@@ -17636,7 +17468,7 @@
       </p:sp>
       <p:pic>
         <p:nvPicPr>
-          <p:cNvPr id="12" name="logo_443" descr="/home/claude/lls-course/v2/img/logo.png">    </p:cNvPr>
+          <p:cNvPr id="12" name="logo_437" descr="/home/claude/lls-course/v2/img/logo.png">    </p:cNvPr>
           <p:cNvPicPr>
             <a:picLocks noChangeAspect="1"/>
           </p:cNvPicPr>
@@ -17660,7 +17492,7 @@
       </p:pic>
       <p:sp>
         <p:nvSpPr>
-          <p:cNvPr id="13" name="foot_444"/>
+          <p:cNvPr id="13" name="foot_438"/>
           <p:cNvSpPr/>
           <p:nvPr/>
         </p:nvSpPr>
@@ -17699,7 +17531,7 @@
       </p:sp>
       <p:sp>
         <p:nvSpPr>
-          <p:cNvPr id="14" name="cd_445"/>
+          <p:cNvPr id="14" name="cd_439"/>
           <p:cNvSpPr/>
           <p:nvPr/>
         </p:nvSpPr>
@@ -17733,7 +17565,7 @@
       </p:sp>
       <p:sp>
         <p:nvSpPr>
-          <p:cNvPr id="15" name="te_446"/>
+          <p:cNvPr id="15" name="te_440"/>
           <p:cNvSpPr/>
           <p:nvPr/>
         </p:nvSpPr>
@@ -17769,7 +17601,7 @@
       </p:sp>
       <p:sp>
         <p:nvSpPr>
-          <p:cNvPr id="16" name="tt_447"/>
+          <p:cNvPr id="16" name="tt_441"/>
           <p:cNvSpPr/>
           <p:nvPr/>
         </p:nvSpPr>
@@ -17810,7 +17642,7 @@
       </p:sp>
       <p:sp>
         <p:nvSpPr>
-          <p:cNvPr id="17" name="R1_tk448"/>
+          <p:cNvPr id="17" name="R1_tk442"/>
           <p:cNvSpPr/>
           <p:nvPr/>
         </p:nvSpPr>
@@ -17846,7 +17678,7 @@
       </p:sp>
       <p:sp>
         <p:nvSpPr>
-          <p:cNvPr id="18" name="cd_449"/>
+          <p:cNvPr id="18" name="cd_443"/>
           <p:cNvSpPr/>
           <p:nvPr/>
         </p:nvSpPr>
@@ -17880,7 +17712,7 @@
       </p:sp>
       <p:sp>
         <p:nvSpPr>
-          <p:cNvPr id="19" name="te_450"/>
+          <p:cNvPr id="19" name="te_444"/>
           <p:cNvSpPr/>
           <p:nvPr/>
         </p:nvSpPr>
@@ -17916,7 +17748,7 @@
       </p:sp>
       <p:sp>
         <p:nvSpPr>
-          <p:cNvPr id="20" name="tt_451"/>
+          <p:cNvPr id="20" name="tt_445"/>
           <p:cNvSpPr/>
           <p:nvPr/>
         </p:nvSpPr>
@@ -17957,7 +17789,7 @@
       </p:sp>
       <p:sp>
         <p:nvSpPr>
-          <p:cNvPr id="21" name="R2_tk452"/>
+          <p:cNvPr id="21" name="R2_tk446"/>
           <p:cNvSpPr/>
           <p:nvPr/>
         </p:nvSpPr>
@@ -17993,7 +17825,7 @@
       </p:sp>
       <p:sp>
         <p:nvSpPr>
-          <p:cNvPr id="22" name="cd_453"/>
+          <p:cNvPr id="22" name="cd_447"/>
           <p:cNvSpPr/>
           <p:nvPr/>
         </p:nvSpPr>
@@ -18027,7 +17859,7 @@
       </p:sp>
       <p:sp>
         <p:nvSpPr>
-          <p:cNvPr id="23" name="te_454"/>
+          <p:cNvPr id="23" name="te_448"/>
           <p:cNvSpPr/>
           <p:nvPr/>
         </p:nvSpPr>
@@ -18063,7 +17895,7 @@
       </p:sp>
       <p:sp>
         <p:nvSpPr>
-          <p:cNvPr id="24" name="tt_455"/>
+          <p:cNvPr id="24" name="tt_449"/>
           <p:cNvSpPr/>
           <p:nvPr/>
         </p:nvSpPr>
@@ -18104,7 +17936,7 @@
       </p:sp>
       <p:sp>
         <p:nvSpPr>
-          <p:cNvPr id="25" name="R3_tk456"/>
+          <p:cNvPr id="25" name="R3_tk450"/>
           <p:cNvSpPr/>
           <p:nvPr/>
         </p:nvSpPr>
@@ -18140,7 +17972,7 @@
       </p:sp>
       <p:sp>
         <p:nvSpPr>
-          <p:cNvPr id="26" name="cd_457"/>
+          <p:cNvPr id="26" name="cd_451"/>
           <p:cNvSpPr/>
           <p:nvPr/>
         </p:nvSpPr>
@@ -18174,7 +18006,7 @@
       </p:sp>
       <p:sp>
         <p:nvSpPr>
-          <p:cNvPr id="27" name="te_458"/>
+          <p:cNvPr id="27" name="te_452"/>
           <p:cNvSpPr/>
           <p:nvPr/>
         </p:nvSpPr>
@@ -18210,7 +18042,7 @@
       </p:sp>
       <p:sp>
         <p:nvSpPr>
-          <p:cNvPr id="28" name="tt_459"/>
+          <p:cNvPr id="28" name="tt_453"/>
           <p:cNvSpPr/>
           <p:nvPr/>
         </p:nvSpPr>
@@ -18251,7 +18083,7 @@
       </p:sp>
       <p:sp>
         <p:nvSpPr>
-          <p:cNvPr id="29" name="R4_tk460"/>
+          <p:cNvPr id="29" name="R4_tk454"/>
           <p:cNvSpPr/>
           <p:nvPr/>
         </p:nvSpPr>
@@ -18287,7 +18119,7 @@
       </p:sp>
       <p:sp>
         <p:nvSpPr>
-          <p:cNvPr id="30" name="cd_461"/>
+          <p:cNvPr id="30" name="cd_455"/>
           <p:cNvSpPr/>
           <p:nvPr/>
         </p:nvSpPr>
@@ -18321,7 +18153,7 @@
       </p:sp>
       <p:sp>
         <p:nvSpPr>
-          <p:cNvPr id="31" name="te_462"/>
+          <p:cNvPr id="31" name="te_456"/>
           <p:cNvSpPr/>
           <p:nvPr/>
         </p:nvSpPr>
@@ -18357,7 +18189,7 @@
       </p:sp>
       <p:sp>
         <p:nvSpPr>
-          <p:cNvPr id="32" name="tt_463"/>
+          <p:cNvPr id="32" name="tt_457"/>
           <p:cNvSpPr/>
           <p:nvPr/>
         </p:nvSpPr>
@@ -18398,7 +18230,7 @@
       </p:sp>
       <p:sp>
         <p:nvSpPr>
-          <p:cNvPr id="33" name="R5_tk464"/>
+          <p:cNvPr id="33" name="R5_tk458"/>
           <p:cNvSpPr/>
           <p:nvPr/>
         </p:nvSpPr>
@@ -18434,7 +18266,7 @@
       </p:sp>
       <p:sp>
         <p:nvSpPr>
-          <p:cNvPr id="34" name="st_465"/>
+          <p:cNvPr id="34" name="st_459"/>
           <p:cNvSpPr/>
           <p:nvPr/>
         </p:nvSpPr>
@@ -19113,12 +18945,12 @@
           </a:effectLst>
         </p:spPr>
         <p:txBody>
-          <a:bodyPr wrap="square" lIns="101600" tIns="0" rIns="101600" bIns="0" rtlCol="0" anchor="ctr">
+          <a:bodyPr wrap="square" lIns="76200" tIns="0" rIns="76200" bIns="0" rtlCol="0" anchor="ctr">
             <a:normAutofit/>
           </a:bodyPr>
           <a:lstStyle/>
           <a:p>
-            <a:pPr indent="0" marL="0">
+            <a:pPr algn="ctr" indent="0" marL="0">
               <a:buNone/>
             </a:pPr>
             <a:r>
@@ -19129,7 +18961,7 @@
               </a:rPr>
               <a:t>🎲 </a:t>
             </a:r>
-            <a:pPr indent="0" marL="0">
+            <a:pPr algn="ctr" indent="0" marL="0">
               <a:buNone/>
             </a:pPr>
             <a:r>
@@ -19143,7 +18975,7 @@
               </a:rPr>
               <a:t>PLAY</a:t>
             </a:r>
-            <a:pPr indent="0" marL="0">
+            <a:pPr algn="ctr" indent="0" marL="0">
               <a:buNone/>
             </a:pPr>
             <a:r>
@@ -19169,7 +19001,7 @@
         </p:nvSpPr>
         <p:spPr>
           <a:xfrm>
-            <a:off x="6510528" y="493776"/>
+            <a:off x="6510528" y="548640"/>
             <a:ext cx="1901952" cy="274320"/>
           </a:xfrm>
           <a:prstGeom prst="roundRect">
@@ -19218,7 +19050,7 @@
         </p:nvSpPr>
         <p:spPr>
           <a:xfrm>
-            <a:off x="6510528" y="804672"/>
+            <a:off x="6510528" y="914400"/>
             <a:ext cx="1901952" cy="274320"/>
           </a:xfrm>
           <a:prstGeom prst="roundRect">
@@ -19353,11 +19185,11 @@
             </a:avLst>
           </a:prstGeom>
           <a:solidFill>
-            <a:srgbClr val="FFF6CC"/>
+            <a:srgbClr val="EEE8FB"/>
           </a:solidFill>
           <a:ln w="28575">
             <a:solidFill>
-              <a:srgbClr val="FFE07A"/>
+              <a:srgbClr val="CDBFF3"/>
             </a:solidFill>
             <a:prstDash val="solid"/>
           </a:ln>
@@ -19624,6 +19456,156 @@
             <a:avLst/>
           </a:prstGeom>
           <a:solidFill>
+            <a:srgbClr val="7B5CD6"/>
+          </a:solidFill>
+          <a:ln w="28575">
+            <a:solidFill>
+              <a:srgbClr val="CDBFF3"/>
+            </a:solidFill>
+          </a:ln>
+          <a:effectLst>
+            <a:outerShdw sx="100000" sy="100000" kx="0" ky="0" algn="bl" rotWithShape="0" blurRad="88900" dist="31750" dir="5400000">
+              <a:srgbClr val="1B2559">
+                <a:alpha val="15000"/>
+              </a:srgbClr>
+            </a:outerShdw>
+          </a:effectLst>
+        </p:spPr>
+        <p:txBody>
+          <a:bodyPr wrap="square" lIns="0" tIns="0" rIns="0" bIns="0" rtlCol="0" anchor="ctr"/>
+          <a:lstStyle/>
+          <a:p>
+            <a:pPr algn="ctr" indent="0" marL="0">
+              <a:buNone/>
+            </a:pPr>
+            <a:r>
+              <a:rPr lang="en-US" sz="500" dirty="0">
+                <a:solidFill>
+                  <a:srgbClr val="FFFFFF"/>
+                </a:solidFill>
+                <a:latin typeface="Arial Rounded MT Bold" pitchFamily="34" charset="0"/>
+                <a:ea typeface="Arial Rounded MT Bold" pitchFamily="34" charset="-122"/>
+                <a:cs typeface="Arial Rounded MT Bold" pitchFamily="34" charset="-120"/>
+              </a:rPr>
+              <a:t>e.g.</a:t>
+            </a:r>
+            <a:endParaRPr lang="en-US" sz="500" dirty="0"/>
+          </a:p>
+        </p:txBody>
+      </p:sp>
+      <p:sp>
+        <p:nvSpPr>
+          <p:cNvPr id="20" name="gq_34"/>
+          <p:cNvSpPr/>
+          <p:nvPr/>
+        </p:nvSpPr>
+        <p:spPr>
+          <a:xfrm>
+            <a:off x="3657600" y="1417320"/>
+            <a:ext cx="2514600" cy="640080"/>
+          </a:xfrm>
+          <a:prstGeom prst="roundRect">
+            <a:avLst>
+              <a:gd name="adj" fmla="val 14286"/>
+            </a:avLst>
+          </a:prstGeom>
+          <a:solidFill>
+            <a:srgbClr val="EEE8FB"/>
+          </a:solidFill>
+          <a:ln w="28575">
+            <a:solidFill>
+              <a:srgbClr val="CDBFF3"/>
+            </a:solidFill>
+          </a:ln>
+        </p:spPr>
+        <p:txBody>
+          <a:bodyPr wrap="square" lIns="101600" tIns="0" rIns="101600" bIns="0" rtlCol="0" anchor="ctr">
+            <a:normAutofit/>
+          </a:bodyPr>
+          <a:lstStyle/>
+          <a:p>
+            <a:pPr indent="0" marL="0">
+              <a:buNone/>
+            </a:pPr>
+            <a:r>
+              <a:rPr lang="en-US" sz="1250" dirty="0">
+                <a:solidFill>
+                  <a:srgbClr val="1B2559"/>
+                </a:solidFill>
+                <a:latin typeface="Segoe UI Semibold" pitchFamily="34" charset="0"/>
+                <a:ea typeface="Segoe UI Semibold" pitchFamily="34" charset="-122"/>
+                <a:cs typeface="Segoe UI Semibold" pitchFamily="34" charset="-120"/>
+              </a:rPr>
+              <a:t>Words for HAIR</a:t>
+            </a:r>
+            <a:endParaRPr lang="en-US" sz="1250" dirty="0"/>
+          </a:p>
+        </p:txBody>
+      </p:sp>
+      <p:sp>
+        <p:nvSpPr>
+          <p:cNvPr id="21" name="chip_35"/>
+          <p:cNvSpPr/>
+          <p:nvPr/>
+        </p:nvSpPr>
+        <p:spPr>
+          <a:xfrm>
+            <a:off x="6263640" y="1417320"/>
+            <a:ext cx="2560320" cy="640080"/>
+          </a:xfrm>
+          <a:prstGeom prst="roundRect">
+            <a:avLst>
+              <a:gd name="adj" fmla="val 14286"/>
+            </a:avLst>
+          </a:prstGeom>
+          <a:solidFill>
+            <a:srgbClr val="EEE8FB"/>
+          </a:solidFill>
+          <a:ln w="28575">
+            <a:solidFill>
+              <a:srgbClr val="CDBFF3"/>
+            </a:solidFill>
+          </a:ln>
+        </p:spPr>
+        <p:txBody>
+          <a:bodyPr wrap="square" lIns="101600" tIns="0" rIns="101600" bIns="0" rtlCol="0" anchor="ctr">
+            <a:normAutofit/>
+          </a:bodyPr>
+          <a:lstStyle/>
+          <a:p>
+            <a:pPr algn="l" indent="0" marL="0">
+              <a:buNone/>
+            </a:pPr>
+            <a:r>
+              <a:rPr lang="en-US" sz="1200" b="1" dirty="0">
+                <a:solidFill>
+                  <a:srgbClr val="1B2559"/>
+                </a:solidFill>
+                <a:latin typeface="Segoe UI Semibold" pitchFamily="34" charset="0"/>
+                <a:ea typeface="Segoe UI Semibold" pitchFamily="34" charset="-122"/>
+                <a:cs typeface="Segoe UI Semibold" pitchFamily="34" charset="-120"/>
+              </a:rPr>
+              <a:t>→ long, short, dark, blonde, curly, straight…</a:t>
+            </a:r>
+            <a:endParaRPr lang="en-US" sz="1200" dirty="0"/>
+          </a:p>
+        </p:txBody>
+      </p:sp>
+      <p:sp>
+        <p:nvSpPr>
+          <p:cNvPr id="22" name="bd_36"/>
+          <p:cNvSpPr/>
+          <p:nvPr/>
+        </p:nvSpPr>
+        <p:spPr>
+          <a:xfrm>
+            <a:off x="3246120" y="2276856"/>
+            <a:ext cx="329184" cy="329184"/>
+          </a:xfrm>
+          <a:prstGeom prst="ellipse">
+            <a:avLst/>
+          </a:prstGeom>
+          <a:solidFill>
             <a:srgbClr val="E8508F"/>
           </a:solidFill>
           <a:ln w="28575">
@@ -19663,13 +19645,13 @@
       </p:sp>
       <p:sp>
         <p:nvSpPr>
-          <p:cNvPr id="20" name="gq_34"/>
-          <p:cNvSpPr/>
-          <p:nvPr/>
-        </p:nvSpPr>
-        <p:spPr>
-          <a:xfrm>
-            <a:off x="3657600" y="1417320"/>
+          <p:cNvPr id="23" name="gq_37"/>
+          <p:cNvSpPr/>
+          <p:nvPr/>
+        </p:nvSpPr>
+        <p:spPr>
+          <a:xfrm>
+            <a:off x="3657600" y="2121408"/>
             <a:ext cx="2514600" cy="640080"/>
           </a:xfrm>
           <a:prstGeom prst="roundRect">
@@ -19704,7 +19686,7 @@
                 <a:ea typeface="Segoe UI Semibold" pitchFamily="34" charset="-122"/>
                 <a:cs typeface="Segoe UI Semibold" pitchFamily="34" charset="-120"/>
               </a:rPr>
-              <a:t>Words for HAIR</a:t>
+              <a:t>Words for AGE</a:t>
             </a:r>
             <a:endParaRPr lang="en-US" sz="1250" dirty="0"/>
           </a:p>
@@ -19712,13 +19694,13 @@
       </p:sp>
       <p:sp>
         <p:nvSpPr>
-          <p:cNvPr id="21" name="R1_chip35"/>
-          <p:cNvSpPr/>
-          <p:nvPr/>
-        </p:nvSpPr>
-        <p:spPr>
-          <a:xfrm>
-            <a:off x="6263640" y="1417320"/>
+          <p:cNvPr id="24" name="R1_chip38"/>
+          <p:cNvSpPr/>
+          <p:nvPr/>
+        </p:nvSpPr>
+        <p:spPr>
+          <a:xfrm>
+            <a:off x="6263640" y="2121408"/>
             <a:ext cx="2560320" cy="640080"/>
           </a:xfrm>
           <a:prstGeom prst="roundRect">
@@ -19753,7 +19735,7 @@
                 <a:ea typeface="Segoe UI Semibold" pitchFamily="34" charset="-122"/>
                 <a:cs typeface="Segoe UI Semibold" pitchFamily="34" charset="-120"/>
               </a:rPr>
-              <a:t>→ long, short, dark, blonde, curly, straight…</a:t>
+              <a:t>→ young, old, teenage, middle-aged…</a:t>
             </a:r>
             <a:endParaRPr lang="en-US" sz="1200" dirty="0"/>
           </a:p>
@@ -19761,13 +19743,13 @@
       </p:sp>
       <p:sp>
         <p:nvSpPr>
-          <p:cNvPr id="22" name="bd_36"/>
-          <p:cNvSpPr/>
-          <p:nvPr/>
-        </p:nvSpPr>
-        <p:spPr>
-          <a:xfrm>
-            <a:off x="3246120" y="2276856"/>
+          <p:cNvPr id="25" name="bd_39"/>
+          <p:cNvSpPr/>
+          <p:nvPr/>
+        </p:nvSpPr>
+        <p:spPr>
+          <a:xfrm>
+            <a:off x="3246120" y="2980944"/>
             <a:ext cx="329184" cy="329184"/>
           </a:xfrm>
           <a:prstGeom prst="ellipse">
@@ -19813,13 +19795,13 @@
       </p:sp>
       <p:sp>
         <p:nvSpPr>
-          <p:cNvPr id="23" name="gq_37"/>
-          <p:cNvSpPr/>
-          <p:nvPr/>
-        </p:nvSpPr>
-        <p:spPr>
-          <a:xfrm>
-            <a:off x="3657600" y="2121408"/>
+          <p:cNvPr id="26" name="gq_40"/>
+          <p:cNvSpPr/>
+          <p:nvPr/>
+        </p:nvSpPr>
+        <p:spPr>
+          <a:xfrm>
+            <a:off x="3657600" y="2825496"/>
             <a:ext cx="2514600" cy="640080"/>
           </a:xfrm>
           <a:prstGeom prst="roundRect">
@@ -19854,7 +19836,7 @@
                 <a:ea typeface="Segoe UI Semibold" pitchFamily="34" charset="-122"/>
                 <a:cs typeface="Segoe UI Semibold" pitchFamily="34" charset="-120"/>
               </a:rPr>
-              <a:t>Words for AGE</a:t>
+              <a:t>Words for PERSONALITY</a:t>
             </a:r>
             <a:endParaRPr lang="en-US" sz="1250" dirty="0"/>
           </a:p>
@@ -19862,13 +19844,13 @@
       </p:sp>
       <p:sp>
         <p:nvSpPr>
-          <p:cNvPr id="24" name="R2_chip38"/>
-          <p:cNvSpPr/>
-          <p:nvPr/>
-        </p:nvSpPr>
-        <p:spPr>
-          <a:xfrm>
-            <a:off x="6263640" y="2121408"/>
+          <p:cNvPr id="27" name="R2_chip41"/>
+          <p:cNvSpPr/>
+          <p:nvPr/>
+        </p:nvSpPr>
+        <p:spPr>
+          <a:xfrm>
+            <a:off x="6263640" y="2825496"/>
             <a:ext cx="2560320" cy="640080"/>
           </a:xfrm>
           <a:prstGeom prst="roundRect">
@@ -19903,7 +19885,7 @@
                 <a:ea typeface="Segoe UI Semibold" pitchFamily="34" charset="-122"/>
                 <a:cs typeface="Segoe UI Semibold" pitchFamily="34" charset="-120"/>
               </a:rPr>
-              <a:t>→ young, old, teenage, middle-aged…</a:t>
+              <a:t>→ friendly, funny, shy, kind, lazy…</a:t>
             </a:r>
             <a:endParaRPr lang="en-US" sz="1200" dirty="0"/>
           </a:p>
@@ -19911,13 +19893,13 @@
       </p:sp>
       <p:sp>
         <p:nvSpPr>
-          <p:cNvPr id="25" name="bd_39"/>
-          <p:cNvSpPr/>
-          <p:nvPr/>
-        </p:nvSpPr>
-        <p:spPr>
-          <a:xfrm>
-            <a:off x="3246120" y="2980944"/>
+          <p:cNvPr id="28" name="bd_42"/>
+          <p:cNvSpPr/>
+          <p:nvPr/>
+        </p:nvSpPr>
+        <p:spPr>
+          <a:xfrm>
+            <a:off x="3246120" y="3685032"/>
             <a:ext cx="329184" cy="329184"/>
           </a:xfrm>
           <a:prstGeom prst="ellipse">
@@ -19963,13 +19945,13 @@
       </p:sp>
       <p:sp>
         <p:nvSpPr>
-          <p:cNvPr id="26" name="gq_40"/>
-          <p:cNvSpPr/>
-          <p:nvPr/>
-        </p:nvSpPr>
-        <p:spPr>
-          <a:xfrm>
-            <a:off x="3657600" y="2825496"/>
+          <p:cNvPr id="29" name="gq_43"/>
+          <p:cNvSpPr/>
+          <p:nvPr/>
+        </p:nvSpPr>
+        <p:spPr>
+          <a:xfrm>
+            <a:off x="3657600" y="3529584"/>
             <a:ext cx="2514600" cy="640080"/>
           </a:xfrm>
           <a:prstGeom prst="roundRect">
@@ -20004,7 +19986,7 @@
                 <a:ea typeface="Segoe UI Semibold" pitchFamily="34" charset="-122"/>
                 <a:cs typeface="Segoe UI Semibold" pitchFamily="34" charset="-120"/>
               </a:rPr>
-              <a:t>Words for PERSONALITY</a:t>
+              <a:t>Words for your FAMILY</a:t>
             </a:r>
             <a:endParaRPr lang="en-US" sz="1250" dirty="0"/>
           </a:p>
@@ -20012,157 +19994,7 @@
       </p:sp>
       <p:sp>
         <p:nvSpPr>
-          <p:cNvPr id="27" name="R3_chip41"/>
-          <p:cNvSpPr/>
-          <p:nvPr/>
-        </p:nvSpPr>
-        <p:spPr>
-          <a:xfrm>
-            <a:off x="6263640" y="2825496"/>
-            <a:ext cx="2560320" cy="640080"/>
-          </a:xfrm>
-          <a:prstGeom prst="roundRect">
-            <a:avLst>
-              <a:gd name="adj" fmla="val 14286"/>
-            </a:avLst>
-          </a:prstGeom>
-          <a:solidFill>
-            <a:srgbClr val="FFE3EE"/>
-          </a:solidFill>
-          <a:ln w="28575">
-            <a:solidFill>
-              <a:srgbClr val="F7A6C4"/>
-            </a:solidFill>
-          </a:ln>
-        </p:spPr>
-        <p:txBody>
-          <a:bodyPr wrap="square" lIns="101600" tIns="0" rIns="101600" bIns="0" rtlCol="0" anchor="ctr">
-            <a:normAutofit/>
-          </a:bodyPr>
-          <a:lstStyle/>
-          <a:p>
-            <a:pPr algn="l" indent="0" marL="0">
-              <a:buNone/>
-            </a:pPr>
-            <a:r>
-              <a:rPr lang="en-US" sz="1200" b="1" dirty="0">
-                <a:solidFill>
-                  <a:srgbClr val="1B2559"/>
-                </a:solidFill>
-                <a:latin typeface="Segoe UI Semibold" pitchFamily="34" charset="0"/>
-                <a:ea typeface="Segoe UI Semibold" pitchFamily="34" charset="-122"/>
-                <a:cs typeface="Segoe UI Semibold" pitchFamily="34" charset="-120"/>
-              </a:rPr>
-              <a:t>→ friendly, funny, shy, kind, lazy…</a:t>
-            </a:r>
-            <a:endParaRPr lang="en-US" sz="1200" dirty="0"/>
-          </a:p>
-        </p:txBody>
-      </p:sp>
-      <p:sp>
-        <p:nvSpPr>
-          <p:cNvPr id="28" name="bd_42"/>
-          <p:cNvSpPr/>
-          <p:nvPr/>
-        </p:nvSpPr>
-        <p:spPr>
-          <a:xfrm>
-            <a:off x="3246120" y="3685032"/>
-            <a:ext cx="329184" cy="329184"/>
-          </a:xfrm>
-          <a:prstGeom prst="ellipse">
-            <a:avLst/>
-          </a:prstGeom>
-          <a:solidFill>
-            <a:srgbClr val="F2B705"/>
-          </a:solidFill>
-          <a:ln w="28575">
-            <a:solidFill>
-              <a:srgbClr val="FFE07A"/>
-            </a:solidFill>
-          </a:ln>
-          <a:effectLst>
-            <a:outerShdw sx="100000" sy="100000" kx="0" ky="0" algn="bl" rotWithShape="0" blurRad="88900" dist="31750" dir="5400000">
-              <a:srgbClr val="1B2559">
-                <a:alpha val="15000"/>
-              </a:srgbClr>
-            </a:outerShdw>
-          </a:effectLst>
-        </p:spPr>
-        <p:txBody>
-          <a:bodyPr wrap="square" lIns="0" tIns="0" rIns="0" bIns="0" rtlCol="0" anchor="ctr"/>
-          <a:lstStyle/>
-          <a:p>
-            <a:pPr algn="ctr" indent="0" marL="0">
-              <a:buNone/>
-            </a:pPr>
-            <a:r>
-              <a:rPr lang="en-US" sz="1100" dirty="0">
-                <a:solidFill>
-                  <a:srgbClr val="FFFFFF"/>
-                </a:solidFill>
-                <a:latin typeface="Arial Rounded MT Bold" pitchFamily="34" charset="0"/>
-                <a:ea typeface="Arial Rounded MT Bold" pitchFamily="34" charset="-122"/>
-                <a:cs typeface="Arial Rounded MT Bold" pitchFamily="34" charset="-120"/>
-              </a:rPr>
-              <a:t>4</a:t>
-            </a:r>
-            <a:endParaRPr lang="en-US" sz="1100" dirty="0"/>
-          </a:p>
-        </p:txBody>
-      </p:sp>
-      <p:sp>
-        <p:nvSpPr>
-          <p:cNvPr id="29" name="gq_43"/>
-          <p:cNvSpPr/>
-          <p:nvPr/>
-        </p:nvSpPr>
-        <p:spPr>
-          <a:xfrm>
-            <a:off x="3657600" y="3529584"/>
-            <a:ext cx="2514600" cy="640080"/>
-          </a:xfrm>
-          <a:prstGeom prst="roundRect">
-            <a:avLst>
-              <a:gd name="adj" fmla="val 14286"/>
-            </a:avLst>
-          </a:prstGeom>
-          <a:solidFill>
-            <a:srgbClr val="FFFFFF"/>
-          </a:solidFill>
-          <a:ln w="28575">
-            <a:solidFill>
-              <a:srgbClr val="FFE07A"/>
-            </a:solidFill>
-          </a:ln>
-        </p:spPr>
-        <p:txBody>
-          <a:bodyPr wrap="square" lIns="101600" tIns="0" rIns="101600" bIns="0" rtlCol="0" anchor="ctr">
-            <a:normAutofit/>
-          </a:bodyPr>
-          <a:lstStyle/>
-          <a:p>
-            <a:pPr indent="0" marL="0">
-              <a:buNone/>
-            </a:pPr>
-            <a:r>
-              <a:rPr lang="en-US" sz="1250" dirty="0">
-                <a:solidFill>
-                  <a:srgbClr val="1B2559"/>
-                </a:solidFill>
-                <a:latin typeface="Segoe UI Semibold" pitchFamily="34" charset="0"/>
-                <a:ea typeface="Segoe UI Semibold" pitchFamily="34" charset="-122"/>
-                <a:cs typeface="Segoe UI Semibold" pitchFamily="34" charset="-120"/>
-              </a:rPr>
-              <a:t>Words for your FAMILY</a:t>
-            </a:r>
-            <a:endParaRPr lang="en-US" sz="1250" dirty="0"/>
-          </a:p>
-        </p:txBody>
-      </p:sp>
-      <p:sp>
-        <p:nvSpPr>
-          <p:cNvPr id="30" name="R4_chip44"/>
+          <p:cNvPr id="30" name="R3_chip44"/>
           <p:cNvSpPr/>
           <p:nvPr/>
         </p:nvSpPr>
@@ -20251,7 +20083,7 @@
                                           </p:stCondLst>
                                         </p:cTn>
                                         <p:tgtEl>
-                                          <p:spTgt spid="21"/>
+                                          <p:spTgt spid="24"/>
                                         </p:tgtEl>
                                         <p:attrNameLst>
                                           <p:attrName>style.visibility</p:attrName>
@@ -20265,7 +20097,7 @@
                                       <p:cBhvr>
                                         <p:cTn id="7" dur="400"/>
                                         <p:tgtEl>
-                                          <p:spTgt spid="21"/>
+                                          <p:spTgt spid="24"/>
                                         </p:tgtEl>
                                       </p:cBhvr>
                                     </p:animEffect>
@@ -20304,7 +20136,7 @@
                                           </p:stCondLst>
                                         </p:cTn>
                                         <p:tgtEl>
-                                          <p:spTgt spid="24"/>
+                                          <p:spTgt spid="27"/>
                                         </p:tgtEl>
                                         <p:attrNameLst>
                                           <p:attrName>style.visibility</p:attrName>
@@ -20318,7 +20150,7 @@
                                       <p:cBhvr>
                                         <p:cTn id="12" dur="400"/>
                                         <p:tgtEl>
-                                          <p:spTgt spid="24"/>
+                                          <p:spTgt spid="27"/>
                                         </p:tgtEl>
                                       </p:cBhvr>
                                     </p:animEffect>
@@ -20357,7 +20189,7 @@
                                           </p:stCondLst>
                                         </p:cTn>
                                         <p:tgtEl>
-                                          <p:spTgt spid="27"/>
+                                          <p:spTgt spid="30"/>
                                         </p:tgtEl>
                                         <p:attrNameLst>
                                           <p:attrName>style.visibility</p:attrName>
@@ -20370,59 +20202,6 @@
                                     <p:animEffect transition="in" filter="fade">
                                       <p:cBhvr>
                                         <p:cTn id="17" dur="400"/>
-                                        <p:tgtEl>
-                                          <p:spTgt spid="27"/>
-                                        </p:tgtEl>
-                                      </p:cBhvr>
-                                    </p:animEffect>
-                                  </p:childTnLst>
-                                </p:cTn>
-                              </p:par>
-                            </p:childTnLst>
-                          </p:cTn>
-                        </p:par>
-                      </p:childTnLst>
-                    </p:cTn>
-                  </p:par>
-                  <p:par>
-                    <p:cTn id="18" fill="hold">
-                      <p:stCondLst>
-                        <p:cond delay="indefinite"/>
-                      </p:stCondLst>
-                      <p:childTnLst>
-                        <p:par>
-                          <p:cTn id="19" fill="hold">
-                            <p:stCondLst>
-                              <p:cond delay="0"/>
-                            </p:stCondLst>
-                            <p:childTnLst>
-                              <p:par>
-                                <p:cTn id="20" presetID="10" presetClass="entr" presetSubtype="0" fill="hold" nodeType="clickEffect">
-                                  <p:stCondLst>
-                                    <p:cond delay="0"/>
-                                  </p:stCondLst>
-                                  <p:childTnLst>
-                                    <p:set>
-                                      <p:cBhvr>
-                                        <p:cTn id="21" dur="1" fill="hold">
-                                          <p:stCondLst>
-                                            <p:cond delay="0"/>
-                                          </p:stCondLst>
-                                        </p:cTn>
-                                        <p:tgtEl>
-                                          <p:spTgt spid="30"/>
-                                        </p:tgtEl>
-                                        <p:attrNameLst>
-                                          <p:attrName>style.visibility</p:attrName>
-                                        </p:attrNameLst>
-                                      </p:cBhvr>
-                                      <p:to>
-                                        <p:strVal val="visible"/>
-                                      </p:to>
-                                    </p:set>
-                                    <p:animEffect transition="in" filter="fade">
-                                      <p:cBhvr>
-                                        <p:cTn id="22" dur="400"/>
                                         <p:tgtEl>
                                           <p:spTgt spid="30"/>
                                         </p:tgtEl>
@@ -20749,12 +20528,12 @@
           </a:effectLst>
         </p:spPr>
         <p:txBody>
-          <a:bodyPr wrap="square" lIns="101600" tIns="0" rIns="101600" bIns="0" rtlCol="0" anchor="ctr">
+          <a:bodyPr wrap="square" lIns="76200" tIns="0" rIns="76200" bIns="0" rtlCol="0" anchor="ctr">
             <a:normAutofit/>
           </a:bodyPr>
           <a:lstStyle/>
           <a:p>
-            <a:pPr indent="0" marL="0">
+            <a:pPr algn="ctr" indent="0" marL="0">
               <a:buNone/>
             </a:pPr>
             <a:r>
@@ -20765,7 +20544,7 @@
               </a:rPr>
               <a:t>✅ </a:t>
             </a:r>
-            <a:pPr indent="0" marL="0">
+            <a:pPr algn="ctr" indent="0" marL="0">
               <a:buNone/>
             </a:pPr>
             <a:r>
@@ -20779,7 +20558,7 @@
               </a:rPr>
               <a:t>CHECK</a:t>
             </a:r>
-            <a:pPr indent="0" marL="0">
+            <a:pPr algn="ctr" indent="0" marL="0">
               <a:buNone/>
             </a:pPr>
             <a:r>
@@ -20805,7 +20584,7 @@
         </p:nvSpPr>
         <p:spPr>
           <a:xfrm>
-            <a:off x="6510528" y="493776"/>
+            <a:off x="6510528" y="548640"/>
             <a:ext cx="1901952" cy="274320"/>
           </a:xfrm>
           <a:prstGeom prst="roundRect">
@@ -20854,7 +20633,7 @@
         </p:nvSpPr>
         <p:spPr>
           <a:xfrm>
-            <a:off x="6510528" y="804672"/>
+            <a:off x="6510528" y="914400"/>
             <a:ext cx="1901952" cy="274320"/>
           </a:xfrm>
           <a:prstGeom prst="roundRect">
@@ -23871,12 +23650,12 @@
           </a:effectLst>
         </p:spPr>
         <p:txBody>
-          <a:bodyPr wrap="square" lIns="101600" tIns="0" rIns="101600" bIns="0" rtlCol="0" anchor="ctr">
+          <a:bodyPr wrap="square" lIns="76200" tIns="0" rIns="76200" bIns="0" rtlCol="0" anchor="ctr">
             <a:normAutofit/>
           </a:bodyPr>
           <a:lstStyle/>
           <a:p>
-            <a:pPr indent="0" marL="0">
+            <a:pPr algn="ctr" indent="0" marL="0">
               <a:buNone/>
             </a:pPr>
             <a:r>
@@ -23887,7 +23666,7 @@
               </a:rPr>
               <a:t>👀 </a:t>
             </a:r>
-            <a:pPr indent="0" marL="0">
+            <a:pPr algn="ctr" indent="0" marL="0">
               <a:buNone/>
             </a:pPr>
             <a:r>
@@ -23901,7 +23680,7 @@
               </a:rPr>
               <a:t>LOOK</a:t>
             </a:r>
-            <a:pPr indent="0" marL="0">
+            <a:pPr algn="ctr" indent="0" marL="0">
               <a:buNone/>
             </a:pPr>
             <a:r>
@@ -23913,51 +23692,9 @@
                 <a:ea typeface="Segoe UI Semibold" pitchFamily="34" charset="-122"/>
                 <a:cs typeface="Segoe UI Semibold" pitchFamily="34" charset="-120"/>
               </a:rPr>
-              <a:t>  GUARDA</a:t>
-            </a:r>
-            <a:endParaRPr lang="en-US" sz="950" dirty="0"/>
-          </a:p>
-        </p:txBody>
-      </p:sp>
-      <p:sp>
-        <p:nvSpPr>
-          <p:cNvPr id="10" name="cmd_105"/>
-          <p:cNvSpPr/>
-          <p:nvPr/>
-        </p:nvSpPr>
-        <p:spPr>
-          <a:xfrm>
-            <a:off x="6510528" y="493776"/>
-            <a:ext cx="1901952" cy="274320"/>
-          </a:xfrm>
-          <a:prstGeom prst="roundRect">
-            <a:avLst>
-              <a:gd name="adj" fmla="val 50000"/>
-            </a:avLst>
-          </a:prstGeom>
-          <a:solidFill>
-            <a:srgbClr val="FFFFFF"/>
-          </a:solidFill>
-          <a:ln w="28575">
-            <a:solidFill>
-              <a:srgbClr val="F7A6C4"/>
-            </a:solidFill>
-          </a:ln>
-          <a:effectLst>
-            <a:outerShdw sx="100000" sy="100000" kx="0" ky="0" algn="bl" rotWithShape="0" blurRad="88900" dist="31750" dir="5400000">
-              <a:srgbClr val="1B2559">
-                <a:alpha val="8000"/>
-              </a:srgbClr>
-            </a:outerShdw>
-          </a:effectLst>
-        </p:spPr>
-        <p:txBody>
-          <a:bodyPr wrap="square" lIns="101600" tIns="0" rIns="101600" bIns="0" rtlCol="0" anchor="ctr">
-            <a:normAutofit/>
-          </a:bodyPr>
-          <a:lstStyle/>
-          <a:p>
-            <a:pPr indent="0" marL="0">
+              <a:t>  →  </a:t>
+            </a:r>
+            <a:pPr algn="ctr" indent="0" marL="0">
               <a:buNone/>
             </a:pPr>
             <a:r>
@@ -23968,7 +23705,7 @@
               </a:rPr>
               <a:t>💬 </a:t>
             </a:r>
-            <a:pPr indent="0" marL="0">
+            <a:pPr algn="ctr" indent="0" marL="0">
               <a:buNone/>
             </a:pPr>
             <a:r>
@@ -23982,33 +23719,19 @@
               </a:rPr>
               <a:t>TALK</a:t>
             </a:r>
-            <a:pPr indent="0" marL="0">
-              <a:buNone/>
-            </a:pPr>
-            <a:r>
-              <a:rPr lang="en-US" sz="950" dirty="0">
-                <a:solidFill>
-                  <a:srgbClr val="5B6785"/>
-                </a:solidFill>
-                <a:latin typeface="Segoe UI Semibold" pitchFamily="34" charset="0"/>
-                <a:ea typeface="Segoe UI Semibold" pitchFamily="34" charset="-122"/>
-                <a:cs typeface="Segoe UI Semibold" pitchFamily="34" charset="-120"/>
-              </a:rPr>
-              <a:t>  PARLA</a:t>
-            </a:r>
             <a:endParaRPr lang="en-US" sz="950" dirty="0"/>
           </a:p>
         </p:txBody>
       </p:sp>
       <p:sp>
         <p:nvSpPr>
-          <p:cNvPr id="11" name="meta_106"/>
-          <p:cNvSpPr/>
-          <p:nvPr/>
-        </p:nvSpPr>
-        <p:spPr>
-          <a:xfrm>
-            <a:off x="6510528" y="804672"/>
+          <p:cNvPr id="10" name="meta_105"/>
+          <p:cNvSpPr/>
+          <p:nvPr/>
+        </p:nvSpPr>
+        <p:spPr>
+          <a:xfrm>
+            <a:off x="6510528" y="548640"/>
             <a:ext cx="1901952" cy="274320"/>
           </a:xfrm>
           <a:prstGeom prst="roundRect">
@@ -24051,13 +23774,13 @@
       </p:sp>
       <p:sp>
         <p:nvSpPr>
-          <p:cNvPr id="12" name="tag_107"/>
-          <p:cNvSpPr/>
-          <p:nvPr/>
-        </p:nvSpPr>
-        <p:spPr>
-          <a:xfrm>
-            <a:off x="6510528" y="1115568"/>
+          <p:cNvPr id="11" name="tag_106"/>
+          <p:cNvSpPr/>
+          <p:nvPr/>
+        </p:nvSpPr>
+        <p:spPr>
+          <a:xfrm>
+            <a:off x="6510528" y="914400"/>
             <a:ext cx="1901952" cy="274320"/>
           </a:xfrm>
           <a:prstGeom prst="roundRect">
@@ -24114,7 +23837,7 @@
       </p:sp>
       <p:pic>
         <p:nvPicPr>
-          <p:cNvPr id="13" name="logo_108" descr="/home/claude/lls-course/v2/img/logo.png">    </p:cNvPr>
+          <p:cNvPr id="12" name="logo_107" descr="/home/claude/lls-course/v2/img/logo.png">    </p:cNvPr>
           <p:cNvPicPr>
             <a:picLocks noChangeAspect="1"/>
           </p:cNvPicPr>
@@ -24138,7 +23861,7 @@
       </p:pic>
       <p:sp>
         <p:nvSpPr>
-          <p:cNvPr id="14" name="foot_109"/>
+          <p:cNvPr id="13" name="foot_108"/>
           <p:cNvSpPr/>
           <p:nvPr/>
         </p:nvSpPr>
@@ -24177,7 +23900,7 @@
       </p:sp>
       <p:sp>
         <p:nvSpPr>
-          <p:cNvPr id="15" name="pf_110"/>
+          <p:cNvPr id="14" name="pf_109"/>
           <p:cNvSpPr/>
           <p:nvPr/>
         </p:nvSpPr>
@@ -24211,7 +23934,7 @@
       </p:sp>
       <p:pic>
         <p:nvPicPr>
-          <p:cNvPr id="16" name="ph_111" descr="/home/claude/lls-course/v2/cache/prep1_families_jpg_649x297_31.png">    </p:cNvPr>
+          <p:cNvPr id="15" name="ph_110" descr="/home/claude/lls-course/v2/cache/prep1_families_jpg_649x297_31.png">    </p:cNvPr>
           <p:cNvPicPr>
             <a:picLocks noChangeAspect="1"/>
           </p:cNvPicPr>
@@ -24235,7 +23958,7 @@
       </p:pic>
       <p:sp>
         <p:nvSpPr>
-          <p:cNvPr id="17" name="cd_112"/>
+          <p:cNvPr id="16" name="cd_111"/>
           <p:cNvSpPr/>
           <p:nvPr/>
         </p:nvSpPr>
@@ -24269,7 +23992,7 @@
       </p:sp>
       <p:sp>
         <p:nvSpPr>
-          <p:cNvPr id="18" name="ii_113"/>
+          <p:cNvPr id="17" name="ii_112"/>
           <p:cNvSpPr/>
           <p:nvPr/>
         </p:nvSpPr>
@@ -24305,7 +24028,7 @@
       </p:sp>
       <p:sp>
         <p:nvSpPr>
-          <p:cNvPr id="19" name="ih_114"/>
+          <p:cNvPr id="18" name="ih_113"/>
           <p:cNvSpPr/>
           <p:nvPr/>
         </p:nvSpPr>
@@ -24344,7 +24067,7 @@
       </p:sp>
       <p:sp>
         <p:nvSpPr>
-          <p:cNvPr id="20" name="il_115"/>
+          <p:cNvPr id="19" name="il_114"/>
           <p:cNvSpPr/>
           <p:nvPr/>
         </p:nvSpPr>
@@ -24485,7 +24208,7 @@
       </p:sp>
       <p:sp>
         <p:nvSpPr>
-          <p:cNvPr id="21" name="R1_qb116"/>
+          <p:cNvPr id="20" name="R1_qb115"/>
           <p:cNvSpPr/>
           <p:nvPr/>
         </p:nvSpPr>
@@ -24537,7 +24260,7 @@
       </p:sp>
       <p:sp>
         <p:nvSpPr>
-          <p:cNvPr id="22" name="R1_sq117"/>
+          <p:cNvPr id="21" name="R1_sq116"/>
           <p:cNvSpPr/>
           <p:nvPr/>
         </p:nvSpPr>
@@ -24610,7 +24333,7 @@
       </p:sp>
       <p:sp>
         <p:nvSpPr>
-          <p:cNvPr id="23" name="R2_qb118"/>
+          <p:cNvPr id="22" name="R2_qb117"/>
           <p:cNvSpPr/>
           <p:nvPr/>
         </p:nvSpPr>
@@ -24662,7 +24385,7 @@
       </p:sp>
       <p:sp>
         <p:nvSpPr>
-          <p:cNvPr id="24" name="R2_sq119"/>
+          <p:cNvPr id="23" name="R2_sq118"/>
           <p:cNvSpPr/>
           <p:nvPr/>
         </p:nvSpPr>
@@ -24735,7 +24458,7 @@
       </p:sp>
       <p:sp>
         <p:nvSpPr>
-          <p:cNvPr id="25" name="R3_qb120"/>
+          <p:cNvPr id="24" name="R3_qb119"/>
           <p:cNvSpPr/>
           <p:nvPr/>
         </p:nvSpPr>
@@ -24787,7 +24510,7 @@
       </p:sp>
       <p:sp>
         <p:nvSpPr>
-          <p:cNvPr id="26" name="R3_sq121"/>
+          <p:cNvPr id="25" name="R3_sq120"/>
           <p:cNvSpPr/>
           <p:nvPr/>
         </p:nvSpPr>
@@ -24860,7 +24583,7 @@
       </p:sp>
       <p:sp>
         <p:nvSpPr>
-          <p:cNvPr id="27" name="R4_qb122"/>
+          <p:cNvPr id="26" name="R4_qb121"/>
           <p:cNvSpPr/>
           <p:nvPr/>
         </p:nvSpPr>
@@ -24912,7 +24635,7 @@
       </p:sp>
       <p:sp>
         <p:nvSpPr>
-          <p:cNvPr id="28" name="R4_sq123"/>
+          <p:cNvPr id="27" name="R4_sq122"/>
           <p:cNvSpPr/>
           <p:nvPr/>
         </p:nvSpPr>
@@ -25025,7 +24748,7 @@
                                           </p:stCondLst>
                                         </p:cTn>
                                         <p:tgtEl>
-                                          <p:spTgt spid="21"/>
+                                          <p:spTgt spid="20"/>
                                         </p:tgtEl>
                                         <p:attrNameLst>
                                           <p:attrName>style.visibility</p:attrName>
@@ -25039,7 +24762,7 @@
                                       <p:cBhvr>
                                         <p:cTn id="7" dur="400"/>
                                         <p:tgtEl>
-                                          <p:spTgt spid="21"/>
+                                          <p:spTgt spid="20"/>
                                         </p:tgtEl>
                                       </p:cBhvr>
                                     </p:animEffect>
@@ -25060,7 +24783,7 @@
                                           </p:stCondLst>
                                         </p:cTn>
                                         <p:tgtEl>
-                                          <p:spTgt spid="22"/>
+                                          <p:spTgt spid="21"/>
                                         </p:tgtEl>
                                         <p:attrNameLst>
                                           <p:attrName>style.visibility</p:attrName>
@@ -25074,7 +24797,7 @@
                                       <p:cBhvr>
                                         <p:cTn id="10" dur="400"/>
                                         <p:tgtEl>
-                                          <p:spTgt spid="22"/>
+                                          <p:spTgt spid="21"/>
                                         </p:tgtEl>
                                       </p:cBhvr>
                                     </p:animEffect>
@@ -25113,7 +24836,7 @@
                                           </p:stCondLst>
                                         </p:cTn>
                                         <p:tgtEl>
-                                          <p:spTgt spid="23"/>
+                                          <p:spTgt spid="22"/>
                                         </p:tgtEl>
                                         <p:attrNameLst>
                                           <p:attrName>style.visibility</p:attrName>
@@ -25127,7 +24850,7 @@
                                       <p:cBhvr>
                                         <p:cTn id="15" dur="400"/>
                                         <p:tgtEl>
-                                          <p:spTgt spid="23"/>
+                                          <p:spTgt spid="22"/>
                                         </p:tgtEl>
                                       </p:cBhvr>
                                     </p:animEffect>
@@ -25148,7 +24871,7 @@
                                           </p:stCondLst>
                                         </p:cTn>
                                         <p:tgtEl>
-                                          <p:spTgt spid="24"/>
+                                          <p:spTgt spid="23"/>
                                         </p:tgtEl>
                                         <p:attrNameLst>
                                           <p:attrName>style.visibility</p:attrName>
@@ -25162,7 +24885,7 @@
                                       <p:cBhvr>
                                         <p:cTn id="18" dur="400"/>
                                         <p:tgtEl>
-                                          <p:spTgt spid="24"/>
+                                          <p:spTgt spid="23"/>
                                         </p:tgtEl>
                                       </p:cBhvr>
                                     </p:animEffect>
@@ -25201,7 +24924,7 @@
                                           </p:stCondLst>
                                         </p:cTn>
                                         <p:tgtEl>
-                                          <p:spTgt spid="25"/>
+                                          <p:spTgt spid="24"/>
                                         </p:tgtEl>
                                         <p:attrNameLst>
                                           <p:attrName>style.visibility</p:attrName>
@@ -25215,7 +24938,7 @@
                                       <p:cBhvr>
                                         <p:cTn id="23" dur="400"/>
                                         <p:tgtEl>
-                                          <p:spTgt spid="25"/>
+                                          <p:spTgt spid="24"/>
                                         </p:tgtEl>
                                       </p:cBhvr>
                                     </p:animEffect>
@@ -25236,7 +24959,7 @@
                                           </p:stCondLst>
                                         </p:cTn>
                                         <p:tgtEl>
-                                          <p:spTgt spid="26"/>
+                                          <p:spTgt spid="25"/>
                                         </p:tgtEl>
                                         <p:attrNameLst>
                                           <p:attrName>style.visibility</p:attrName>
@@ -25250,7 +24973,7 @@
                                       <p:cBhvr>
                                         <p:cTn id="26" dur="400"/>
                                         <p:tgtEl>
-                                          <p:spTgt spid="26"/>
+                                          <p:spTgt spid="25"/>
                                         </p:tgtEl>
                                       </p:cBhvr>
                                     </p:animEffect>
@@ -25289,7 +25012,7 @@
                                           </p:stCondLst>
                                         </p:cTn>
                                         <p:tgtEl>
-                                          <p:spTgt spid="27"/>
+                                          <p:spTgt spid="26"/>
                                         </p:tgtEl>
                                         <p:attrNameLst>
                                           <p:attrName>style.visibility</p:attrName>
@@ -25303,7 +25026,7 @@
                                       <p:cBhvr>
                                         <p:cTn id="31" dur="400"/>
                                         <p:tgtEl>
-                                          <p:spTgt spid="27"/>
+                                          <p:spTgt spid="26"/>
                                         </p:tgtEl>
                                       </p:cBhvr>
                                     </p:animEffect>
@@ -25324,7 +25047,7 @@
                                           </p:stCondLst>
                                         </p:cTn>
                                         <p:tgtEl>
-                                          <p:spTgt spid="28"/>
+                                          <p:spTgt spid="27"/>
                                         </p:tgtEl>
                                         <p:attrNameLst>
                                           <p:attrName>style.visibility</p:attrName>
@@ -25338,7 +25061,7 @@
                                       <p:cBhvr>
                                         <p:cTn id="34" dur="400"/>
                                         <p:tgtEl>
-                                          <p:spTgt spid="28"/>
+                                          <p:spTgt spid="27"/>
                                         </p:tgtEl>
                                       </p:cBhvr>
                                     </p:animEffect>
@@ -25409,7 +25132,7 @@
       </p:grpSpPr>
       <p:sp>
         <p:nvSpPr>
-          <p:cNvPr id="3" name="bd_124"/>
+          <p:cNvPr id="3" name="bd_123"/>
           <p:cNvSpPr/>
           <p:nvPr/>
         </p:nvSpPr>
@@ -25461,7 +25184,7 @@
       </p:sp>
       <p:pic>
         <p:nvPicPr>
-          <p:cNvPr id="4" name="brY_125" descr="/home/claude/lls-course/v2/assets/brush-yellow.png">    </p:cNvPr>
+          <p:cNvPr id="4" name="brY_124" descr="/home/claude/lls-course/v2/assets/brush-yellow.png">    </p:cNvPr>
           <p:cNvPicPr>
             <a:picLocks noChangeAspect="1"/>
           </p:cNvPicPr>
@@ -25485,7 +25208,7 @@
       </p:pic>
       <p:sp>
         <p:nvSpPr>
-          <p:cNvPr id="5" name="title_126"/>
+          <p:cNvPr id="5" name="title_125"/>
           <p:cNvSpPr/>
           <p:nvPr/>
         </p:nvSpPr>
@@ -25526,7 +25249,7 @@
       </p:sp>
       <p:pic>
         <p:nvPicPr>
-          <p:cNvPr id="6" name="brP_127" descr="/home/claude/lls-course/v2/assets/brush-pink.png">    </p:cNvPr>
+          <p:cNvPr id="6" name="brP_126" descr="/home/claude/lls-course/v2/assets/brush-pink.png">    </p:cNvPr>
           <p:cNvPicPr>
             <a:picLocks noChangeAspect="1"/>
           </p:cNvPicPr>
@@ -25550,7 +25273,7 @@
       </p:pic>
       <p:sp>
         <p:nvSpPr>
-          <p:cNvPr id="7" name="ins_128"/>
+          <p:cNvPr id="7" name="ins_127"/>
           <p:cNvSpPr/>
           <p:nvPr/>
         </p:nvSpPr>
@@ -25591,7 +25314,7 @@
       </p:sp>
       <p:sp>
         <p:nvSpPr>
-          <p:cNvPr id="8" name="insIT_129"/>
+          <p:cNvPr id="8" name="insIT_128"/>
           <p:cNvSpPr/>
           <p:nvPr/>
         </p:nvSpPr>
@@ -25632,7 +25355,7 @@
       </p:sp>
       <p:sp>
         <p:nvSpPr>
-          <p:cNvPr id="9" name="cmd_130"/>
+          <p:cNvPr id="9" name="cmd_129"/>
           <p:cNvSpPr/>
           <p:nvPr/>
         </p:nvSpPr>
@@ -25663,12 +25386,12 @@
           </a:effectLst>
         </p:spPr>
         <p:txBody>
-          <a:bodyPr wrap="square" lIns="101600" tIns="0" rIns="101600" bIns="0" rtlCol="0" anchor="ctr">
+          <a:bodyPr wrap="square" lIns="76200" tIns="0" rIns="76200" bIns="0" rtlCol="0" anchor="ctr">
             <a:normAutofit/>
           </a:bodyPr>
           <a:lstStyle/>
           <a:p>
-            <a:pPr indent="0" marL="0">
+            <a:pPr algn="ctr" indent="0" marL="0">
               <a:buNone/>
             </a:pPr>
             <a:r>
@@ -25679,7 +25402,7 @@
               </a:rPr>
               <a:t>👀 </a:t>
             </a:r>
-            <a:pPr indent="0" marL="0">
+            <a:pPr algn="ctr" indent="0" marL="0">
               <a:buNone/>
             </a:pPr>
             <a:r>
@@ -25693,7 +25416,7 @@
               </a:rPr>
               <a:t>READ</a:t>
             </a:r>
-            <a:pPr indent="0" marL="0">
+            <a:pPr algn="ctr" indent="0" marL="0">
               <a:buNone/>
             </a:pPr>
             <a:r>
@@ -25705,51 +25428,9 @@
                 <a:ea typeface="Segoe UI Semibold" pitchFamily="34" charset="-122"/>
                 <a:cs typeface="Segoe UI Semibold" pitchFamily="34" charset="-120"/>
               </a:rPr>
-              <a:t>  LEGGI</a:t>
-            </a:r>
-            <a:endParaRPr lang="en-US" sz="950" dirty="0"/>
-          </a:p>
-        </p:txBody>
-      </p:sp>
-      <p:sp>
-        <p:nvSpPr>
-          <p:cNvPr id="10" name="cmd_131"/>
-          <p:cNvSpPr/>
-          <p:nvPr/>
-        </p:nvSpPr>
-        <p:spPr>
-          <a:xfrm>
-            <a:off x="6510528" y="493776"/>
-            <a:ext cx="1901952" cy="274320"/>
-          </a:xfrm>
-          <a:prstGeom prst="roundRect">
-            <a:avLst>
-              <a:gd name="adj" fmla="val 50000"/>
-            </a:avLst>
-          </a:prstGeom>
-          <a:solidFill>
-            <a:srgbClr val="FFFFFF"/>
-          </a:solidFill>
-          <a:ln w="28575">
-            <a:solidFill>
-              <a:srgbClr val="FFE07A"/>
-            </a:solidFill>
-          </a:ln>
-          <a:effectLst>
-            <a:outerShdw sx="100000" sy="100000" kx="0" ky="0" algn="bl" rotWithShape="0" blurRad="88900" dist="31750" dir="5400000">
-              <a:srgbClr val="1B2559">
-                <a:alpha val="8000"/>
-              </a:srgbClr>
-            </a:outerShdw>
-          </a:effectLst>
-        </p:spPr>
-        <p:txBody>
-          <a:bodyPr wrap="square" lIns="101600" tIns="0" rIns="101600" bIns="0" rtlCol="0" anchor="ctr">
-            <a:normAutofit/>
-          </a:bodyPr>
-          <a:lstStyle/>
-          <a:p>
-            <a:pPr indent="0" marL="0">
+              <a:t>  →  </a:t>
+            </a:r>
+            <a:pPr algn="ctr" indent="0" marL="0">
               <a:buNone/>
             </a:pPr>
             <a:r>
@@ -25760,7 +25441,7 @@
               </a:rPr>
               <a:t>🔍 </a:t>
             </a:r>
-            <a:pPr indent="0" marL="0">
+            <a:pPr algn="ctr" indent="0" marL="0">
               <a:buNone/>
             </a:pPr>
             <a:r>
@@ -25774,33 +25455,19 @@
               </a:rPr>
               <a:t>FIND</a:t>
             </a:r>
-            <a:pPr indent="0" marL="0">
-              <a:buNone/>
-            </a:pPr>
-            <a:r>
-              <a:rPr lang="en-US" sz="950" dirty="0">
-                <a:solidFill>
-                  <a:srgbClr val="5B6785"/>
-                </a:solidFill>
-                <a:latin typeface="Segoe UI Semibold" pitchFamily="34" charset="0"/>
-                <a:ea typeface="Segoe UI Semibold" pitchFamily="34" charset="-122"/>
-                <a:cs typeface="Segoe UI Semibold" pitchFamily="34" charset="-120"/>
-              </a:rPr>
-              <a:t>  TROVA</a:t>
-            </a:r>
             <a:endParaRPr lang="en-US" sz="950" dirty="0"/>
           </a:p>
         </p:txBody>
       </p:sp>
       <p:sp>
         <p:nvSpPr>
-          <p:cNvPr id="11" name="meta_132"/>
-          <p:cNvSpPr/>
-          <p:nvPr/>
-        </p:nvSpPr>
-        <p:spPr>
-          <a:xfrm>
-            <a:off x="6510528" y="804672"/>
+          <p:cNvPr id="10" name="meta_130"/>
+          <p:cNvSpPr/>
+          <p:nvPr/>
+        </p:nvSpPr>
+        <p:spPr>
+          <a:xfrm>
+            <a:off x="6510528" y="548640"/>
             <a:ext cx="1901952" cy="274320"/>
           </a:xfrm>
           <a:prstGeom prst="roundRect">
@@ -25843,13 +25510,13 @@
       </p:sp>
       <p:sp>
         <p:nvSpPr>
-          <p:cNvPr id="12" name="tag_133"/>
-          <p:cNvSpPr/>
-          <p:nvPr/>
-        </p:nvSpPr>
-        <p:spPr>
-          <a:xfrm>
-            <a:off x="6510528" y="1115568"/>
+          <p:cNvPr id="11" name="tag_131"/>
+          <p:cNvSpPr/>
+          <p:nvPr/>
+        </p:nvSpPr>
+        <p:spPr>
+          <a:xfrm>
+            <a:off x="6510528" y="914400"/>
             <a:ext cx="1901952" cy="274320"/>
           </a:xfrm>
           <a:prstGeom prst="roundRect">
@@ -25906,7 +25573,7 @@
       </p:sp>
       <p:pic>
         <p:nvPicPr>
-          <p:cNvPr id="13" name="logo_134" descr="/home/claude/lls-course/v2/img/logo.png">    </p:cNvPr>
+          <p:cNvPr id="12" name="logo_132" descr="/home/claude/lls-course/v2/img/logo.png">    </p:cNvPr>
           <p:cNvPicPr>
             <a:picLocks noChangeAspect="1"/>
           </p:cNvPicPr>
@@ -25930,7 +25597,7 @@
       </p:pic>
       <p:sp>
         <p:nvSpPr>
-          <p:cNvPr id="14" name="foot_135"/>
+          <p:cNvPr id="13" name="foot_133"/>
           <p:cNvSpPr/>
           <p:nvPr/>
         </p:nvSpPr>
@@ -25969,7 +25636,7 @@
       </p:sp>
       <p:sp>
         <p:nvSpPr>
-          <p:cNvPr id="15" name="bd_136"/>
+          <p:cNvPr id="14" name="bd_134"/>
           <p:cNvSpPr/>
           <p:nvPr/>
         </p:nvSpPr>
@@ -26021,7 +25688,7 @@
       </p:sp>
       <p:sp>
         <p:nvSpPr>
-          <p:cNvPr id="16" name="q_137"/>
+          <p:cNvPr id="15" name="q_135"/>
           <p:cNvSpPr/>
           <p:nvPr/>
         </p:nvSpPr>
@@ -26070,7 +25737,7 @@
       </p:sp>
       <p:sp>
         <p:nvSpPr>
-          <p:cNvPr id="17" name="R1_chip138"/>
+          <p:cNvPr id="16" name="R1_chip136"/>
           <p:cNvSpPr/>
           <p:nvPr/>
         </p:nvSpPr>
@@ -26150,7 +25817,7 @@
       </p:sp>
       <p:sp>
         <p:nvSpPr>
-          <p:cNvPr id="18" name="bd_139"/>
+          <p:cNvPr id="17" name="bd_137"/>
           <p:cNvSpPr/>
           <p:nvPr/>
         </p:nvSpPr>
@@ -26202,7 +25869,7 @@
       </p:sp>
       <p:sp>
         <p:nvSpPr>
-          <p:cNvPr id="19" name="q_140"/>
+          <p:cNvPr id="18" name="q_138"/>
           <p:cNvSpPr/>
           <p:nvPr/>
         </p:nvSpPr>
@@ -26251,7 +25918,7 @@
       </p:sp>
       <p:sp>
         <p:nvSpPr>
-          <p:cNvPr id="20" name="R2_chip141"/>
+          <p:cNvPr id="19" name="R2_chip139"/>
           <p:cNvSpPr/>
           <p:nvPr/>
         </p:nvSpPr>
@@ -26331,7 +25998,7 @@
       </p:sp>
       <p:sp>
         <p:nvSpPr>
-          <p:cNvPr id="21" name="bd_142"/>
+          <p:cNvPr id="20" name="bd_140"/>
           <p:cNvSpPr/>
           <p:nvPr/>
         </p:nvSpPr>
@@ -26383,7 +26050,7 @@
       </p:sp>
       <p:sp>
         <p:nvSpPr>
-          <p:cNvPr id="22" name="q_143"/>
+          <p:cNvPr id="21" name="q_141"/>
           <p:cNvSpPr/>
           <p:nvPr/>
         </p:nvSpPr>
@@ -26432,7 +26099,7 @@
       </p:sp>
       <p:sp>
         <p:nvSpPr>
-          <p:cNvPr id="23" name="R3_chip144"/>
+          <p:cNvPr id="22" name="R3_chip142"/>
           <p:cNvSpPr/>
           <p:nvPr/>
         </p:nvSpPr>
@@ -26512,7 +26179,7 @@
       </p:sp>
       <p:sp>
         <p:nvSpPr>
-          <p:cNvPr id="24" name="bd_145"/>
+          <p:cNvPr id="23" name="bd_143"/>
           <p:cNvSpPr/>
           <p:nvPr/>
         </p:nvSpPr>
@@ -26564,7 +26231,7 @@
       </p:sp>
       <p:sp>
         <p:nvSpPr>
-          <p:cNvPr id="25" name="q_146"/>
+          <p:cNvPr id="24" name="q_144"/>
           <p:cNvSpPr/>
           <p:nvPr/>
         </p:nvSpPr>
@@ -26613,7 +26280,7 @@
       </p:sp>
       <p:sp>
         <p:nvSpPr>
-          <p:cNvPr id="26" name="R4_chip147"/>
+          <p:cNvPr id="25" name="R4_chip145"/>
           <p:cNvSpPr/>
           <p:nvPr/>
         </p:nvSpPr>
@@ -26693,7 +26360,7 @@
       </p:sp>
       <p:sp>
         <p:nvSpPr>
-          <p:cNvPr id="27" name="bd_148"/>
+          <p:cNvPr id="26" name="bd_146"/>
           <p:cNvSpPr/>
           <p:nvPr/>
         </p:nvSpPr>
@@ -26745,7 +26412,7 @@
       </p:sp>
       <p:sp>
         <p:nvSpPr>
-          <p:cNvPr id="28" name="q_149"/>
+          <p:cNvPr id="27" name="q_147"/>
           <p:cNvSpPr/>
           <p:nvPr/>
         </p:nvSpPr>
@@ -26794,7 +26461,7 @@
       </p:sp>
       <p:sp>
         <p:nvSpPr>
-          <p:cNvPr id="29" name="R5_chip150"/>
+          <p:cNvPr id="28" name="R5_chip148"/>
           <p:cNvSpPr/>
           <p:nvPr/>
         </p:nvSpPr>
@@ -26874,7 +26541,7 @@
       </p:sp>
       <p:sp>
         <p:nvSpPr>
-          <p:cNvPr id="30" name="bd_151"/>
+          <p:cNvPr id="29" name="bd_149"/>
           <p:cNvSpPr/>
           <p:nvPr/>
         </p:nvSpPr>
@@ -26926,7 +26593,7 @@
       </p:sp>
       <p:sp>
         <p:nvSpPr>
-          <p:cNvPr id="31" name="q_152"/>
+          <p:cNvPr id="30" name="q_150"/>
           <p:cNvSpPr/>
           <p:nvPr/>
         </p:nvSpPr>
@@ -26975,7 +26642,7 @@
       </p:sp>
       <p:sp>
         <p:nvSpPr>
-          <p:cNvPr id="32" name="R6_chip153"/>
+          <p:cNvPr id="31" name="R6_chip151"/>
           <p:cNvSpPr/>
           <p:nvPr/>
         </p:nvSpPr>
@@ -27095,7 +26762,7 @@
                                           </p:stCondLst>
                                         </p:cTn>
                                         <p:tgtEl>
-                                          <p:spTgt spid="17"/>
+                                          <p:spTgt spid="16"/>
                                         </p:tgtEl>
                                         <p:attrNameLst>
                                           <p:attrName>style.visibility</p:attrName>
@@ -27109,7 +26776,7 @@
                                       <p:cBhvr>
                                         <p:cTn id="7" dur="400"/>
                                         <p:tgtEl>
-                                          <p:spTgt spid="17"/>
+                                          <p:spTgt spid="16"/>
                                         </p:tgtEl>
                                       </p:cBhvr>
                                     </p:animEffect>
@@ -27148,7 +26815,7 @@
                                           </p:stCondLst>
                                         </p:cTn>
                                         <p:tgtEl>
-                                          <p:spTgt spid="20"/>
+                                          <p:spTgt spid="19"/>
                                         </p:tgtEl>
                                         <p:attrNameLst>
                                           <p:attrName>style.visibility</p:attrName>
@@ -27162,7 +26829,7 @@
                                       <p:cBhvr>
                                         <p:cTn id="12" dur="400"/>
                                         <p:tgtEl>
-                                          <p:spTgt spid="20"/>
+                                          <p:spTgt spid="19"/>
                                         </p:tgtEl>
                                       </p:cBhvr>
                                     </p:animEffect>
@@ -27201,7 +26868,7 @@
                                           </p:stCondLst>
                                         </p:cTn>
                                         <p:tgtEl>
-                                          <p:spTgt spid="23"/>
+                                          <p:spTgt spid="22"/>
                                         </p:tgtEl>
                                         <p:attrNameLst>
                                           <p:attrName>style.visibility</p:attrName>
@@ -27215,7 +26882,7 @@
                                       <p:cBhvr>
                                         <p:cTn id="17" dur="400"/>
                                         <p:tgtEl>
-                                          <p:spTgt spid="23"/>
+                                          <p:spTgt spid="22"/>
                                         </p:tgtEl>
                                       </p:cBhvr>
                                     </p:animEffect>
@@ -27254,7 +26921,7 @@
                                           </p:stCondLst>
                                         </p:cTn>
                                         <p:tgtEl>
-                                          <p:spTgt spid="26"/>
+                                          <p:spTgt spid="25"/>
                                         </p:tgtEl>
                                         <p:attrNameLst>
                                           <p:attrName>style.visibility</p:attrName>
@@ -27268,7 +26935,7 @@
                                       <p:cBhvr>
                                         <p:cTn id="22" dur="400"/>
                                         <p:tgtEl>
-                                          <p:spTgt spid="26"/>
+                                          <p:spTgt spid="25"/>
                                         </p:tgtEl>
                                       </p:cBhvr>
                                     </p:animEffect>
@@ -27307,7 +26974,7 @@
                                           </p:stCondLst>
                                         </p:cTn>
                                         <p:tgtEl>
-                                          <p:spTgt spid="29"/>
+                                          <p:spTgt spid="28"/>
                                         </p:tgtEl>
                                         <p:attrNameLst>
                                           <p:attrName>style.visibility</p:attrName>
@@ -27321,7 +26988,7 @@
                                       <p:cBhvr>
                                         <p:cTn id="27" dur="400"/>
                                         <p:tgtEl>
-                                          <p:spTgt spid="29"/>
+                                          <p:spTgt spid="28"/>
                                         </p:tgtEl>
                                       </p:cBhvr>
                                     </p:animEffect>
@@ -27360,7 +27027,7 @@
                                           </p:stCondLst>
                                         </p:cTn>
                                         <p:tgtEl>
-                                          <p:spTgt spid="32"/>
+                                          <p:spTgt spid="31"/>
                                         </p:tgtEl>
                                         <p:attrNameLst>
                                           <p:attrName>style.visibility</p:attrName>
@@ -27374,7 +27041,7 @@
                                       <p:cBhvr>
                                         <p:cTn id="32" dur="400"/>
                                         <p:tgtEl>
-                                          <p:spTgt spid="32"/>
+                                          <p:spTgt spid="31"/>
                                         </p:tgtEl>
                                       </p:cBhvr>
                                     </p:animEffect>
@@ -27445,7 +27112,7 @@
       </p:grpSpPr>
       <p:sp>
         <p:nvSpPr>
-          <p:cNvPr id="3" name="bd_154"/>
+          <p:cNvPr id="3" name="bd_152"/>
           <p:cNvSpPr/>
           <p:nvPr/>
         </p:nvSpPr>
@@ -27497,7 +27164,7 @@
       </p:sp>
       <p:pic>
         <p:nvPicPr>
-          <p:cNvPr id="4" name="brY_155" descr="/home/claude/lls-course/v2/assets/brush-yellow.png">    </p:cNvPr>
+          <p:cNvPr id="4" name="brY_153" descr="/home/claude/lls-course/v2/assets/brush-yellow.png">    </p:cNvPr>
           <p:cNvPicPr>
             <a:picLocks noChangeAspect="1"/>
           </p:cNvPicPr>
@@ -27521,7 +27188,7 @@
       </p:pic>
       <p:sp>
         <p:nvSpPr>
-          <p:cNvPr id="5" name="title_156"/>
+          <p:cNvPr id="5" name="title_154"/>
           <p:cNvSpPr/>
           <p:nvPr/>
         </p:nvSpPr>
@@ -27562,7 +27229,7 @@
       </p:sp>
       <p:pic>
         <p:nvPicPr>
-          <p:cNvPr id="6" name="brP_157" descr="/home/claude/lls-course/v2/assets/brush-pink.png">    </p:cNvPr>
+          <p:cNvPr id="6" name="brP_155" descr="/home/claude/lls-course/v2/assets/brush-pink.png">    </p:cNvPr>
           <p:cNvPicPr>
             <a:picLocks noChangeAspect="1"/>
           </p:cNvPicPr>
@@ -27586,7 +27253,7 @@
       </p:pic>
       <p:sp>
         <p:nvSpPr>
-          <p:cNvPr id="7" name="ins_158"/>
+          <p:cNvPr id="7" name="ins_156"/>
           <p:cNvSpPr/>
           <p:nvPr/>
         </p:nvSpPr>
@@ -27627,7 +27294,7 @@
       </p:sp>
       <p:sp>
         <p:nvSpPr>
-          <p:cNvPr id="8" name="insIT_159"/>
+          <p:cNvPr id="8" name="insIT_157"/>
           <p:cNvSpPr/>
           <p:nvPr/>
         </p:nvSpPr>
@@ -27668,7 +27335,7 @@
       </p:sp>
       <p:sp>
         <p:nvSpPr>
-          <p:cNvPr id="9" name="cmd_160"/>
+          <p:cNvPr id="9" name="cmd_158"/>
           <p:cNvSpPr/>
           <p:nvPr/>
         </p:nvSpPr>
@@ -27699,12 +27366,12 @@
           </a:effectLst>
         </p:spPr>
         <p:txBody>
-          <a:bodyPr wrap="square" lIns="101600" tIns="0" rIns="101600" bIns="0" rtlCol="0" anchor="ctr">
+          <a:bodyPr wrap="square" lIns="76200" tIns="0" rIns="76200" bIns="0" rtlCol="0" anchor="ctr">
             <a:normAutofit/>
           </a:bodyPr>
           <a:lstStyle/>
           <a:p>
-            <a:pPr indent="0" marL="0">
+            <a:pPr algn="ctr" indent="0" marL="0">
               <a:buNone/>
             </a:pPr>
             <a:r>
@@ -27715,7 +27382,7 @@
               </a:rPr>
               <a:t>🎲 </a:t>
             </a:r>
-            <a:pPr indent="0" marL="0">
+            <a:pPr algn="ctr" indent="0" marL="0">
               <a:buNone/>
             </a:pPr>
             <a:r>
@@ -27729,7 +27396,7 @@
               </a:rPr>
               <a:t>PLAY</a:t>
             </a:r>
-            <a:pPr indent="0" marL="0">
+            <a:pPr algn="ctr" indent="0" marL="0">
               <a:buNone/>
             </a:pPr>
             <a:r>
@@ -27749,13 +27416,13 @@
       </p:sp>
       <p:sp>
         <p:nvSpPr>
-          <p:cNvPr id="10" name="meta_161"/>
-          <p:cNvSpPr/>
-          <p:nvPr/>
-        </p:nvSpPr>
-        <p:spPr>
-          <a:xfrm>
-            <a:off x="6510528" y="493776"/>
+          <p:cNvPr id="10" name="meta_159"/>
+          <p:cNvSpPr/>
+          <p:nvPr/>
+        </p:nvSpPr>
+        <p:spPr>
+          <a:xfrm>
+            <a:off x="6510528" y="548640"/>
             <a:ext cx="1901952" cy="274320"/>
           </a:xfrm>
           <a:prstGeom prst="roundRect">
@@ -27798,13 +27465,13 @@
       </p:sp>
       <p:sp>
         <p:nvSpPr>
-          <p:cNvPr id="11" name="tag_162"/>
-          <p:cNvSpPr/>
-          <p:nvPr/>
-        </p:nvSpPr>
-        <p:spPr>
-          <a:xfrm>
-            <a:off x="6510528" y="804672"/>
+          <p:cNvPr id="11" name="tag_160"/>
+          <p:cNvSpPr/>
+          <p:nvPr/>
+        </p:nvSpPr>
+        <p:spPr>
+          <a:xfrm>
+            <a:off x="6510528" y="914400"/>
             <a:ext cx="1901952" cy="274320"/>
           </a:xfrm>
           <a:prstGeom prst="roundRect">
@@ -27861,7 +27528,7 @@
       </p:sp>
       <p:pic>
         <p:nvPicPr>
-          <p:cNvPr id="12" name="logo_163" descr="/home/claude/lls-course/v2/img/logo.png">    </p:cNvPr>
+          <p:cNvPr id="12" name="logo_161" descr="/home/claude/lls-course/v2/img/logo.png">    </p:cNvPr>
           <p:cNvPicPr>
             <a:picLocks noChangeAspect="1"/>
           </p:cNvPicPr>
@@ -27885,7 +27552,7 @@
       </p:pic>
       <p:sp>
         <p:nvSpPr>
-          <p:cNvPr id="13" name="foot_164"/>
+          <p:cNvPr id="13" name="foot_162"/>
           <p:cNvSpPr/>
           <p:nvPr/>
         </p:nvSpPr>
@@ -27924,7 +27591,7 @@
       </p:sp>
       <p:sp>
         <p:nvSpPr>
-          <p:cNvPr id="14" name="cd_165"/>
+          <p:cNvPr id="14" name="cd_163"/>
           <p:cNvSpPr/>
           <p:nvPr/>
         </p:nvSpPr>
@@ -27939,11 +27606,11 @@
             </a:avLst>
           </a:prstGeom>
           <a:solidFill>
-            <a:srgbClr val="FFF6CC"/>
+            <a:srgbClr val="EEE8FB"/>
           </a:solidFill>
           <a:ln w="28575">
             <a:solidFill>
-              <a:srgbClr val="FFE07A"/>
+              <a:srgbClr val="CDBFF3"/>
             </a:solidFill>
             <a:prstDash val="solid"/>
           </a:ln>
@@ -27958,7 +27625,7 @@
       </p:sp>
       <p:sp>
         <p:nvSpPr>
-          <p:cNvPr id="15" name="ii_166"/>
+          <p:cNvPr id="15" name="ii_164"/>
           <p:cNvSpPr/>
           <p:nvPr/>
         </p:nvSpPr>
@@ -27994,7 +27661,7 @@
       </p:sp>
       <p:sp>
         <p:nvSpPr>
-          <p:cNvPr id="16" name="ih_167"/>
+          <p:cNvPr id="16" name="ih_165"/>
           <p:cNvSpPr/>
           <p:nvPr/>
         </p:nvSpPr>
@@ -28033,7 +27700,7 @@
       </p:sp>
       <p:sp>
         <p:nvSpPr>
-          <p:cNvPr id="17" name="il_168"/>
+          <p:cNvPr id="17" name="il_166"/>
           <p:cNvSpPr/>
           <p:nvPr/>
         </p:nvSpPr>
@@ -28126,7 +27793,7 @@
       </p:sp>
       <p:sp>
         <p:nvSpPr>
-          <p:cNvPr id="18" name="st_169"/>
+          <p:cNvPr id="18" name="st_167"/>
           <p:cNvSpPr/>
           <p:nvPr/>
         </p:nvSpPr>
@@ -28197,13 +27864,163 @@
       </p:sp>
       <p:sp>
         <p:nvSpPr>
-          <p:cNvPr id="19" name="bd_170"/>
+          <p:cNvPr id="19" name="bd_168"/>
           <p:cNvSpPr/>
           <p:nvPr/>
         </p:nvSpPr>
         <p:spPr>
           <a:xfrm>
             <a:off x="3246120" y="1491234"/>
+            <a:ext cx="329184" cy="329184"/>
+          </a:xfrm>
+          <a:prstGeom prst="ellipse">
+            <a:avLst/>
+          </a:prstGeom>
+          <a:solidFill>
+            <a:srgbClr val="7B5CD6"/>
+          </a:solidFill>
+          <a:ln w="28575">
+            <a:solidFill>
+              <a:srgbClr val="CDBFF3"/>
+            </a:solidFill>
+          </a:ln>
+          <a:effectLst>
+            <a:outerShdw sx="100000" sy="100000" kx="0" ky="0" algn="bl" rotWithShape="0" blurRad="88900" dist="31750" dir="5400000">
+              <a:srgbClr val="1B2559">
+                <a:alpha val="15000"/>
+              </a:srgbClr>
+            </a:outerShdw>
+          </a:effectLst>
+        </p:spPr>
+        <p:txBody>
+          <a:bodyPr wrap="square" lIns="0" tIns="0" rIns="0" bIns="0" rtlCol="0" anchor="ctr"/>
+          <a:lstStyle/>
+          <a:p>
+            <a:pPr algn="ctr" indent="0" marL="0">
+              <a:buNone/>
+            </a:pPr>
+            <a:r>
+              <a:rPr lang="en-US" sz="500" dirty="0">
+                <a:solidFill>
+                  <a:srgbClr val="FFFFFF"/>
+                </a:solidFill>
+                <a:latin typeface="Arial Rounded MT Bold" pitchFamily="34" charset="0"/>
+                <a:ea typeface="Arial Rounded MT Bold" pitchFamily="34" charset="-122"/>
+                <a:cs typeface="Arial Rounded MT Bold" pitchFamily="34" charset="-120"/>
+              </a:rPr>
+              <a:t>e.g.</a:t>
+            </a:r>
+            <a:endParaRPr lang="en-US" sz="500" dirty="0"/>
+          </a:p>
+        </p:txBody>
+      </p:sp>
+      <p:sp>
+        <p:nvSpPr>
+          <p:cNvPr id="20" name="gq_169"/>
+          <p:cNvSpPr/>
+          <p:nvPr/>
+        </p:nvSpPr>
+        <p:spPr>
+          <a:xfrm>
+            <a:off x="3657600" y="1417320"/>
+            <a:ext cx="2514600" cy="477012"/>
+          </a:xfrm>
+          <a:prstGeom prst="roundRect">
+            <a:avLst>
+              <a:gd name="adj" fmla="val 19169"/>
+            </a:avLst>
+          </a:prstGeom>
+          <a:solidFill>
+            <a:srgbClr val="EEE8FB"/>
+          </a:solidFill>
+          <a:ln w="28575">
+            <a:solidFill>
+              <a:srgbClr val="CDBFF3"/>
+            </a:solidFill>
+          </a:ln>
+        </p:spPr>
+        <p:txBody>
+          <a:bodyPr wrap="square" lIns="101600" tIns="0" rIns="101600" bIns="0" rtlCol="0" anchor="ctr">
+            <a:normAutofit/>
+          </a:bodyPr>
+          <a:lstStyle/>
+          <a:p>
+            <a:pPr indent="0" marL="0">
+              <a:buNone/>
+            </a:pPr>
+            <a:r>
+              <a:rPr lang="en-US" sz="1250" dirty="0">
+                <a:solidFill>
+                  <a:srgbClr val="1B2559"/>
+                </a:solidFill>
+                <a:latin typeface="Segoe UI Semibold" pitchFamily="34" charset="0"/>
+                <a:ea typeface="Segoe UI Semibold" pitchFamily="34" charset="-122"/>
+                <a:cs typeface="Segoe UI Semibold" pitchFamily="34" charset="-120"/>
+              </a:rPr>
+              <a:t>careful</a:t>
+            </a:r>
+            <a:endParaRPr lang="en-US" sz="1250" dirty="0"/>
+          </a:p>
+        </p:txBody>
+      </p:sp>
+      <p:sp>
+        <p:nvSpPr>
+          <p:cNvPr id="21" name="chip_170"/>
+          <p:cNvSpPr/>
+          <p:nvPr/>
+        </p:nvSpPr>
+        <p:spPr>
+          <a:xfrm>
+            <a:off x="6263640" y="1417320"/>
+            <a:ext cx="2560320" cy="477012"/>
+          </a:xfrm>
+          <a:prstGeom prst="roundRect">
+            <a:avLst>
+              <a:gd name="adj" fmla="val 19169"/>
+            </a:avLst>
+          </a:prstGeom>
+          <a:solidFill>
+            <a:srgbClr val="EEE8FB"/>
+          </a:solidFill>
+          <a:ln w="28575">
+            <a:solidFill>
+              <a:srgbClr val="CDBFF3"/>
+            </a:solidFill>
+          </a:ln>
+        </p:spPr>
+        <p:txBody>
+          <a:bodyPr wrap="square" lIns="101600" tIns="0" rIns="101600" bIns="0" rtlCol="0" anchor="ctr">
+            <a:normAutofit/>
+          </a:bodyPr>
+          <a:lstStyle/>
+          <a:p>
+            <a:pPr algn="l" indent="0" marL="0">
+              <a:buNone/>
+            </a:pPr>
+            <a:r>
+              <a:rPr lang="en-US" sz="1200" b="1" dirty="0">
+                <a:solidFill>
+                  <a:srgbClr val="1B2559"/>
+                </a:solidFill>
+                <a:latin typeface="Segoe UI Semibold" pitchFamily="34" charset="0"/>
+                <a:ea typeface="Segoe UI Semibold" pitchFamily="34" charset="-122"/>
+                <a:cs typeface="Segoe UI Semibold" pitchFamily="34" charset="-120"/>
+              </a:rPr>
+              <a:t>→ careless – 'He's careless with his homework.'</a:t>
+            </a:r>
+            <a:endParaRPr lang="en-US" sz="1200" dirty="0"/>
+          </a:p>
+        </p:txBody>
+      </p:sp>
+      <p:sp>
+        <p:nvSpPr>
+          <p:cNvPr id="22" name="bd_171"/>
+          <p:cNvSpPr/>
+          <p:nvPr/>
+        </p:nvSpPr>
+        <p:spPr>
+          <a:xfrm>
+            <a:off x="3246120" y="2032254"/>
             <a:ext cx="329184" cy="329184"/>
           </a:xfrm>
           <a:prstGeom prst="ellipse">
@@ -28249,13 +28066,13 @@
       </p:sp>
       <p:sp>
         <p:nvSpPr>
-          <p:cNvPr id="20" name="gq_171"/>
-          <p:cNvSpPr/>
-          <p:nvPr/>
-        </p:nvSpPr>
-        <p:spPr>
-          <a:xfrm>
-            <a:off x="3657600" y="1417320"/>
+          <p:cNvPr id="23" name="gq_172"/>
+          <p:cNvSpPr/>
+          <p:nvPr/>
+        </p:nvSpPr>
+        <p:spPr>
+          <a:xfrm>
+            <a:off x="3657600" y="1958340"/>
             <a:ext cx="2514600" cy="477012"/>
           </a:xfrm>
           <a:prstGeom prst="roundRect">
@@ -28290,7 +28107,7 @@
                 <a:ea typeface="Segoe UI Semibold" pitchFamily="34" charset="-122"/>
                 <a:cs typeface="Segoe UI Semibold" pitchFamily="34" charset="-120"/>
               </a:rPr>
-              <a:t>careful</a:t>
+              <a:t>cheerful</a:t>
             </a:r>
             <a:endParaRPr lang="en-US" sz="1250" dirty="0"/>
           </a:p>
@@ -28298,13 +28115,13 @@
       </p:sp>
       <p:sp>
         <p:nvSpPr>
-          <p:cNvPr id="21" name="R1_chip172"/>
-          <p:cNvSpPr/>
-          <p:nvPr/>
-        </p:nvSpPr>
-        <p:spPr>
-          <a:xfrm>
-            <a:off x="6263640" y="1417320"/>
+          <p:cNvPr id="24" name="R1_chip173"/>
+          <p:cNvSpPr/>
+          <p:nvPr/>
+        </p:nvSpPr>
+        <p:spPr>
+          <a:xfrm>
+            <a:off x="6263640" y="1958340"/>
             <a:ext cx="2560320" cy="477012"/>
           </a:xfrm>
           <a:prstGeom prst="roundRect">
@@ -28339,7 +28156,7 @@
                 <a:ea typeface="Segoe UI Semibold" pitchFamily="34" charset="-122"/>
                 <a:cs typeface="Segoe UI Semibold" pitchFamily="34" charset="-120"/>
               </a:rPr>
-              <a:t>→ careless – 'He's careless with his homework.'</a:t>
+              <a:t>→ miserable – 'She's never miserable.'</a:t>
             </a:r>
             <a:endParaRPr lang="en-US" sz="1200" dirty="0"/>
           </a:p>
@@ -28347,13 +28164,13 @@
       </p:sp>
       <p:sp>
         <p:nvSpPr>
-          <p:cNvPr id="22" name="bd_173"/>
-          <p:cNvSpPr/>
-          <p:nvPr/>
-        </p:nvSpPr>
-        <p:spPr>
-          <a:xfrm>
-            <a:off x="3246120" y="2032254"/>
+          <p:cNvPr id="25" name="bd_174"/>
+          <p:cNvSpPr/>
+          <p:nvPr/>
+        </p:nvSpPr>
+        <p:spPr>
+          <a:xfrm>
+            <a:off x="3246120" y="2573274"/>
             <a:ext cx="329184" cy="329184"/>
           </a:xfrm>
           <a:prstGeom prst="ellipse">
@@ -28399,13 +28216,13 @@
       </p:sp>
       <p:sp>
         <p:nvSpPr>
-          <p:cNvPr id="23" name="gq_174"/>
-          <p:cNvSpPr/>
-          <p:nvPr/>
-        </p:nvSpPr>
-        <p:spPr>
-          <a:xfrm>
-            <a:off x="3657600" y="1958340"/>
+          <p:cNvPr id="26" name="gq_175"/>
+          <p:cNvSpPr/>
+          <p:nvPr/>
+        </p:nvSpPr>
+        <p:spPr>
+          <a:xfrm>
+            <a:off x="3657600" y="2499360"/>
             <a:ext cx="2514600" cy="477012"/>
           </a:xfrm>
           <a:prstGeom prst="roundRect">
@@ -28440,7 +28257,7 @@
                 <a:ea typeface="Segoe UI Semibold" pitchFamily="34" charset="-122"/>
                 <a:cs typeface="Segoe UI Semibold" pitchFamily="34" charset="-120"/>
               </a:rPr>
-              <a:t>cheerful</a:t>
+              <a:t>rude</a:t>
             </a:r>
             <a:endParaRPr lang="en-US" sz="1250" dirty="0"/>
           </a:p>
@@ -28448,13 +28265,13 @@
       </p:sp>
       <p:sp>
         <p:nvSpPr>
-          <p:cNvPr id="24" name="R2_chip175"/>
-          <p:cNvSpPr/>
-          <p:nvPr/>
-        </p:nvSpPr>
-        <p:spPr>
-          <a:xfrm>
-            <a:off x="6263640" y="1958340"/>
+          <p:cNvPr id="27" name="R2_chip176"/>
+          <p:cNvSpPr/>
+          <p:nvPr/>
+        </p:nvSpPr>
+        <p:spPr>
+          <a:xfrm>
+            <a:off x="6263640" y="2499360"/>
             <a:ext cx="2560320" cy="477012"/>
           </a:xfrm>
           <a:prstGeom prst="roundRect">
@@ -28489,7 +28306,7 @@
                 <a:ea typeface="Segoe UI Semibold" pitchFamily="34" charset="-122"/>
                 <a:cs typeface="Segoe UI Semibold" pitchFamily="34" charset="-120"/>
               </a:rPr>
-              <a:t>→ miserable – 'She's never miserable.'</a:t>
+              <a:t>→ polite – 'He always says please. He's polite.'</a:t>
             </a:r>
             <a:endParaRPr lang="en-US" sz="1200" dirty="0"/>
           </a:p>
@@ -28497,13 +28314,13 @@
       </p:sp>
       <p:sp>
         <p:nvSpPr>
-          <p:cNvPr id="25" name="bd_176"/>
-          <p:cNvSpPr/>
-          <p:nvPr/>
-        </p:nvSpPr>
-        <p:spPr>
-          <a:xfrm>
-            <a:off x="3246120" y="2573274"/>
+          <p:cNvPr id="28" name="bd_177"/>
+          <p:cNvSpPr/>
+          <p:nvPr/>
+        </p:nvSpPr>
+        <p:spPr>
+          <a:xfrm>
+            <a:off x="3246120" y="3114294"/>
             <a:ext cx="329184" cy="329184"/>
           </a:xfrm>
           <a:prstGeom prst="ellipse">
@@ -28549,13 +28366,13 @@
       </p:sp>
       <p:sp>
         <p:nvSpPr>
-          <p:cNvPr id="26" name="gq_177"/>
-          <p:cNvSpPr/>
-          <p:nvPr/>
-        </p:nvSpPr>
-        <p:spPr>
-          <a:xfrm>
-            <a:off x="3657600" y="2499360"/>
+          <p:cNvPr id="29" name="gq_178"/>
+          <p:cNvSpPr/>
+          <p:nvPr/>
+        </p:nvSpPr>
+        <p:spPr>
+          <a:xfrm>
+            <a:off x="3657600" y="3040380"/>
             <a:ext cx="2514600" cy="477012"/>
           </a:xfrm>
           <a:prstGeom prst="roundRect">
@@ -28590,7 +28407,7 @@
                 <a:ea typeface="Segoe UI Semibold" pitchFamily="34" charset="-122"/>
                 <a:cs typeface="Segoe UI Semibold" pitchFamily="34" charset="-120"/>
               </a:rPr>
-              <a:t>rude</a:t>
+              <a:t>serious</a:t>
             </a:r>
             <a:endParaRPr lang="en-US" sz="1250" dirty="0"/>
           </a:p>
@@ -28598,13 +28415,13 @@
       </p:sp>
       <p:sp>
         <p:nvSpPr>
-          <p:cNvPr id="27" name="R3_chip178"/>
-          <p:cNvSpPr/>
-          <p:nvPr/>
-        </p:nvSpPr>
-        <p:spPr>
-          <a:xfrm>
-            <a:off x="6263640" y="2499360"/>
+          <p:cNvPr id="30" name="R3_chip179"/>
+          <p:cNvSpPr/>
+          <p:nvPr/>
+        </p:nvSpPr>
+        <p:spPr>
+          <a:xfrm>
+            <a:off x="6263640" y="3040380"/>
             <a:ext cx="2560320" cy="477012"/>
           </a:xfrm>
           <a:prstGeom prst="roundRect">
@@ -28639,7 +28456,7 @@
                 <a:ea typeface="Segoe UI Semibold" pitchFamily="34" charset="-122"/>
                 <a:cs typeface="Segoe UI Semibold" pitchFamily="34" charset="-120"/>
               </a:rPr>
-              <a:t>→ polite – 'He always says please. He's polite.'</a:t>
+              <a:t>→ funny – 'My dad is really funny.'</a:t>
             </a:r>
             <a:endParaRPr lang="en-US" sz="1200" dirty="0"/>
           </a:p>
@@ -28647,13 +28464,13 @@
       </p:sp>
       <p:sp>
         <p:nvSpPr>
-          <p:cNvPr id="28" name="bd_179"/>
-          <p:cNvSpPr/>
-          <p:nvPr/>
-        </p:nvSpPr>
-        <p:spPr>
-          <a:xfrm>
-            <a:off x="3246120" y="3114294"/>
+          <p:cNvPr id="31" name="bd_180"/>
+          <p:cNvSpPr/>
+          <p:nvPr/>
+        </p:nvSpPr>
+        <p:spPr>
+          <a:xfrm>
+            <a:off x="3246120" y="3655314"/>
             <a:ext cx="329184" cy="329184"/>
           </a:xfrm>
           <a:prstGeom prst="ellipse">
@@ -28699,13 +28516,13 @@
       </p:sp>
       <p:sp>
         <p:nvSpPr>
-          <p:cNvPr id="29" name="gq_180"/>
-          <p:cNvSpPr/>
-          <p:nvPr/>
-        </p:nvSpPr>
-        <p:spPr>
-          <a:xfrm>
-            <a:off x="3657600" y="3040380"/>
+          <p:cNvPr id="32" name="gq_181"/>
+          <p:cNvSpPr/>
+          <p:nvPr/>
+        </p:nvSpPr>
+        <p:spPr>
+          <a:xfrm>
+            <a:off x="3657600" y="3581400"/>
             <a:ext cx="2514600" cy="477012"/>
           </a:xfrm>
           <a:prstGeom prst="roundRect">
@@ -28740,7 +28557,7 @@
                 <a:ea typeface="Segoe UI Semibold" pitchFamily="34" charset="-122"/>
                 <a:cs typeface="Segoe UI Semibold" pitchFamily="34" charset="-120"/>
               </a:rPr>
-              <a:t>serious</a:t>
+              <a:t>shy</a:t>
             </a:r>
             <a:endParaRPr lang="en-US" sz="1250" dirty="0"/>
           </a:p>
@@ -28748,13 +28565,13 @@
       </p:sp>
       <p:sp>
         <p:nvSpPr>
-          <p:cNvPr id="30" name="R4_chip181"/>
-          <p:cNvSpPr/>
-          <p:nvPr/>
-        </p:nvSpPr>
-        <p:spPr>
-          <a:xfrm>
-            <a:off x="6263640" y="3040380"/>
+          <p:cNvPr id="33" name="R4_chip182"/>
+          <p:cNvSpPr/>
+          <p:nvPr/>
+        </p:nvSpPr>
+        <p:spPr>
+          <a:xfrm>
+            <a:off x="6263640" y="3581400"/>
             <a:ext cx="2560320" cy="477012"/>
           </a:xfrm>
           <a:prstGeom prst="roundRect">
@@ -28789,7 +28606,7 @@
                 <a:ea typeface="Segoe UI Semibold" pitchFamily="34" charset="-122"/>
                 <a:cs typeface="Segoe UI Semibold" pitchFamily="34" charset="-120"/>
               </a:rPr>
-              <a:t>→ funny – 'My dad is really funny.'</a:t>
+              <a:t>→ confident – 'She's confident in English class.'</a:t>
             </a:r>
             <a:endParaRPr lang="en-US" sz="1200" dirty="0"/>
           </a:p>
@@ -28797,13 +28614,13 @@
       </p:sp>
       <p:sp>
         <p:nvSpPr>
-          <p:cNvPr id="31" name="bd_182"/>
-          <p:cNvSpPr/>
-          <p:nvPr/>
-        </p:nvSpPr>
-        <p:spPr>
-          <a:xfrm>
-            <a:off x="3246120" y="3655314"/>
+          <p:cNvPr id="34" name="bd_183"/>
+          <p:cNvSpPr/>
+          <p:nvPr/>
+        </p:nvSpPr>
+        <p:spPr>
+          <a:xfrm>
+            <a:off x="3246120" y="4196334"/>
             <a:ext cx="329184" cy="329184"/>
           </a:xfrm>
           <a:prstGeom prst="ellipse">
@@ -28849,13 +28666,13 @@
       </p:sp>
       <p:sp>
         <p:nvSpPr>
-          <p:cNvPr id="32" name="gq_183"/>
-          <p:cNvSpPr/>
-          <p:nvPr/>
-        </p:nvSpPr>
-        <p:spPr>
-          <a:xfrm>
-            <a:off x="3657600" y="3581400"/>
+          <p:cNvPr id="35" name="gq_184"/>
+          <p:cNvSpPr/>
+          <p:nvPr/>
+        </p:nvSpPr>
+        <p:spPr>
+          <a:xfrm>
+            <a:off x="3657600" y="4122420"/>
             <a:ext cx="2514600" cy="477012"/>
           </a:xfrm>
           <a:prstGeom prst="roundRect">
@@ -28890,7 +28707,7 @@
                 <a:ea typeface="Segoe UI Semibold" pitchFamily="34" charset="-122"/>
                 <a:cs typeface="Segoe UI Semibold" pitchFamily="34" charset="-120"/>
               </a:rPr>
-              <a:t>shy</a:t>
+              <a:t>unfriendly</a:t>
             </a:r>
             <a:endParaRPr lang="en-US" sz="1250" dirty="0"/>
           </a:p>
@@ -28898,157 +28715,7 @@
       </p:sp>
       <p:sp>
         <p:nvSpPr>
-          <p:cNvPr id="33" name="R5_chip184"/>
-          <p:cNvSpPr/>
-          <p:nvPr/>
-        </p:nvSpPr>
-        <p:spPr>
-          <a:xfrm>
-            <a:off x="6263640" y="3581400"/>
-            <a:ext cx="2560320" cy="477012"/>
-          </a:xfrm>
-          <a:prstGeom prst="roundRect">
-            <a:avLst>
-              <a:gd name="adj" fmla="val 19169"/>
-            </a:avLst>
-          </a:prstGeom>
-          <a:solidFill>
-            <a:srgbClr val="FFE3EE"/>
-          </a:solidFill>
-          <a:ln w="28575">
-            <a:solidFill>
-              <a:srgbClr val="F7A6C4"/>
-            </a:solidFill>
-          </a:ln>
-        </p:spPr>
-        <p:txBody>
-          <a:bodyPr wrap="square" lIns="101600" tIns="0" rIns="101600" bIns="0" rtlCol="0" anchor="ctr">
-            <a:normAutofit/>
-          </a:bodyPr>
-          <a:lstStyle/>
-          <a:p>
-            <a:pPr algn="l" indent="0" marL="0">
-              <a:buNone/>
-            </a:pPr>
-            <a:r>
-              <a:rPr lang="en-US" sz="1200" b="1" dirty="0">
-                <a:solidFill>
-                  <a:srgbClr val="1B2559"/>
-                </a:solidFill>
-                <a:latin typeface="Segoe UI Semibold" pitchFamily="34" charset="0"/>
-                <a:ea typeface="Segoe UI Semibold" pitchFamily="34" charset="-122"/>
-                <a:cs typeface="Segoe UI Semibold" pitchFamily="34" charset="-120"/>
-              </a:rPr>
-              <a:t>→ confident – 'She's confident in English class.'</a:t>
-            </a:r>
-            <a:endParaRPr lang="en-US" sz="1200" dirty="0"/>
-          </a:p>
-        </p:txBody>
-      </p:sp>
-      <p:sp>
-        <p:nvSpPr>
-          <p:cNvPr id="34" name="bd_185"/>
-          <p:cNvSpPr/>
-          <p:nvPr/>
-        </p:nvSpPr>
-        <p:spPr>
-          <a:xfrm>
-            <a:off x="3246120" y="4196334"/>
-            <a:ext cx="329184" cy="329184"/>
-          </a:xfrm>
-          <a:prstGeom prst="ellipse">
-            <a:avLst/>
-          </a:prstGeom>
-          <a:solidFill>
-            <a:srgbClr val="2F8DE4"/>
-          </a:solidFill>
-          <a:ln w="28575">
-            <a:solidFill>
-              <a:srgbClr val="A9D3F5"/>
-            </a:solidFill>
-          </a:ln>
-          <a:effectLst>
-            <a:outerShdw sx="100000" sy="100000" kx="0" ky="0" algn="bl" rotWithShape="0" blurRad="88900" dist="31750" dir="5400000">
-              <a:srgbClr val="1B2559">
-                <a:alpha val="15000"/>
-              </a:srgbClr>
-            </a:outerShdw>
-          </a:effectLst>
-        </p:spPr>
-        <p:txBody>
-          <a:bodyPr wrap="square" lIns="0" tIns="0" rIns="0" bIns="0" rtlCol="0" anchor="ctr"/>
-          <a:lstStyle/>
-          <a:p>
-            <a:pPr algn="ctr" indent="0" marL="0">
-              <a:buNone/>
-            </a:pPr>
-            <a:r>
-              <a:rPr lang="en-US" sz="1100" dirty="0">
-                <a:solidFill>
-                  <a:srgbClr val="FFFFFF"/>
-                </a:solidFill>
-                <a:latin typeface="Arial Rounded MT Bold" pitchFamily="34" charset="0"/>
-                <a:ea typeface="Arial Rounded MT Bold" pitchFamily="34" charset="-122"/>
-                <a:cs typeface="Arial Rounded MT Bold" pitchFamily="34" charset="-120"/>
-              </a:rPr>
-              <a:t>6</a:t>
-            </a:r>
-            <a:endParaRPr lang="en-US" sz="1100" dirty="0"/>
-          </a:p>
-        </p:txBody>
-      </p:sp>
-      <p:sp>
-        <p:nvSpPr>
-          <p:cNvPr id="35" name="gq_186"/>
-          <p:cNvSpPr/>
-          <p:nvPr/>
-        </p:nvSpPr>
-        <p:spPr>
-          <a:xfrm>
-            <a:off x="3657600" y="4122420"/>
-            <a:ext cx="2514600" cy="477012"/>
-          </a:xfrm>
-          <a:prstGeom prst="roundRect">
-            <a:avLst>
-              <a:gd name="adj" fmla="val 19169"/>
-            </a:avLst>
-          </a:prstGeom>
-          <a:solidFill>
-            <a:srgbClr val="FFFFFF"/>
-          </a:solidFill>
-          <a:ln w="28575">
-            <a:solidFill>
-              <a:srgbClr val="A9D3F5"/>
-            </a:solidFill>
-          </a:ln>
-        </p:spPr>
-        <p:txBody>
-          <a:bodyPr wrap="square" lIns="101600" tIns="0" rIns="101600" bIns="0" rtlCol="0" anchor="ctr">
-            <a:normAutofit/>
-          </a:bodyPr>
-          <a:lstStyle/>
-          <a:p>
-            <a:pPr indent="0" marL="0">
-              <a:buNone/>
-            </a:pPr>
-            <a:r>
-              <a:rPr lang="en-US" sz="1250" dirty="0">
-                <a:solidFill>
-                  <a:srgbClr val="1B2559"/>
-                </a:solidFill>
-                <a:latin typeface="Segoe UI Semibold" pitchFamily="34" charset="0"/>
-                <a:ea typeface="Segoe UI Semibold" pitchFamily="34" charset="-122"/>
-                <a:cs typeface="Segoe UI Semibold" pitchFamily="34" charset="-120"/>
-              </a:rPr>
-              <a:t>unfriendly</a:t>
-            </a:r>
-            <a:endParaRPr lang="en-US" sz="1250" dirty="0"/>
-          </a:p>
-        </p:txBody>
-      </p:sp>
-      <p:sp>
-        <p:nvSpPr>
-          <p:cNvPr id="36" name="R6_chip187"/>
+          <p:cNvPr id="36" name="R5_chip185"/>
           <p:cNvSpPr/>
           <p:nvPr/>
         </p:nvSpPr>
@@ -29137,7 +28804,7 @@
                                           </p:stCondLst>
                                         </p:cTn>
                                         <p:tgtEl>
-                                          <p:spTgt spid="21"/>
+                                          <p:spTgt spid="24"/>
                                         </p:tgtEl>
                                         <p:attrNameLst>
                                           <p:attrName>style.visibility</p:attrName>
@@ -29151,7 +28818,7 @@
                                       <p:cBhvr>
                                         <p:cTn id="7" dur="400"/>
                                         <p:tgtEl>
-                                          <p:spTgt spid="21"/>
+                                          <p:spTgt spid="24"/>
                                         </p:tgtEl>
                                       </p:cBhvr>
                                     </p:animEffect>
@@ -29190,7 +28857,7 @@
                                           </p:stCondLst>
                                         </p:cTn>
                                         <p:tgtEl>
-                                          <p:spTgt spid="24"/>
+                                          <p:spTgt spid="27"/>
                                         </p:tgtEl>
                                         <p:attrNameLst>
                                           <p:attrName>style.visibility</p:attrName>
@@ -29204,7 +28871,7 @@
                                       <p:cBhvr>
                                         <p:cTn id="12" dur="400"/>
                                         <p:tgtEl>
-                                          <p:spTgt spid="24"/>
+                                          <p:spTgt spid="27"/>
                                         </p:tgtEl>
                                       </p:cBhvr>
                                     </p:animEffect>
@@ -29243,7 +28910,7 @@
                                           </p:stCondLst>
                                         </p:cTn>
                                         <p:tgtEl>
-                                          <p:spTgt spid="27"/>
+                                          <p:spTgt spid="30"/>
                                         </p:tgtEl>
                                         <p:attrNameLst>
                                           <p:attrName>style.visibility</p:attrName>
@@ -29257,7 +28924,7 @@
                                       <p:cBhvr>
                                         <p:cTn id="17" dur="400"/>
                                         <p:tgtEl>
-                                          <p:spTgt spid="27"/>
+                                          <p:spTgt spid="30"/>
                                         </p:tgtEl>
                                       </p:cBhvr>
                                     </p:animEffect>
@@ -29296,7 +28963,7 @@
                                           </p:stCondLst>
                                         </p:cTn>
                                         <p:tgtEl>
-                                          <p:spTgt spid="30"/>
+                                          <p:spTgt spid="33"/>
                                         </p:tgtEl>
                                         <p:attrNameLst>
                                           <p:attrName>style.visibility</p:attrName>
@@ -29310,7 +28977,7 @@
                                       <p:cBhvr>
                                         <p:cTn id="22" dur="400"/>
                                         <p:tgtEl>
-                                          <p:spTgt spid="30"/>
+                                          <p:spTgt spid="33"/>
                                         </p:tgtEl>
                                       </p:cBhvr>
                                     </p:animEffect>
@@ -29349,7 +29016,7 @@
                                           </p:stCondLst>
                                         </p:cTn>
                                         <p:tgtEl>
-                                          <p:spTgt spid="33"/>
+                                          <p:spTgt spid="36"/>
                                         </p:tgtEl>
                                         <p:attrNameLst>
                                           <p:attrName>style.visibility</p:attrName>
@@ -29362,59 +29029,6 @@
                                     <p:animEffect transition="in" filter="fade">
                                       <p:cBhvr>
                                         <p:cTn id="27" dur="400"/>
-                                        <p:tgtEl>
-                                          <p:spTgt spid="33"/>
-                                        </p:tgtEl>
-                                      </p:cBhvr>
-                                    </p:animEffect>
-                                  </p:childTnLst>
-                                </p:cTn>
-                              </p:par>
-                            </p:childTnLst>
-                          </p:cTn>
-                        </p:par>
-                      </p:childTnLst>
-                    </p:cTn>
-                  </p:par>
-                  <p:par>
-                    <p:cTn id="28" fill="hold">
-                      <p:stCondLst>
-                        <p:cond delay="indefinite"/>
-                      </p:stCondLst>
-                      <p:childTnLst>
-                        <p:par>
-                          <p:cTn id="29" fill="hold">
-                            <p:stCondLst>
-                              <p:cond delay="0"/>
-                            </p:stCondLst>
-                            <p:childTnLst>
-                              <p:par>
-                                <p:cTn id="30" presetID="10" presetClass="entr" presetSubtype="0" fill="hold" nodeType="clickEffect">
-                                  <p:stCondLst>
-                                    <p:cond delay="0"/>
-                                  </p:stCondLst>
-                                  <p:childTnLst>
-                                    <p:set>
-                                      <p:cBhvr>
-                                        <p:cTn id="31" dur="1" fill="hold">
-                                          <p:stCondLst>
-                                            <p:cond delay="0"/>
-                                          </p:stCondLst>
-                                        </p:cTn>
-                                        <p:tgtEl>
-                                          <p:spTgt spid="36"/>
-                                        </p:tgtEl>
-                                        <p:attrNameLst>
-                                          <p:attrName>style.visibility</p:attrName>
-                                        </p:attrNameLst>
-                                      </p:cBhvr>
-                                      <p:to>
-                                        <p:strVal val="visible"/>
-                                      </p:to>
-                                    </p:set>
-                                    <p:animEffect transition="in" filter="fade">
-                                      <p:cBhvr>
-                                        <p:cTn id="32" dur="400"/>
                                         <p:tgtEl>
                                           <p:spTgt spid="36"/>
                                         </p:tgtEl>
@@ -29487,7 +29101,7 @@
       </p:grpSpPr>
       <p:sp>
         <p:nvSpPr>
-          <p:cNvPr id="3" name="bd_188"/>
+          <p:cNvPr id="3" name="bd_186"/>
           <p:cNvSpPr/>
           <p:nvPr/>
         </p:nvSpPr>
@@ -29539,7 +29153,7 @@
       </p:sp>
       <p:pic>
         <p:nvPicPr>
-          <p:cNvPr id="4" name="brY_189" descr="/home/claude/lls-course/v2/assets/brush-yellow.png">    </p:cNvPr>
+          <p:cNvPr id="4" name="brY_187" descr="/home/claude/lls-course/v2/assets/brush-yellow.png">    </p:cNvPr>
           <p:cNvPicPr>
             <a:picLocks noChangeAspect="1"/>
           </p:cNvPicPr>
@@ -29563,7 +29177,7 @@
       </p:pic>
       <p:sp>
         <p:nvSpPr>
-          <p:cNvPr id="5" name="title_190"/>
+          <p:cNvPr id="5" name="title_188"/>
           <p:cNvSpPr/>
           <p:nvPr/>
         </p:nvSpPr>
@@ -29604,7 +29218,7 @@
       </p:sp>
       <p:pic>
         <p:nvPicPr>
-          <p:cNvPr id="6" name="brP_191" descr="/home/claude/lls-course/v2/assets/brush-pink.png">    </p:cNvPr>
+          <p:cNvPr id="6" name="brP_189" descr="/home/claude/lls-course/v2/assets/brush-pink.png">    </p:cNvPr>
           <p:cNvPicPr>
             <a:picLocks noChangeAspect="1"/>
           </p:cNvPicPr>
@@ -29628,7 +29242,7 @@
       </p:pic>
       <p:sp>
         <p:nvSpPr>
-          <p:cNvPr id="7" name="ins_192"/>
+          <p:cNvPr id="7" name="ins_190"/>
           <p:cNvSpPr/>
           <p:nvPr/>
         </p:nvSpPr>
@@ -29669,7 +29283,7 @@
       </p:sp>
       <p:sp>
         <p:nvSpPr>
-          <p:cNvPr id="8" name="insIT_193"/>
+          <p:cNvPr id="8" name="insIT_191"/>
           <p:cNvSpPr/>
           <p:nvPr/>
         </p:nvSpPr>
@@ -29710,7 +29324,7 @@
       </p:sp>
       <p:sp>
         <p:nvSpPr>
-          <p:cNvPr id="9" name="cmd_194"/>
+          <p:cNvPr id="9" name="cmd_192"/>
           <p:cNvSpPr/>
           <p:nvPr/>
         </p:nvSpPr>
@@ -29741,12 +29355,12 @@
           </a:effectLst>
         </p:spPr>
         <p:txBody>
-          <a:bodyPr wrap="square" lIns="101600" tIns="0" rIns="101600" bIns="0" rtlCol="0" anchor="ctr">
+          <a:bodyPr wrap="square" lIns="76200" tIns="0" rIns="76200" bIns="0" rtlCol="0" anchor="ctr">
             <a:normAutofit/>
           </a:bodyPr>
           <a:lstStyle/>
           <a:p>
-            <a:pPr indent="0" marL="0">
+            <a:pPr algn="ctr" indent="0" marL="0">
               <a:buNone/>
             </a:pPr>
             <a:r>
@@ -29757,7 +29371,7 @@
               </a:rPr>
               <a:t>💬 </a:t>
             </a:r>
-            <a:pPr indent="0" marL="0">
+            <a:pPr algn="ctr" indent="0" marL="0">
               <a:buNone/>
             </a:pPr>
             <a:r>
@@ -29771,7 +29385,7 @@
               </a:rPr>
               <a:t>TALK</a:t>
             </a:r>
-            <a:pPr indent="0" marL="0">
+            <a:pPr algn="ctr" indent="0" marL="0">
               <a:buNone/>
             </a:pPr>
             <a:r>
@@ -29791,13 +29405,13 @@
       </p:sp>
       <p:sp>
         <p:nvSpPr>
-          <p:cNvPr id="10" name="meta_195"/>
-          <p:cNvSpPr/>
-          <p:nvPr/>
-        </p:nvSpPr>
-        <p:spPr>
-          <a:xfrm>
-            <a:off x="6510528" y="493776"/>
+          <p:cNvPr id="10" name="meta_193"/>
+          <p:cNvSpPr/>
+          <p:nvPr/>
+        </p:nvSpPr>
+        <p:spPr>
+          <a:xfrm>
+            <a:off x="6510528" y="548640"/>
             <a:ext cx="1901952" cy="274320"/>
           </a:xfrm>
           <a:prstGeom prst="roundRect">
@@ -29840,13 +29454,13 @@
       </p:sp>
       <p:sp>
         <p:nvSpPr>
-          <p:cNvPr id="11" name="tag_196"/>
-          <p:cNvSpPr/>
-          <p:nvPr/>
-        </p:nvSpPr>
-        <p:spPr>
-          <a:xfrm>
-            <a:off x="6510528" y="804672"/>
+          <p:cNvPr id="11" name="tag_194"/>
+          <p:cNvSpPr/>
+          <p:nvPr/>
+        </p:nvSpPr>
+        <p:spPr>
+          <a:xfrm>
+            <a:off x="6510528" y="914400"/>
             <a:ext cx="1901952" cy="274320"/>
           </a:xfrm>
           <a:prstGeom prst="roundRect">
@@ -29903,7 +29517,7 @@
       </p:sp>
       <p:pic>
         <p:nvPicPr>
-          <p:cNvPr id="12" name="logo_197" descr="/home/claude/lls-course/v2/img/logo.png">    </p:cNvPr>
+          <p:cNvPr id="12" name="logo_195" descr="/home/claude/lls-course/v2/img/logo.png">    </p:cNvPr>
           <p:cNvPicPr>
             <a:picLocks noChangeAspect="1"/>
           </p:cNvPicPr>
@@ -29927,7 +29541,7 @@
       </p:pic>
       <p:sp>
         <p:nvSpPr>
-          <p:cNvPr id="13" name="foot_198"/>
+          <p:cNvPr id="13" name="foot_196"/>
           <p:cNvSpPr/>
           <p:nvPr/>
         </p:nvSpPr>
@@ -29966,7 +29580,7 @@
       </p:sp>
       <p:sp>
         <p:nvSpPr>
-          <p:cNvPr id="14" name="cd_199"/>
+          <p:cNvPr id="14" name="cd_197"/>
           <p:cNvSpPr/>
           <p:nvPr/>
         </p:nvSpPr>
@@ -30000,7 +29614,7 @@
       </p:sp>
       <p:sp>
         <p:nvSpPr>
-          <p:cNvPr id="15" name="ii_200"/>
+          <p:cNvPr id="15" name="ii_198"/>
           <p:cNvSpPr/>
           <p:nvPr/>
         </p:nvSpPr>
@@ -30036,7 +29650,7 @@
       </p:sp>
       <p:sp>
         <p:nvSpPr>
-          <p:cNvPr id="16" name="ih_201"/>
+          <p:cNvPr id="16" name="ih_199"/>
           <p:cNvSpPr/>
           <p:nvPr/>
         </p:nvSpPr>
@@ -30075,7 +29689,7 @@
       </p:sp>
       <p:sp>
         <p:nvSpPr>
-          <p:cNvPr id="17" name="il_202"/>
+          <p:cNvPr id="17" name="il_200"/>
           <p:cNvSpPr/>
           <p:nvPr/>
         </p:nvSpPr>
@@ -30216,7 +29830,7 @@
       </p:sp>
       <p:sp>
         <p:nvSpPr>
-          <p:cNvPr id="18" name="R1_qb203"/>
+          <p:cNvPr id="18" name="R1_qb201"/>
           <p:cNvSpPr/>
           <p:nvPr/>
         </p:nvSpPr>
@@ -30268,7 +29882,7 @@
       </p:sp>
       <p:sp>
         <p:nvSpPr>
-          <p:cNvPr id="19" name="R1_sq204"/>
+          <p:cNvPr id="19" name="R1_sq202"/>
           <p:cNvSpPr/>
           <p:nvPr/>
         </p:nvSpPr>
@@ -30341,7 +29955,7 @@
       </p:sp>
       <p:sp>
         <p:nvSpPr>
-          <p:cNvPr id="20" name="R2_qb205"/>
+          <p:cNvPr id="20" name="R2_qb203"/>
           <p:cNvSpPr/>
           <p:nvPr/>
         </p:nvSpPr>
@@ -30393,7 +30007,7 @@
       </p:sp>
       <p:sp>
         <p:nvSpPr>
-          <p:cNvPr id="21" name="R2_sq206"/>
+          <p:cNvPr id="21" name="R2_sq204"/>
           <p:cNvSpPr/>
           <p:nvPr/>
         </p:nvSpPr>
@@ -30466,7 +30080,7 @@
       </p:sp>
       <p:sp>
         <p:nvSpPr>
-          <p:cNvPr id="22" name="R3_qb207"/>
+          <p:cNvPr id="22" name="R3_qb205"/>
           <p:cNvSpPr/>
           <p:nvPr/>
         </p:nvSpPr>
@@ -30518,7 +30132,7 @@
       </p:sp>
       <p:sp>
         <p:nvSpPr>
-          <p:cNvPr id="23" name="R3_sq208"/>
+          <p:cNvPr id="23" name="R3_sq206"/>
           <p:cNvSpPr/>
           <p:nvPr/>
         </p:nvSpPr>
@@ -30591,7 +30205,7 @@
       </p:sp>
       <p:sp>
         <p:nvSpPr>
-          <p:cNvPr id="24" name="R4_qb209"/>
+          <p:cNvPr id="24" name="R4_qb207"/>
           <p:cNvSpPr/>
           <p:nvPr/>
         </p:nvSpPr>
@@ -30643,7 +30257,7 @@
       </p:sp>
       <p:sp>
         <p:nvSpPr>
-          <p:cNvPr id="25" name="R4_sq210"/>
+          <p:cNvPr id="25" name="R4_sq208"/>
           <p:cNvSpPr/>
           <p:nvPr/>
         </p:nvSpPr>
@@ -31140,7 +30754,7 @@
       </p:grpSpPr>
       <p:sp>
         <p:nvSpPr>
-          <p:cNvPr id="3" name="bd_211"/>
+          <p:cNvPr id="3" name="bd_209"/>
           <p:cNvSpPr/>
           <p:nvPr/>
         </p:nvSpPr>
@@ -31192,7 +30806,7 @@
       </p:sp>
       <p:pic>
         <p:nvPicPr>
-          <p:cNvPr id="4" name="brY_212" descr="/home/claude/lls-course/v2/assets/brush-yellow.png">    </p:cNvPr>
+          <p:cNvPr id="4" name="brY_210" descr="/home/claude/lls-course/v2/assets/brush-yellow.png">    </p:cNvPr>
           <p:cNvPicPr>
             <a:picLocks noChangeAspect="1"/>
           </p:cNvPicPr>
@@ -31216,7 +30830,7 @@
       </p:pic>
       <p:sp>
         <p:nvSpPr>
-          <p:cNvPr id="5" name="title_213"/>
+          <p:cNvPr id="5" name="title_211"/>
           <p:cNvSpPr/>
           <p:nvPr/>
         </p:nvSpPr>
@@ -31257,7 +30871,7 @@
       </p:sp>
       <p:pic>
         <p:nvPicPr>
-          <p:cNvPr id="6" name="brP_214" descr="/home/claude/lls-course/v2/assets/brush-pink.png">    </p:cNvPr>
+          <p:cNvPr id="6" name="brP_212" descr="/home/claude/lls-course/v2/assets/brush-pink.png">    </p:cNvPr>
           <p:cNvPicPr>
             <a:picLocks noChangeAspect="1"/>
           </p:cNvPicPr>
@@ -31281,7 +30895,7 @@
       </p:pic>
       <p:sp>
         <p:nvSpPr>
-          <p:cNvPr id="7" name="ins_215"/>
+          <p:cNvPr id="7" name="ins_213"/>
           <p:cNvSpPr/>
           <p:nvPr/>
         </p:nvSpPr>
@@ -31322,7 +30936,7 @@
       </p:sp>
       <p:sp>
         <p:nvSpPr>
-          <p:cNvPr id="8" name="insIT_216"/>
+          <p:cNvPr id="8" name="insIT_214"/>
           <p:cNvSpPr/>
           <p:nvPr/>
         </p:nvSpPr>
@@ -31363,7 +30977,7 @@
       </p:sp>
       <p:sp>
         <p:nvSpPr>
-          <p:cNvPr id="9" name="cmd_217"/>
+          <p:cNvPr id="9" name="cmd_215"/>
           <p:cNvSpPr/>
           <p:nvPr/>
         </p:nvSpPr>
@@ -31394,12 +31008,12 @@
           </a:effectLst>
         </p:spPr>
         <p:txBody>
-          <a:bodyPr wrap="square" lIns="101600" tIns="0" rIns="101600" bIns="0" rtlCol="0" anchor="ctr">
+          <a:bodyPr wrap="square" lIns="76200" tIns="0" rIns="76200" bIns="0" rtlCol="0" anchor="ctr">
             <a:normAutofit/>
           </a:bodyPr>
           <a:lstStyle/>
           <a:p>
-            <a:pPr indent="0" marL="0">
+            <a:pPr algn="ctr" indent="0" marL="0">
               <a:buNone/>
             </a:pPr>
             <a:r>
@@ -31410,7 +31024,7 @@
               </a:rPr>
               <a:t>👀 </a:t>
             </a:r>
-            <a:pPr indent="0" marL="0">
+            <a:pPr algn="ctr" indent="0" marL="0">
               <a:buNone/>
             </a:pPr>
             <a:r>
@@ -31424,7 +31038,7 @@
               </a:rPr>
               <a:t>READ</a:t>
             </a:r>
-            <a:pPr indent="0" marL="0">
+            <a:pPr algn="ctr" indent="0" marL="0">
               <a:buNone/>
             </a:pPr>
             <a:r>
@@ -31436,51 +31050,9 @@
                 <a:ea typeface="Segoe UI Semibold" pitchFamily="34" charset="-122"/>
                 <a:cs typeface="Segoe UI Semibold" pitchFamily="34" charset="-120"/>
               </a:rPr>
-              <a:t>  LEGGI</a:t>
-            </a:r>
-            <a:endParaRPr lang="en-US" sz="950" dirty="0"/>
-          </a:p>
-        </p:txBody>
-      </p:sp>
-      <p:sp>
-        <p:nvSpPr>
-          <p:cNvPr id="10" name="cmd_218"/>
-          <p:cNvSpPr/>
-          <p:nvPr/>
-        </p:nvSpPr>
-        <p:spPr>
-          <a:xfrm>
-            <a:off x="6510528" y="493776"/>
-            <a:ext cx="1901952" cy="274320"/>
-          </a:xfrm>
-          <a:prstGeom prst="roundRect">
-            <a:avLst>
-              <a:gd name="adj" fmla="val 50000"/>
-            </a:avLst>
-          </a:prstGeom>
-          <a:solidFill>
-            <a:srgbClr val="FFFFFF"/>
-          </a:solidFill>
-          <a:ln w="28575">
-            <a:solidFill>
-              <a:srgbClr val="F7A6C4"/>
-            </a:solidFill>
-          </a:ln>
-          <a:effectLst>
-            <a:outerShdw sx="100000" sy="100000" kx="0" ky="0" algn="bl" rotWithShape="0" blurRad="88900" dist="31750" dir="5400000">
-              <a:srgbClr val="1B2559">
-                <a:alpha val="8000"/>
-              </a:srgbClr>
-            </a:outerShdw>
-          </a:effectLst>
-        </p:spPr>
-        <p:txBody>
-          <a:bodyPr wrap="square" lIns="101600" tIns="0" rIns="101600" bIns="0" rtlCol="0" anchor="ctr">
-            <a:normAutofit/>
-          </a:bodyPr>
-          <a:lstStyle/>
-          <a:p>
-            <a:pPr indent="0" marL="0">
+              <a:t>  →  </a:t>
+            </a:r>
+            <a:pPr algn="ctr" indent="0" marL="0">
               <a:buNone/>
             </a:pPr>
             <a:r>
@@ -31491,7 +31063,7 @@
               </a:rPr>
               <a:t>💬 </a:t>
             </a:r>
-            <a:pPr indent="0" marL="0">
+            <a:pPr algn="ctr" indent="0" marL="0">
               <a:buNone/>
             </a:pPr>
             <a:r>
@@ -31505,33 +31077,19 @@
               </a:rPr>
               <a:t>TALK</a:t>
             </a:r>
-            <a:pPr indent="0" marL="0">
-              <a:buNone/>
-            </a:pPr>
-            <a:r>
-              <a:rPr lang="en-US" sz="950" dirty="0">
-                <a:solidFill>
-                  <a:srgbClr val="5B6785"/>
-                </a:solidFill>
-                <a:latin typeface="Segoe UI Semibold" pitchFamily="34" charset="0"/>
-                <a:ea typeface="Segoe UI Semibold" pitchFamily="34" charset="-122"/>
-                <a:cs typeface="Segoe UI Semibold" pitchFamily="34" charset="-120"/>
-              </a:rPr>
-              <a:t>  PARLA</a:t>
-            </a:r>
             <a:endParaRPr lang="en-US" sz="950" dirty="0"/>
           </a:p>
         </p:txBody>
       </p:sp>
       <p:sp>
         <p:nvSpPr>
-          <p:cNvPr id="11" name="meta_219"/>
-          <p:cNvSpPr/>
-          <p:nvPr/>
-        </p:nvSpPr>
-        <p:spPr>
-          <a:xfrm>
-            <a:off x="6510528" y="804672"/>
+          <p:cNvPr id="10" name="meta_216"/>
+          <p:cNvSpPr/>
+          <p:nvPr/>
+        </p:nvSpPr>
+        <p:spPr>
+          <a:xfrm>
+            <a:off x="6510528" y="548640"/>
             <a:ext cx="1901952" cy="274320"/>
           </a:xfrm>
           <a:prstGeom prst="roundRect">
@@ -31574,13 +31132,13 @@
       </p:sp>
       <p:sp>
         <p:nvSpPr>
-          <p:cNvPr id="12" name="tag_220"/>
-          <p:cNvSpPr/>
-          <p:nvPr/>
-        </p:nvSpPr>
-        <p:spPr>
-          <a:xfrm>
-            <a:off x="6510528" y="1115568"/>
+          <p:cNvPr id="11" name="tag_217"/>
+          <p:cNvSpPr/>
+          <p:nvPr/>
+        </p:nvSpPr>
+        <p:spPr>
+          <a:xfrm>
+            <a:off x="6510528" y="914400"/>
             <a:ext cx="1901952" cy="274320"/>
           </a:xfrm>
           <a:prstGeom prst="roundRect">
@@ -31637,7 +31195,7 @@
       </p:sp>
       <p:pic>
         <p:nvPicPr>
-          <p:cNvPr id="13" name="logo_221" descr="/home/claude/lls-course/v2/img/logo.png">    </p:cNvPr>
+          <p:cNvPr id="12" name="logo_218" descr="/home/claude/lls-course/v2/img/logo.png">    </p:cNvPr>
           <p:cNvPicPr>
             <a:picLocks noChangeAspect="1"/>
           </p:cNvPicPr>
@@ -31661,7 +31219,7 @@
       </p:pic>
       <p:sp>
         <p:nvSpPr>
-          <p:cNvPr id="14" name="foot_222"/>
+          <p:cNvPr id="13" name="foot_219"/>
           <p:cNvSpPr/>
           <p:nvPr/>
         </p:nvSpPr>
@@ -31700,7 +31258,7 @@
       </p:sp>
       <p:sp>
         <p:nvSpPr>
-          <p:cNvPr id="15" name="pf_223"/>
+          <p:cNvPr id="14" name="pf_220"/>
           <p:cNvSpPr/>
           <p:nvPr/>
         </p:nvSpPr>
@@ -31734,7 +31292,7 @@
       </p:sp>
       <p:pic>
         <p:nvPicPr>
-          <p:cNvPr id="16" name="ph_224" descr="/home/claude/lls-course/v2/cache/prep1_students_jpg_649x297_31.png">    </p:cNvPr>
+          <p:cNvPr id="15" name="ph_221" descr="/home/claude/lls-course/v2/cache/prep1_students_jpg_649x297_31.png">    </p:cNvPr>
           <p:cNvPicPr>
             <a:picLocks noChangeAspect="1"/>
           </p:cNvPicPr>
@@ -31758,7 +31316,7 @@
       </p:pic>
       <p:sp>
         <p:nvSpPr>
-          <p:cNvPr id="17" name="cd_225"/>
+          <p:cNvPr id="16" name="cd_222"/>
           <p:cNvSpPr/>
           <p:nvPr/>
         </p:nvSpPr>
@@ -31792,7 +31350,7 @@
       </p:sp>
       <p:sp>
         <p:nvSpPr>
-          <p:cNvPr id="18" name="ii_226"/>
+          <p:cNvPr id="17" name="ii_223"/>
           <p:cNvSpPr/>
           <p:nvPr/>
         </p:nvSpPr>
@@ -31828,7 +31386,7 @@
       </p:sp>
       <p:sp>
         <p:nvSpPr>
-          <p:cNvPr id="19" name="ih_227"/>
+          <p:cNvPr id="18" name="ih_224"/>
           <p:cNvSpPr/>
           <p:nvPr/>
         </p:nvSpPr>
@@ -31867,7 +31425,7 @@
       </p:sp>
       <p:sp>
         <p:nvSpPr>
-          <p:cNvPr id="20" name="il_228"/>
+          <p:cNvPr id="19" name="il_225"/>
           <p:cNvSpPr/>
           <p:nvPr/>
         </p:nvSpPr>
@@ -31984,7 +31542,7 @@
       </p:sp>
       <p:sp>
         <p:nvSpPr>
-          <p:cNvPr id="21" name="R1_qb229"/>
+          <p:cNvPr id="20" name="R1_qb226"/>
           <p:cNvSpPr/>
           <p:nvPr/>
         </p:nvSpPr>
@@ -32036,7 +31594,7 @@
       </p:sp>
       <p:sp>
         <p:nvSpPr>
-          <p:cNvPr id="22" name="R1_sq230"/>
+          <p:cNvPr id="21" name="R1_sq227"/>
           <p:cNvSpPr/>
           <p:nvPr/>
         </p:nvSpPr>
@@ -32109,7 +31667,7 @@
       </p:sp>
       <p:sp>
         <p:nvSpPr>
-          <p:cNvPr id="23" name="R2_qb231"/>
+          <p:cNvPr id="22" name="R2_qb228"/>
           <p:cNvSpPr/>
           <p:nvPr/>
         </p:nvSpPr>
@@ -32161,7 +31719,7 @@
       </p:sp>
       <p:sp>
         <p:nvSpPr>
-          <p:cNvPr id="24" name="R2_sq232"/>
+          <p:cNvPr id="23" name="R2_sq229"/>
           <p:cNvSpPr/>
           <p:nvPr/>
         </p:nvSpPr>
@@ -32234,7 +31792,7 @@
       </p:sp>
       <p:sp>
         <p:nvSpPr>
-          <p:cNvPr id="25" name="R3_qb233"/>
+          <p:cNvPr id="24" name="R3_qb230"/>
           <p:cNvSpPr/>
           <p:nvPr/>
         </p:nvSpPr>
@@ -32286,7 +31844,7 @@
       </p:sp>
       <p:sp>
         <p:nvSpPr>
-          <p:cNvPr id="26" name="R3_sq234"/>
+          <p:cNvPr id="25" name="R3_sq231"/>
           <p:cNvSpPr/>
           <p:nvPr/>
         </p:nvSpPr>
@@ -32399,7 +31957,7 @@
                                           </p:stCondLst>
                                         </p:cTn>
                                         <p:tgtEl>
-                                          <p:spTgt spid="21"/>
+                                          <p:spTgt spid="20"/>
                                         </p:tgtEl>
                                         <p:attrNameLst>
                                           <p:attrName>style.visibility</p:attrName>
@@ -32413,7 +31971,7 @@
                                       <p:cBhvr>
                                         <p:cTn id="7" dur="400"/>
                                         <p:tgtEl>
-                                          <p:spTgt spid="21"/>
+                                          <p:spTgt spid="20"/>
                                         </p:tgtEl>
                                       </p:cBhvr>
                                     </p:animEffect>
@@ -32434,7 +31992,7 @@
                                           </p:stCondLst>
                                         </p:cTn>
                                         <p:tgtEl>
-                                          <p:spTgt spid="22"/>
+                                          <p:spTgt spid="21"/>
                                         </p:tgtEl>
                                         <p:attrNameLst>
                                           <p:attrName>style.visibility</p:attrName>
@@ -32448,7 +32006,7 @@
                                       <p:cBhvr>
                                         <p:cTn id="10" dur="400"/>
                                         <p:tgtEl>
-                                          <p:spTgt spid="22"/>
+                                          <p:spTgt spid="21"/>
                                         </p:tgtEl>
                                       </p:cBhvr>
                                     </p:animEffect>
@@ -32487,7 +32045,7 @@
                                           </p:stCondLst>
                                         </p:cTn>
                                         <p:tgtEl>
-                                          <p:spTgt spid="23"/>
+                                          <p:spTgt spid="22"/>
                                         </p:tgtEl>
                                         <p:attrNameLst>
                                           <p:attrName>style.visibility</p:attrName>
@@ -32501,7 +32059,7 @@
                                       <p:cBhvr>
                                         <p:cTn id="15" dur="400"/>
                                         <p:tgtEl>
-                                          <p:spTgt spid="23"/>
+                                          <p:spTgt spid="22"/>
                                         </p:tgtEl>
                                       </p:cBhvr>
                                     </p:animEffect>
@@ -32522,7 +32080,7 @@
                                           </p:stCondLst>
                                         </p:cTn>
                                         <p:tgtEl>
-                                          <p:spTgt spid="24"/>
+                                          <p:spTgt spid="23"/>
                                         </p:tgtEl>
                                         <p:attrNameLst>
                                           <p:attrName>style.visibility</p:attrName>
@@ -32536,7 +32094,7 @@
                                       <p:cBhvr>
                                         <p:cTn id="18" dur="400"/>
                                         <p:tgtEl>
-                                          <p:spTgt spid="24"/>
+                                          <p:spTgt spid="23"/>
                                         </p:tgtEl>
                                       </p:cBhvr>
                                     </p:animEffect>
@@ -32575,7 +32133,7 @@
                                           </p:stCondLst>
                                         </p:cTn>
                                         <p:tgtEl>
-                                          <p:spTgt spid="25"/>
+                                          <p:spTgt spid="24"/>
                                         </p:tgtEl>
                                         <p:attrNameLst>
                                           <p:attrName>style.visibility</p:attrName>
@@ -32589,7 +32147,7 @@
                                       <p:cBhvr>
                                         <p:cTn id="23" dur="400"/>
                                         <p:tgtEl>
-                                          <p:spTgt spid="25"/>
+                                          <p:spTgt spid="24"/>
                                         </p:tgtEl>
                                       </p:cBhvr>
                                     </p:animEffect>
@@ -32610,7 +32168,7 @@
                                           </p:stCondLst>
                                         </p:cTn>
                                         <p:tgtEl>
-                                          <p:spTgt spid="26"/>
+                                          <p:spTgt spid="25"/>
                                         </p:tgtEl>
                                         <p:attrNameLst>
                                           <p:attrName>style.visibility</p:attrName>
@@ -32624,7 +32182,7 @@
                                       <p:cBhvr>
                                         <p:cTn id="26" dur="400"/>
                                         <p:tgtEl>
-                                          <p:spTgt spid="26"/>
+                                          <p:spTgt spid="25"/>
                                         </p:tgtEl>
                                       </p:cBhvr>
                                     </p:animEffect>
@@ -32695,7 +32253,7 @@
       </p:grpSpPr>
       <p:sp>
         <p:nvSpPr>
-          <p:cNvPr id="3" name="bd_235"/>
+          <p:cNvPr id="3" name="bd_232"/>
           <p:cNvSpPr/>
           <p:nvPr/>
         </p:nvSpPr>
@@ -32747,7 +32305,7 @@
       </p:sp>
       <p:pic>
         <p:nvPicPr>
-          <p:cNvPr id="4" name="brY_236" descr="/home/claude/lls-course/v2/assets/brush-yellow.png">    </p:cNvPr>
+          <p:cNvPr id="4" name="brY_233" descr="/home/claude/lls-course/v2/assets/brush-yellow.png">    </p:cNvPr>
           <p:cNvPicPr>
             <a:picLocks noChangeAspect="1"/>
           </p:cNvPicPr>
@@ -32771,7 +32329,7 @@
       </p:pic>
       <p:sp>
         <p:nvSpPr>
-          <p:cNvPr id="5" name="title_237"/>
+          <p:cNvPr id="5" name="title_234"/>
           <p:cNvSpPr/>
           <p:nvPr/>
         </p:nvSpPr>
@@ -32812,7 +32370,7 @@
       </p:sp>
       <p:pic>
         <p:nvPicPr>
-          <p:cNvPr id="6" name="brP_238" descr="/home/claude/lls-course/v2/assets/brush-pink.png">    </p:cNvPr>
+          <p:cNvPr id="6" name="brP_235" descr="/home/claude/lls-course/v2/assets/brush-pink.png">    </p:cNvPr>
           <p:cNvPicPr>
             <a:picLocks noChangeAspect="1"/>
           </p:cNvPicPr>
@@ -32836,7 +32394,7 @@
       </p:pic>
       <p:sp>
         <p:nvSpPr>
-          <p:cNvPr id="7" name="ins_239"/>
+          <p:cNvPr id="7" name="ins_236"/>
           <p:cNvSpPr/>
           <p:nvPr/>
         </p:nvSpPr>
@@ -32877,7 +32435,7 @@
       </p:sp>
       <p:sp>
         <p:nvSpPr>
-          <p:cNvPr id="8" name="insIT_240"/>
+          <p:cNvPr id="8" name="insIT_237"/>
           <p:cNvSpPr/>
           <p:nvPr/>
         </p:nvSpPr>
@@ -32918,7 +32476,7 @@
       </p:sp>
       <p:sp>
         <p:nvSpPr>
-          <p:cNvPr id="9" name="cmd_241"/>
+          <p:cNvPr id="9" name="cmd_238"/>
           <p:cNvSpPr/>
           <p:nvPr/>
         </p:nvSpPr>
@@ -32949,12 +32507,12 @@
           </a:effectLst>
         </p:spPr>
         <p:txBody>
-          <a:bodyPr wrap="square" lIns="101600" tIns="0" rIns="101600" bIns="0" rtlCol="0" anchor="ctr">
+          <a:bodyPr wrap="square" lIns="76200" tIns="0" rIns="76200" bIns="0" rtlCol="0" anchor="ctr">
             <a:normAutofit/>
           </a:bodyPr>
           <a:lstStyle/>
           <a:p>
-            <a:pPr indent="0" marL="0">
+            <a:pPr algn="ctr" indent="0" marL="0">
               <a:buNone/>
             </a:pPr>
             <a:r>
@@ -32965,7 +32523,7 @@
               </a:rPr>
               <a:t>👀 </a:t>
             </a:r>
-            <a:pPr indent="0" marL="0">
+            <a:pPr algn="ctr" indent="0" marL="0">
               <a:buNone/>
             </a:pPr>
             <a:r>
@@ -32979,7 +32537,7 @@
               </a:rPr>
               <a:t>READ</a:t>
             </a:r>
-            <a:pPr indent="0" marL="0">
+            <a:pPr algn="ctr" indent="0" marL="0">
               <a:buNone/>
             </a:pPr>
             <a:r>
@@ -32999,13 +32557,13 @@
       </p:sp>
       <p:sp>
         <p:nvSpPr>
-          <p:cNvPr id="10" name="meta_242"/>
-          <p:cNvSpPr/>
-          <p:nvPr/>
-        </p:nvSpPr>
-        <p:spPr>
-          <a:xfrm>
-            <a:off x="6510528" y="493776"/>
+          <p:cNvPr id="10" name="meta_239"/>
+          <p:cNvSpPr/>
+          <p:nvPr/>
+        </p:nvSpPr>
+        <p:spPr>
+          <a:xfrm>
+            <a:off x="6510528" y="548640"/>
             <a:ext cx="1901952" cy="274320"/>
           </a:xfrm>
           <a:prstGeom prst="roundRect">
@@ -33048,13 +32606,13 @@
       </p:sp>
       <p:sp>
         <p:nvSpPr>
-          <p:cNvPr id="11" name="tag_243"/>
-          <p:cNvSpPr/>
-          <p:nvPr/>
-        </p:nvSpPr>
-        <p:spPr>
-          <a:xfrm>
-            <a:off x="6510528" y="804672"/>
+          <p:cNvPr id="11" name="tag_240"/>
+          <p:cNvSpPr/>
+          <p:nvPr/>
+        </p:nvSpPr>
+        <p:spPr>
+          <a:xfrm>
+            <a:off x="6510528" y="914400"/>
             <a:ext cx="1901952" cy="274320"/>
           </a:xfrm>
           <a:prstGeom prst="roundRect">
@@ -33111,7 +32669,7 @@
       </p:sp>
       <p:pic>
         <p:nvPicPr>
-          <p:cNvPr id="12" name="logo_244" descr="/home/claude/lls-course/v2/img/logo.png">    </p:cNvPr>
+          <p:cNvPr id="12" name="logo_241" descr="/home/claude/lls-course/v2/img/logo.png">    </p:cNvPr>
           <p:cNvPicPr>
             <a:picLocks noChangeAspect="1"/>
           </p:cNvPicPr>
@@ -33135,7 +32693,7 @@
       </p:pic>
       <p:sp>
         <p:nvSpPr>
-          <p:cNvPr id="13" name="foot_245"/>
+          <p:cNvPr id="13" name="foot_242"/>
           <p:cNvSpPr/>
           <p:nvPr/>
         </p:nvSpPr>
@@ -33174,7 +32732,7 @@
       </p:sp>
       <p:sp>
         <p:nvSpPr>
-          <p:cNvPr id="14" name="cd_246"/>
+          <p:cNvPr id="14" name="cd_243"/>
           <p:cNvSpPr/>
           <p:nvPr/>
         </p:nvSpPr>
@@ -33208,7 +32766,7 @@
       </p:sp>
       <p:sp>
         <p:nvSpPr>
-          <p:cNvPr id="15" name="rd_247"/>
+          <p:cNvPr id="15" name="rd_244"/>
           <p:cNvSpPr/>
           <p:nvPr/>
         </p:nvSpPr>
@@ -33276,7 +32834,7 @@
       </p:sp>
       <p:sp>
         <p:nvSpPr>
-          <p:cNvPr id="16" name="rd_248"/>
+          <p:cNvPr id="16" name="rd_245"/>
           <p:cNvSpPr/>
           <p:nvPr/>
         </p:nvSpPr>
@@ -33344,7 +32902,7 @@
       </p:sp>
       <p:sp>
         <p:nvSpPr>
-          <p:cNvPr id="17" name="rdl_249"/>
+          <p:cNvPr id="17" name="rdl_246"/>
           <p:cNvSpPr/>
           <p:nvPr/>
         </p:nvSpPr>
@@ -33367,7 +32925,7 @@
       </p:sp>
       <p:sp>
         <p:nvSpPr>
-          <p:cNvPr id="18" name="cd_250"/>
+          <p:cNvPr id="18" name="cd_247"/>
           <p:cNvSpPr/>
           <p:nvPr/>
         </p:nvSpPr>
@@ -33401,7 +32959,7 @@
       </p:sp>
       <p:sp>
         <p:nvSpPr>
-          <p:cNvPr id="19" name="ii_251"/>
+          <p:cNvPr id="19" name="ii_248"/>
           <p:cNvSpPr/>
           <p:nvPr/>
         </p:nvSpPr>
@@ -33437,7 +32995,7 @@
       </p:sp>
       <p:sp>
         <p:nvSpPr>
-          <p:cNvPr id="20" name="ih_252"/>
+          <p:cNvPr id="20" name="ih_249"/>
           <p:cNvSpPr/>
           <p:nvPr/>
         </p:nvSpPr>
@@ -33476,7 +33034,7 @@
       </p:sp>
       <p:sp>
         <p:nvSpPr>
-          <p:cNvPr id="21" name="il_253"/>
+          <p:cNvPr id="21" name="il_250"/>
           <p:cNvSpPr/>
           <p:nvPr/>
         </p:nvSpPr>
@@ -33593,7 +33151,7 @@
       </p:sp>
       <p:sp>
         <p:nvSpPr>
-          <p:cNvPr id="22" name="R1_chip254"/>
+          <p:cNvPr id="22" name="R1_chip251"/>
           <p:cNvSpPr/>
           <p:nvPr/>
         </p:nvSpPr>

--- a/materials/PREP/PREP_1A_All_about_me.pptx
+++ b/materials/PREP/PREP_1A_All_about_me.pptx
@@ -19177,11 +19177,11 @@
         <p:spPr>
           <a:xfrm>
             <a:off x="320040" y="1417320"/>
-            <a:ext cx="2697480" cy="2307336"/>
+            <a:ext cx="2697480" cy="1645920"/>
           </a:xfrm>
           <a:prstGeom prst="roundRect">
             <a:avLst>
-              <a:gd name="adj" fmla="val 5548"/>
+              <a:gd name="adj" fmla="val 7778"/>
             </a:avLst>
           </a:prstGeom>
           <a:solidFill>
@@ -19286,7 +19286,7 @@
         <p:spPr>
           <a:xfrm>
             <a:off x="886968" y="1911096"/>
-            <a:ext cx="2039112" cy="1740408"/>
+            <a:ext cx="2039112" cy="1078992"/>
           </a:xfrm>
           <a:prstGeom prst="rect">
             <a:avLst/>
@@ -19316,7 +19316,7 @@
                 <a:ea typeface="Segoe UI Semibold" pitchFamily="34" charset="-122"/>
                 <a:cs typeface="Segoe UI Semibold" pitchFamily="34" charset="-120"/>
               </a:rPr>
-              <a:t>30 seconds per round. Write as many words as you can.</a:t>
+              <a:t>Spell it right = 1 point.</a:t>
             </a:r>
             <a:endParaRPr lang="en-US" sz="1200" dirty="0"/>
           </a:p>
@@ -19340,34 +19340,10 @@
                 <a:ea typeface="Segoe UI Semibold" pitchFamily="34" charset="-122"/>
                 <a:cs typeface="Segoe UI Semibold" pitchFamily="34" charset="-120"/>
               </a:rPr>
-              <a:t>Spell it right = 1 point.</a:t>
+              <a:t>Say it in a sentence = 1 more point!</a:t>
             </a:r>
             <a:endParaRPr lang="en-US" sz="1200" dirty="0"/>
           </a:p>
-          <a:p>
-            <a:pPr marL="152400" indent="-152400">
-              <a:spcBef>
-                <a:spcPts val="600"/>
-              </a:spcBef>
-              <a:spcAft>
-                <a:spcPts val="200"/>
-              </a:spcAft>
-              <a:buSzPct val="100000"/>
-              <a:buChar char="•"/>
-            </a:pPr>
-            <a:r>
-              <a:rPr lang="en-US" sz="1200" dirty="0">
-                <a:solidFill>
-                  <a:srgbClr val="1B2559"/>
-                </a:solidFill>
-                <a:latin typeface="Segoe UI Semibold" pitchFamily="34" charset="0"/>
-                <a:ea typeface="Segoe UI Semibold" pitchFamily="34" charset="-122"/>
-                <a:cs typeface="Segoe UI Semibold" pitchFamily="34" charset="-120"/>
-              </a:rPr>
-              <a:t>Say it in a sentence = 1 more point!</a:t>
-            </a:r>
-            <a:endParaRPr lang="en-US" sz="1200" dirty="0"/>
-          </a:p>
         </p:txBody>
       </p:sp>
       <p:sp>
@@ -19378,7 +19354,7 @@
         </p:nvSpPr>
         <p:spPr>
           <a:xfrm rot="-180000">
-            <a:off x="502920" y="3907536"/>
+            <a:off x="502920" y="3246120"/>
             <a:ext cx="2286000" cy="777240"/>
           </a:xfrm>
           <a:prstGeom prst="rect">
